--- a/Sentinel_AI_Final_Presentation.pptx
+++ b/Sentinel_AI_Final_Presentation.pptx
@@ -1951,8 +1951,8 @@
         </p:nvSpPr>
         <p:spPr>
           <a:xfrm>
-            <a:off x="914400" y="731520"/>
-            <a:ext cx="10360152" cy="365760"/>
+            <a:off x="457200" y="457200"/>
+            <a:ext cx="8229600" cy="320040"/>
           </a:xfrm>
           <a:prstGeom prst="rect">
             <a:avLst/>
@@ -1968,7 +1968,7 @@
               <a:buNone/>
             </a:pPr>
             <a:r>
-              <a:rPr lang="en-US" sz="1200" b="1" dirty="0">
+              <a:rPr lang="en-US" sz="1100" b="1" dirty="0">
                 <a:solidFill>
                   <a:srgbClr val="0284C7"/>
                 </a:solidFill>
@@ -1978,7 +1978,7 @@
               </a:rPr>
               <a:t>CAPSTONE PROJECT &amp; INDUSTRY EVALUATION</a:t>
             </a:r>
-            <a:endParaRPr lang="en-US" sz="1200" dirty="0"/>
+            <a:endParaRPr lang="en-US" sz="1100" dirty="0"/>
           </a:p>
         </p:txBody>
       </p:sp>
@@ -1990,8 +1990,8 @@
         </p:nvSpPr>
         <p:spPr>
           <a:xfrm>
-            <a:off x="914400" y="1188720"/>
-            <a:ext cx="10360152" cy="914400"/>
+            <a:off x="457200" y="868680"/>
+            <a:ext cx="8229600" cy="685800"/>
           </a:xfrm>
           <a:prstGeom prst="rect">
             <a:avLst/>
@@ -2007,7 +2007,7 @@
               <a:buNone/>
             </a:pPr>
             <a:r>
-              <a:rPr lang="en-US" sz="4400" b="1" dirty="0">
+              <a:rPr lang="en-US" sz="3600" b="1" dirty="0">
                 <a:solidFill>
                   <a:srgbClr val="FFFFFF"/>
                 </a:solidFill>
@@ -2017,7 +2017,7 @@
               </a:rPr>
               <a:t>SENTINEL AI</a:t>
             </a:r>
-            <a:endParaRPr lang="en-US" sz="4400" dirty="0"/>
+            <a:endParaRPr lang="en-US" sz="3600" dirty="0"/>
           </a:p>
         </p:txBody>
       </p:sp>
@@ -2029,8 +2029,8 @@
         </p:nvSpPr>
         <p:spPr>
           <a:xfrm>
-            <a:off x="914400" y="2103120"/>
-            <a:ext cx="10360152" cy="457200"/>
+            <a:off x="457200" y="1554480"/>
+            <a:ext cx="8229600" cy="365760"/>
           </a:xfrm>
           <a:prstGeom prst="rect">
             <a:avLst/>
@@ -2046,7 +2046,7 @@
               <a:buNone/>
             </a:pPr>
             <a:r>
-              <a:rPr lang="en-US" sz="1800" dirty="0">
+              <a:rPr lang="en-US" sz="1400" dirty="0">
                 <a:solidFill>
                   <a:srgbClr val="CBD5E1"/>
                 </a:solidFill>
@@ -2056,7 +2056,7 @@
               </a:rPr>
               <a:t>Intelligent Endpoint Threat Detection and Response (EDR) Platform</a:t>
             </a:r>
-            <a:endParaRPr lang="en-US" sz="1800" dirty="0"/>
+            <a:endParaRPr lang="en-US" sz="1400" dirty="0"/>
           </a:p>
         </p:txBody>
       </p:sp>
@@ -2068,8 +2068,8 @@
         </p:nvSpPr>
         <p:spPr>
           <a:xfrm>
-            <a:off x="914400" y="2606040"/>
-            <a:ext cx="10360152" cy="365760"/>
+            <a:off x="457200" y="1965960"/>
+            <a:ext cx="8229600" cy="320040"/>
           </a:xfrm>
           <a:prstGeom prst="rect">
             <a:avLst/>
@@ -2085,7 +2085,7 @@
               <a:buNone/>
             </a:pPr>
             <a:r>
-              <a:rPr lang="en-US" sz="1100" b="1" dirty="0">
+              <a:rPr lang="en-US" sz="950" b="1" dirty="0">
                 <a:solidFill>
                   <a:srgbClr val="0284C7"/>
                 </a:solidFill>
@@ -2095,7 +2095,7 @@
               </a:rPr>
               <a:t>Tauri v2  |  Rust  |  React 18  |  TypeScript  |  ONNX Runtime ML  |  SQLite  |  MITRE ATT&amp;CK</a:t>
             </a:r>
-            <a:endParaRPr lang="en-US" sz="1100" dirty="0"/>
+            <a:endParaRPr lang="en-US" sz="950" dirty="0"/>
           </a:p>
         </p:txBody>
       </p:sp>
@@ -2107,12 +2107,12 @@
         </p:nvSpPr>
         <p:spPr>
           <a:xfrm>
-            <a:off x="914400" y="3474720"/>
-            <a:ext cx="2423160" cy="1097280"/>
+            <a:off x="457200" y="2606040"/>
+            <a:ext cx="1920240" cy="2011680"/>
           </a:xfrm>
           <a:prstGeom prst="roundRect">
             <a:avLst>
-              <a:gd name="adj" fmla="val 8333"/>
+              <a:gd name="adj" fmla="val 4762"/>
             </a:avLst>
           </a:prstGeom>
           <a:solidFill>
@@ -2134,8 +2134,8 @@
         </p:nvSpPr>
         <p:spPr>
           <a:xfrm>
-            <a:off x="914400" y="3657600"/>
-            <a:ext cx="2423160" cy="320040"/>
+            <a:off x="457200" y="2834640"/>
+            <a:ext cx="1920240" cy="365760"/>
           </a:xfrm>
           <a:prstGeom prst="rect">
             <a:avLst/>
@@ -2151,7 +2151,43 @@
               <a:buNone/>
             </a:pPr>
             <a:r>
-              <a:rPr lang="en-US" sz="1300" b="1" dirty="0">
+              <a:rPr lang="en-US" sz="2000" dirty="0">
+                <a:solidFill>
+                  <a:srgbClr val="000000"/>
+                </a:solidFill>
+              </a:rPr>
+              <a:t>👤</a:t>
+            </a:r>
+            <a:endParaRPr lang="en-US" sz="2000" dirty="0"/>
+          </a:p>
+        </p:txBody>
+      </p:sp>
+      <p:sp>
+        <p:nvSpPr>
+          <p:cNvPr id="8" name="Text 6"/>
+          <p:cNvSpPr/>
+          <p:nvPr/>
+        </p:nvSpPr>
+        <p:spPr>
+          <a:xfrm>
+            <a:off x="457200" y="3337560"/>
+            <a:ext cx="1920240" cy="320040"/>
+          </a:xfrm>
+          <a:prstGeom prst="rect">
+            <a:avLst/>
+          </a:prstGeom>
+          <a:noFill/>
+          <a:ln/>
+        </p:spPr>
+        <p:txBody>
+          <a:bodyPr wrap="square" rtlCol="0" anchor="ctr"/>
+          <a:lstStyle/>
+          <a:p>
+            <a:pPr algn="ctr" indent="0" marL="0">
+              <a:buNone/>
+            </a:pPr>
+            <a:r>
+              <a:rPr lang="en-US" sz="1100" b="1" dirty="0">
                 <a:solidFill>
                   <a:srgbClr val="FFFFFF"/>
                 </a:solidFill>
@@ -2161,20 +2197,20 @@
               </a:rPr>
               <a:t>Tanmay Gawali</a:t>
             </a:r>
-            <a:endParaRPr lang="en-US" sz="1300" dirty="0"/>
-          </a:p>
-        </p:txBody>
-      </p:sp>
-      <p:sp>
-        <p:nvSpPr>
-          <p:cNvPr id="8" name="Text 6"/>
-          <p:cNvSpPr/>
-          <p:nvPr/>
-        </p:nvSpPr>
-        <p:spPr>
-          <a:xfrm>
-            <a:off x="914400" y="4023360"/>
-            <a:ext cx="2423160" cy="365760"/>
+            <a:endParaRPr lang="en-US" sz="1100" dirty="0"/>
+          </a:p>
+        </p:txBody>
+      </p:sp>
+      <p:sp>
+        <p:nvSpPr>
+          <p:cNvPr id="9" name="Text 7"/>
+          <p:cNvSpPr/>
+          <p:nvPr/>
+        </p:nvSpPr>
+        <p:spPr>
+          <a:xfrm>
+            <a:off x="457200" y="3703320"/>
+            <a:ext cx="1920240" cy="640080"/>
           </a:xfrm>
           <a:prstGeom prst="rect">
             <a:avLst/>
@@ -2190,7 +2226,7 @@
               <a:buNone/>
             </a:pPr>
             <a:r>
-              <a:rPr lang="en-US" sz="1000" dirty="0">
+              <a:rPr lang="en-US" sz="900" dirty="0">
                 <a:solidFill>
                   <a:srgbClr val="94A3B8"/>
                 </a:solidFill>
@@ -2200,24 +2236,24 @@
               </a:rPr>
               <a:t>Team Lead &amp; AI Architect</a:t>
             </a:r>
-            <a:endParaRPr lang="en-US" sz="1000" dirty="0"/>
-          </a:p>
-        </p:txBody>
-      </p:sp>
-      <p:sp>
-        <p:nvSpPr>
-          <p:cNvPr id="9" name="Shape 7"/>
-          <p:cNvSpPr/>
-          <p:nvPr/>
-        </p:nvSpPr>
-        <p:spPr>
-          <a:xfrm>
-            <a:off x="3520440" y="3474720"/>
-            <a:ext cx="2423160" cy="1097280"/>
+            <a:endParaRPr lang="en-US" sz="900" dirty="0"/>
+          </a:p>
+        </p:txBody>
+      </p:sp>
+      <p:sp>
+        <p:nvSpPr>
+          <p:cNvPr id="10" name="Shape 8"/>
+          <p:cNvSpPr/>
+          <p:nvPr/>
+        </p:nvSpPr>
+        <p:spPr>
+          <a:xfrm>
+            <a:off x="2560320" y="2606040"/>
+            <a:ext cx="1920240" cy="2011680"/>
           </a:xfrm>
           <a:prstGeom prst="roundRect">
             <a:avLst>
-              <a:gd name="adj" fmla="val 8333"/>
+              <a:gd name="adj" fmla="val 4762"/>
             </a:avLst>
           </a:prstGeom>
           <a:solidFill>
@@ -2233,14 +2269,14 @@
       </p:sp>
       <p:sp>
         <p:nvSpPr>
-          <p:cNvPr id="10" name="Text 8"/>
-          <p:cNvSpPr/>
-          <p:nvPr/>
-        </p:nvSpPr>
-        <p:spPr>
-          <a:xfrm>
-            <a:off x="3520440" y="3657600"/>
-            <a:ext cx="2423160" cy="320040"/>
+          <p:cNvPr id="11" name="Text 9"/>
+          <p:cNvSpPr/>
+          <p:nvPr/>
+        </p:nvSpPr>
+        <p:spPr>
+          <a:xfrm>
+            <a:off x="2560320" y="2834640"/>
+            <a:ext cx="1920240" cy="365760"/>
           </a:xfrm>
           <a:prstGeom prst="rect">
             <a:avLst/>
@@ -2256,7 +2292,43 @@
               <a:buNone/>
             </a:pPr>
             <a:r>
-              <a:rPr lang="en-US" sz="1300" b="1" dirty="0">
+              <a:rPr lang="en-US" sz="2000" dirty="0">
+                <a:solidFill>
+                  <a:srgbClr val="000000"/>
+                </a:solidFill>
+              </a:rPr>
+              <a:t>👤</a:t>
+            </a:r>
+            <a:endParaRPr lang="en-US" sz="2000" dirty="0"/>
+          </a:p>
+        </p:txBody>
+      </p:sp>
+      <p:sp>
+        <p:nvSpPr>
+          <p:cNvPr id="12" name="Text 10"/>
+          <p:cNvSpPr/>
+          <p:nvPr/>
+        </p:nvSpPr>
+        <p:spPr>
+          <a:xfrm>
+            <a:off x="2560320" y="3337560"/>
+            <a:ext cx="1920240" cy="320040"/>
+          </a:xfrm>
+          <a:prstGeom prst="rect">
+            <a:avLst/>
+          </a:prstGeom>
+          <a:noFill/>
+          <a:ln/>
+        </p:spPr>
+        <p:txBody>
+          <a:bodyPr wrap="square" rtlCol="0" anchor="ctr"/>
+          <a:lstStyle/>
+          <a:p>
+            <a:pPr algn="ctr" indent="0" marL="0">
+              <a:buNone/>
+            </a:pPr>
+            <a:r>
+              <a:rPr lang="en-US" sz="1100" b="1" dirty="0">
                 <a:solidFill>
                   <a:srgbClr val="FFFFFF"/>
                 </a:solidFill>
@@ -2266,20 +2338,20 @@
               </a:rPr>
               <a:t>Divij Kulkarni</a:t>
             </a:r>
-            <a:endParaRPr lang="en-US" sz="1300" dirty="0"/>
-          </a:p>
-        </p:txBody>
-      </p:sp>
-      <p:sp>
-        <p:nvSpPr>
-          <p:cNvPr id="11" name="Text 9"/>
-          <p:cNvSpPr/>
-          <p:nvPr/>
-        </p:nvSpPr>
-        <p:spPr>
-          <a:xfrm>
-            <a:off x="3520440" y="4023360"/>
-            <a:ext cx="2423160" cy="365760"/>
+            <a:endParaRPr lang="en-US" sz="1100" dirty="0"/>
+          </a:p>
+        </p:txBody>
+      </p:sp>
+      <p:sp>
+        <p:nvSpPr>
+          <p:cNvPr id="13" name="Text 11"/>
+          <p:cNvSpPr/>
+          <p:nvPr/>
+        </p:nvSpPr>
+        <p:spPr>
+          <a:xfrm>
+            <a:off x="2560320" y="3703320"/>
+            <a:ext cx="1920240" cy="640080"/>
           </a:xfrm>
           <a:prstGeom prst="rect">
             <a:avLst/>
@@ -2295,7 +2367,7 @@
               <a:buNone/>
             </a:pPr>
             <a:r>
-              <a:rPr lang="en-US" sz="1000" dirty="0">
+              <a:rPr lang="en-US" sz="900" dirty="0">
                 <a:solidFill>
                   <a:srgbClr val="94A3B8"/>
                 </a:solidFill>
@@ -2305,24 +2377,24 @@
               </a:rPr>
               <a:t>Rust Core &amp; Systems Engineer</a:t>
             </a:r>
-            <a:endParaRPr lang="en-US" sz="1000" dirty="0"/>
-          </a:p>
-        </p:txBody>
-      </p:sp>
-      <p:sp>
-        <p:nvSpPr>
-          <p:cNvPr id="12" name="Shape 10"/>
-          <p:cNvSpPr/>
-          <p:nvPr/>
-        </p:nvSpPr>
-        <p:spPr>
-          <a:xfrm>
-            <a:off x="6126480" y="3474720"/>
-            <a:ext cx="2423160" cy="1097280"/>
+            <a:endParaRPr lang="en-US" sz="900" dirty="0"/>
+          </a:p>
+        </p:txBody>
+      </p:sp>
+      <p:sp>
+        <p:nvSpPr>
+          <p:cNvPr id="14" name="Shape 12"/>
+          <p:cNvSpPr/>
+          <p:nvPr/>
+        </p:nvSpPr>
+        <p:spPr>
+          <a:xfrm>
+            <a:off x="4663440" y="2606040"/>
+            <a:ext cx="1920240" cy="2011680"/>
           </a:xfrm>
           <a:prstGeom prst="roundRect">
             <a:avLst>
-              <a:gd name="adj" fmla="val 8333"/>
+              <a:gd name="adj" fmla="val 4762"/>
             </a:avLst>
           </a:prstGeom>
           <a:solidFill>
@@ -2338,14 +2410,14 @@
       </p:sp>
       <p:sp>
         <p:nvSpPr>
-          <p:cNvPr id="13" name="Text 11"/>
-          <p:cNvSpPr/>
-          <p:nvPr/>
-        </p:nvSpPr>
-        <p:spPr>
-          <a:xfrm>
-            <a:off x="6126480" y="3657600"/>
-            <a:ext cx="2423160" cy="320040"/>
+          <p:cNvPr id="15" name="Text 13"/>
+          <p:cNvSpPr/>
+          <p:nvPr/>
+        </p:nvSpPr>
+        <p:spPr>
+          <a:xfrm>
+            <a:off x="4663440" y="2834640"/>
+            <a:ext cx="1920240" cy="365760"/>
           </a:xfrm>
           <a:prstGeom prst="rect">
             <a:avLst/>
@@ -2361,7 +2433,43 @@
               <a:buNone/>
             </a:pPr>
             <a:r>
-              <a:rPr lang="en-US" sz="1300" b="1" dirty="0">
+              <a:rPr lang="en-US" sz="2000" dirty="0">
+                <a:solidFill>
+                  <a:srgbClr val="000000"/>
+                </a:solidFill>
+              </a:rPr>
+              <a:t>👤</a:t>
+            </a:r>
+            <a:endParaRPr lang="en-US" sz="2000" dirty="0"/>
+          </a:p>
+        </p:txBody>
+      </p:sp>
+      <p:sp>
+        <p:nvSpPr>
+          <p:cNvPr id="16" name="Text 14"/>
+          <p:cNvSpPr/>
+          <p:nvPr/>
+        </p:nvSpPr>
+        <p:spPr>
+          <a:xfrm>
+            <a:off x="4663440" y="3337560"/>
+            <a:ext cx="1920240" cy="320040"/>
+          </a:xfrm>
+          <a:prstGeom prst="rect">
+            <a:avLst/>
+          </a:prstGeom>
+          <a:noFill/>
+          <a:ln/>
+        </p:spPr>
+        <p:txBody>
+          <a:bodyPr wrap="square" rtlCol="0" anchor="ctr"/>
+          <a:lstStyle/>
+          <a:p>
+            <a:pPr algn="ctr" indent="0" marL="0">
+              <a:buNone/>
+            </a:pPr>
+            <a:r>
+              <a:rPr lang="en-US" sz="1100" b="1" dirty="0">
                 <a:solidFill>
                   <a:srgbClr val="FFFFFF"/>
                 </a:solidFill>
@@ -2371,20 +2479,20 @@
               </a:rPr>
               <a:t>Soham Wadale</a:t>
             </a:r>
-            <a:endParaRPr lang="en-US" sz="1300" dirty="0"/>
-          </a:p>
-        </p:txBody>
-      </p:sp>
-      <p:sp>
-        <p:nvSpPr>
-          <p:cNvPr id="14" name="Text 12"/>
-          <p:cNvSpPr/>
-          <p:nvPr/>
-        </p:nvSpPr>
-        <p:spPr>
-          <a:xfrm>
-            <a:off x="6126480" y="4023360"/>
-            <a:ext cx="2423160" cy="365760"/>
+            <a:endParaRPr lang="en-US" sz="1100" dirty="0"/>
+          </a:p>
+        </p:txBody>
+      </p:sp>
+      <p:sp>
+        <p:nvSpPr>
+          <p:cNvPr id="17" name="Text 15"/>
+          <p:cNvSpPr/>
+          <p:nvPr/>
+        </p:nvSpPr>
+        <p:spPr>
+          <a:xfrm>
+            <a:off x="4663440" y="3703320"/>
+            <a:ext cx="1920240" cy="640080"/>
           </a:xfrm>
           <a:prstGeom prst="rect">
             <a:avLst/>
@@ -2400,7 +2508,7 @@
               <a:buNone/>
             </a:pPr>
             <a:r>
-              <a:rPr lang="en-US" sz="1000" dirty="0">
+              <a:rPr lang="en-US" sz="900" dirty="0">
                 <a:solidFill>
                   <a:srgbClr val="94A3B8"/>
                 </a:solidFill>
@@ -2410,24 +2518,24 @@
               </a:rPr>
               <a:t>Network Telemetry Engineer</a:t>
             </a:r>
-            <a:endParaRPr lang="en-US" sz="1000" dirty="0"/>
-          </a:p>
-        </p:txBody>
-      </p:sp>
-      <p:sp>
-        <p:nvSpPr>
-          <p:cNvPr id="15" name="Shape 13"/>
-          <p:cNvSpPr/>
-          <p:nvPr/>
-        </p:nvSpPr>
-        <p:spPr>
-          <a:xfrm>
-            <a:off x="8732520" y="3474720"/>
-            <a:ext cx="2423160" cy="1097280"/>
+            <a:endParaRPr lang="en-US" sz="900" dirty="0"/>
+          </a:p>
+        </p:txBody>
+      </p:sp>
+      <p:sp>
+        <p:nvSpPr>
+          <p:cNvPr id="18" name="Shape 16"/>
+          <p:cNvSpPr/>
+          <p:nvPr/>
+        </p:nvSpPr>
+        <p:spPr>
+          <a:xfrm>
+            <a:off x="6766560" y="2606040"/>
+            <a:ext cx="1920240" cy="2011680"/>
           </a:xfrm>
           <a:prstGeom prst="roundRect">
             <a:avLst>
-              <a:gd name="adj" fmla="val 8333"/>
+              <a:gd name="adj" fmla="val 4762"/>
             </a:avLst>
           </a:prstGeom>
           <a:solidFill>
@@ -2443,14 +2551,14 @@
       </p:sp>
       <p:sp>
         <p:nvSpPr>
-          <p:cNvPr id="16" name="Text 14"/>
-          <p:cNvSpPr/>
-          <p:nvPr/>
-        </p:nvSpPr>
-        <p:spPr>
-          <a:xfrm>
-            <a:off x="8732520" y="3657600"/>
-            <a:ext cx="2423160" cy="320040"/>
+          <p:cNvPr id="19" name="Text 17"/>
+          <p:cNvSpPr/>
+          <p:nvPr/>
+        </p:nvSpPr>
+        <p:spPr>
+          <a:xfrm>
+            <a:off x="6766560" y="2834640"/>
+            <a:ext cx="1920240" cy="365760"/>
           </a:xfrm>
           <a:prstGeom prst="rect">
             <a:avLst/>
@@ -2466,7 +2574,43 @@
               <a:buNone/>
             </a:pPr>
             <a:r>
-              <a:rPr lang="en-US" sz="1300" b="1" dirty="0">
+              <a:rPr lang="en-US" sz="2000" dirty="0">
+                <a:solidFill>
+                  <a:srgbClr val="000000"/>
+                </a:solidFill>
+              </a:rPr>
+              <a:t>👤</a:t>
+            </a:r>
+            <a:endParaRPr lang="en-US" sz="2000" dirty="0"/>
+          </a:p>
+        </p:txBody>
+      </p:sp>
+      <p:sp>
+        <p:nvSpPr>
+          <p:cNvPr id="20" name="Text 18"/>
+          <p:cNvSpPr/>
+          <p:nvPr/>
+        </p:nvSpPr>
+        <p:spPr>
+          <a:xfrm>
+            <a:off x="6766560" y="3337560"/>
+            <a:ext cx="1920240" cy="320040"/>
+          </a:xfrm>
+          <a:prstGeom prst="rect">
+            <a:avLst/>
+          </a:prstGeom>
+          <a:noFill/>
+          <a:ln/>
+        </p:spPr>
+        <p:txBody>
+          <a:bodyPr wrap="square" rtlCol="0" anchor="ctr"/>
+          <a:lstStyle/>
+          <a:p>
+            <a:pPr algn="ctr" indent="0" marL="0">
+              <a:buNone/>
+            </a:pPr>
+            <a:r>
+              <a:rPr lang="en-US" sz="1100" b="1" dirty="0">
                 <a:solidFill>
                   <a:srgbClr val="FFFFFF"/>
                 </a:solidFill>
@@ -2476,20 +2620,20 @@
               </a:rPr>
               <a:t>Ananya Kaushik</a:t>
             </a:r>
-            <a:endParaRPr lang="en-US" sz="1300" dirty="0"/>
-          </a:p>
-        </p:txBody>
-      </p:sp>
-      <p:sp>
-        <p:nvSpPr>
-          <p:cNvPr id="17" name="Text 15"/>
-          <p:cNvSpPr/>
-          <p:nvPr/>
-        </p:nvSpPr>
-        <p:spPr>
-          <a:xfrm>
-            <a:off x="8732520" y="4023360"/>
-            <a:ext cx="2423160" cy="365760"/>
+            <a:endParaRPr lang="en-US" sz="1100" dirty="0"/>
+          </a:p>
+        </p:txBody>
+      </p:sp>
+      <p:sp>
+        <p:nvSpPr>
+          <p:cNvPr id="21" name="Text 19"/>
+          <p:cNvSpPr/>
+          <p:nvPr/>
+        </p:nvSpPr>
+        <p:spPr>
+          <a:xfrm>
+            <a:off x="6766560" y="3703320"/>
+            <a:ext cx="1920240" cy="640080"/>
           </a:xfrm>
           <a:prstGeom prst="rect">
             <a:avLst/>
@@ -2505,7 +2649,7 @@
               <a:buNone/>
             </a:pPr>
             <a:r>
-              <a:rPr lang="en-US" sz="1000" dirty="0">
+              <a:rPr lang="en-US" sz="900" dirty="0">
                 <a:solidFill>
                   <a:srgbClr val="94A3B8"/>
                 </a:solidFill>
@@ -2515,7 +2659,7 @@
               </a:rPr>
               <a:t>Frontend &amp; Compliance Lead</a:t>
             </a:r>
-            <a:endParaRPr lang="en-US" sz="1000" dirty="0"/>
+            <a:endParaRPr lang="en-US" sz="900" dirty="0"/>
           </a:p>
         </p:txBody>
       </p:sp>
@@ -2559,8 +2703,8 @@
         </p:nvSpPr>
         <p:spPr>
           <a:xfrm>
-            <a:off x="548640" y="365760"/>
-            <a:ext cx="7772400" cy="457200"/>
+            <a:off x="457200" y="320040"/>
+            <a:ext cx="6035040" cy="365760"/>
           </a:xfrm>
           <a:prstGeom prst="rect">
             <a:avLst/>
@@ -2576,7 +2720,7 @@
               <a:buNone/>
             </a:pPr>
             <a:r>
-              <a:rPr lang="en-US" sz="2200" b="1" dirty="0">
+              <a:rPr lang="en-US" sz="1800" b="1" dirty="0">
                 <a:solidFill>
                   <a:srgbClr val="0F172A"/>
                 </a:solidFill>
@@ -2586,7 +2730,7 @@
               </a:rPr>
               <a:t>UI / UX Architecture &amp; Dashboard Console</a:t>
             </a:r>
-            <a:endParaRPr lang="en-US" sz="2200" dirty="0"/>
+            <a:endParaRPr lang="en-US" sz="1800" dirty="0"/>
           </a:p>
         </p:txBody>
       </p:sp>
@@ -2598,8 +2742,8 @@
         </p:nvSpPr>
         <p:spPr>
           <a:xfrm>
-            <a:off x="548640" y="777240"/>
-            <a:ext cx="7772400" cy="274320"/>
+            <a:off x="457200" y="685800"/>
+            <a:ext cx="6035040" cy="228600"/>
           </a:xfrm>
           <a:prstGeom prst="rect">
             <a:avLst/>
@@ -2615,7 +2759,7 @@
               <a:buNone/>
             </a:pPr>
             <a:r>
-              <a:rPr lang="en-US" sz="1200" dirty="0">
+              <a:rPr lang="en-US" sz="1050" dirty="0">
                 <a:solidFill>
                   <a:srgbClr val="0284C7"/>
                 </a:solidFill>
@@ -2625,7 +2769,7 @@
               </a:rPr>
               <a:t>Modern Glassmorphic Interface Built for Security Operations</a:t>
             </a:r>
-            <a:endParaRPr lang="en-US" sz="1200" dirty="0"/>
+            <a:endParaRPr lang="en-US" sz="1050" dirty="0"/>
           </a:p>
         </p:txBody>
       </p:sp>
@@ -2637,12 +2781,12 @@
         </p:nvSpPr>
         <p:spPr>
           <a:xfrm>
-            <a:off x="8778240" y="365760"/>
-            <a:ext cx="2926080" cy="411480"/>
+            <a:off x="6675120" y="320040"/>
+            <a:ext cx="2011680" cy="365760"/>
           </a:xfrm>
           <a:prstGeom prst="roundRect">
             <a:avLst>
-              <a:gd name="adj" fmla="val 44444"/>
+              <a:gd name="adj" fmla="val 50000"/>
             </a:avLst>
           </a:prstGeom>
           <a:solidFill>
@@ -2664,8 +2808,8 @@
         </p:nvSpPr>
         <p:spPr>
           <a:xfrm>
-            <a:off x="8778240" y="365760"/>
-            <a:ext cx="2926080" cy="411480"/>
+            <a:off x="6675120" y="320040"/>
+            <a:ext cx="2011680" cy="365760"/>
           </a:xfrm>
           <a:prstGeom prst="rect">
             <a:avLst/>
@@ -2681,7 +2825,7 @@
               <a:buNone/>
             </a:pPr>
             <a:r>
-              <a:rPr lang="en-US" sz="1000" b="1" dirty="0">
+              <a:rPr lang="en-US" sz="900" b="1" dirty="0">
                 <a:solidFill>
                   <a:srgbClr val="7C3AED"/>
                 </a:solidFill>
@@ -2691,7 +2835,7 @@
               </a:rPr>
               <a:t>🎙️ Ananya Kaushik</a:t>
             </a:r>
-            <a:endParaRPr lang="en-US" sz="1000" dirty="0"/>
+            <a:endParaRPr lang="en-US" sz="900" dirty="0"/>
           </a:p>
         </p:txBody>
       </p:sp>
@@ -2703,8 +2847,8 @@
         </p:nvSpPr>
         <p:spPr>
           <a:xfrm>
-            <a:off x="548640" y="1143000"/>
-            <a:ext cx="11091672" cy="0"/>
+            <a:off x="457200" y="960120"/>
+            <a:ext cx="8229600" cy="0"/>
           </a:xfrm>
           <a:prstGeom prst="line">
             <a:avLst/>
@@ -2726,12 +2870,12 @@
         </p:nvSpPr>
         <p:spPr>
           <a:xfrm>
-            <a:off x="548640" y="1371600"/>
-            <a:ext cx="5303520" cy="1554480"/>
+            <a:off x="457200" y="1097280"/>
+            <a:ext cx="3977640" cy="1737360"/>
           </a:xfrm>
           <a:prstGeom prst="roundRect">
             <a:avLst>
-              <a:gd name="adj" fmla="val 8824"/>
+              <a:gd name="adj" fmla="val 5263"/>
             </a:avLst>
           </a:prstGeom>
           <a:solidFill>
@@ -2753,8 +2897,8 @@
         </p:nvSpPr>
         <p:spPr>
           <a:xfrm>
-            <a:off x="548640" y="1371600"/>
-            <a:ext cx="5303520" cy="365760"/>
+            <a:off x="457200" y="1097280"/>
+            <a:ext cx="3977640" cy="347472"/>
           </a:xfrm>
           <a:prstGeom prst="rect">
             <a:avLst/>
@@ -2778,8 +2922,8 @@
         </p:nvSpPr>
         <p:spPr>
           <a:xfrm>
-            <a:off x="685800" y="1417320"/>
-            <a:ext cx="5029200" cy="274320"/>
+            <a:off x="594360" y="1133856"/>
+            <a:ext cx="3703320" cy="274320"/>
           </a:xfrm>
           <a:prstGeom prst="rect">
             <a:avLst/>
@@ -2795,7 +2939,7 @@
               <a:buNone/>
             </a:pPr>
             <a:r>
-              <a:rPr lang="en-US" sz="1300" b="1" dirty="0">
+              <a:rPr lang="en-US" sz="1150" b="1" dirty="0">
                 <a:solidFill>
                   <a:srgbClr val="0284C7"/>
                 </a:solidFill>
@@ -2805,7 +2949,7 @@
               </a:rPr>
               <a:t>📊 Executive Dashboard</a:t>
             </a:r>
-            <a:endParaRPr lang="en-US" sz="1300" dirty="0"/>
+            <a:endParaRPr lang="en-US" sz="1150" dirty="0"/>
           </a:p>
         </p:txBody>
       </p:sp>
@@ -2817,8 +2961,8 @@
         </p:nvSpPr>
         <p:spPr>
           <a:xfrm>
-            <a:off x="731520" y="1783080"/>
-            <a:ext cx="4937760" cy="1051560"/>
+            <a:off x="594360" y="1481328"/>
+            <a:ext cx="3703320" cy="1298448"/>
           </a:xfrm>
           <a:prstGeom prst="rect">
             <a:avLst/>
@@ -2832,11 +2976,11 @@
           <a:p>
             <a:pPr>
               <a:spcBef>
-                <a:spcPts val="400"/>
-              </a:spcBef>
-            </a:pPr>
-            <a:r>
-              <a:rPr lang="en-US" sz="1050" b="1" dirty="0">
+                <a:spcPts val="300"/>
+              </a:spcBef>
+            </a:pPr>
+            <a:r>
+              <a:rPr lang="en-US" sz="950" b="1" dirty="0">
                 <a:solidFill>
                   <a:srgbClr val="0F172A"/>
                 </a:solidFill>
@@ -2848,12 +2992,12 @@
             </a:r>
             <a:pPr indent="0" marL="0">
               <a:spcBef>
-                <a:spcPts val="400"/>
-              </a:spcBef>
-              <a:buNone/>
-            </a:pPr>
-            <a:r>
-              <a:rPr lang="en-US" sz="1050" dirty="0">
+                <a:spcPts val="300"/>
+              </a:spcBef>
+              <a:buNone/>
+            </a:pPr>
+            <a:r>
+              <a:rPr lang="en-US" sz="950" dirty="0">
                 <a:solidFill>
                   <a:srgbClr val="1E293B"/>
                 </a:solidFill>
@@ -2864,7 +3008,7 @@
               <a:t>Real-time threat status gauge, active process metrics, network flow volume, and high-level risk overview.
 </a:t>
             </a:r>
-            <a:endParaRPr lang="en-US" sz="1050" dirty="0"/>
+            <a:endParaRPr lang="en-US" sz="950" dirty="0"/>
           </a:p>
         </p:txBody>
       </p:sp>
@@ -2876,12 +3020,12 @@
         </p:nvSpPr>
         <p:spPr>
           <a:xfrm>
-            <a:off x="6126480" y="1371600"/>
-            <a:ext cx="5303520" cy="1554480"/>
+            <a:off x="4709160" y="1097280"/>
+            <a:ext cx="3977640" cy="1737360"/>
           </a:xfrm>
           <a:prstGeom prst="roundRect">
             <a:avLst>
-              <a:gd name="adj" fmla="val 8824"/>
+              <a:gd name="adj" fmla="val 5263"/>
             </a:avLst>
           </a:prstGeom>
           <a:solidFill>
@@ -2903,8 +3047,8 @@
         </p:nvSpPr>
         <p:spPr>
           <a:xfrm>
-            <a:off x="6126480" y="1371600"/>
-            <a:ext cx="5303520" cy="365760"/>
+            <a:off x="4709160" y="1097280"/>
+            <a:ext cx="3977640" cy="347472"/>
           </a:xfrm>
           <a:prstGeom prst="rect">
             <a:avLst/>
@@ -2928,8 +3072,8 @@
         </p:nvSpPr>
         <p:spPr>
           <a:xfrm>
-            <a:off x="6263640" y="1417320"/>
-            <a:ext cx="5029200" cy="274320"/>
+            <a:off x="4846320" y="1133856"/>
+            <a:ext cx="3703320" cy="274320"/>
           </a:xfrm>
           <a:prstGeom prst="rect">
             <a:avLst/>
@@ -2945,7 +3089,7 @@
               <a:buNone/>
             </a:pPr>
             <a:r>
-              <a:rPr lang="en-US" sz="1300" b="1" dirty="0">
+              <a:rPr lang="en-US" sz="1150" b="1" dirty="0">
                 <a:solidFill>
                   <a:srgbClr val="0284C7"/>
                 </a:solidFill>
@@ -2955,7 +3099,7 @@
               </a:rPr>
               <a:t>⚡ Process Table</a:t>
             </a:r>
-            <a:endParaRPr lang="en-US" sz="1300" dirty="0"/>
+            <a:endParaRPr lang="en-US" sz="1150" dirty="0"/>
           </a:p>
         </p:txBody>
       </p:sp>
@@ -2967,8 +3111,8 @@
         </p:nvSpPr>
         <p:spPr>
           <a:xfrm>
-            <a:off x="6309360" y="1783080"/>
-            <a:ext cx="4937760" cy="1051560"/>
+            <a:off x="4846320" y="1481328"/>
+            <a:ext cx="3703320" cy="1298448"/>
           </a:xfrm>
           <a:prstGeom prst="rect">
             <a:avLst/>
@@ -2982,11 +3126,11 @@
           <a:p>
             <a:pPr>
               <a:spcBef>
-                <a:spcPts val="400"/>
-              </a:spcBef>
-            </a:pPr>
-            <a:r>
-              <a:rPr lang="en-US" sz="1050" b="1" dirty="0">
+                <a:spcPts val="300"/>
+              </a:spcBef>
+            </a:pPr>
+            <a:r>
+              <a:rPr lang="en-US" sz="950" b="1" dirty="0">
                 <a:solidFill>
                   <a:srgbClr val="0F172A"/>
                 </a:solidFill>
@@ -2998,12 +3142,12 @@
             </a:r>
             <a:pPr indent="0" marL="0">
               <a:spcBef>
-                <a:spcPts val="400"/>
-              </a:spcBef>
-              <a:buNone/>
-            </a:pPr>
-            <a:r>
-              <a:rPr lang="en-US" sz="1050" dirty="0">
+                <a:spcPts val="300"/>
+              </a:spcBef>
+              <a:buNone/>
+            </a:pPr>
+            <a:r>
+              <a:rPr lang="en-US" sz="950" dirty="0">
                 <a:solidFill>
                   <a:srgbClr val="1E293B"/>
                 </a:solidFill>
@@ -3014,7 +3158,7 @@
               <a:t>Dynamic sorting, search filtering, binary hash inspection modal, and instant process termination controls.
 </a:t>
             </a:r>
-            <a:endParaRPr lang="en-US" sz="1050" dirty="0"/>
+            <a:endParaRPr lang="en-US" sz="950" dirty="0"/>
           </a:p>
         </p:txBody>
       </p:sp>
@@ -3026,12 +3170,12 @@
         </p:nvSpPr>
         <p:spPr>
           <a:xfrm>
-            <a:off x="548640" y="3063240"/>
-            <a:ext cx="5303520" cy="1554480"/>
+            <a:off x="457200" y="2971800"/>
+            <a:ext cx="3977640" cy="1737360"/>
           </a:xfrm>
           <a:prstGeom prst="roundRect">
             <a:avLst>
-              <a:gd name="adj" fmla="val 8824"/>
+              <a:gd name="adj" fmla="val 5263"/>
             </a:avLst>
           </a:prstGeom>
           <a:solidFill>
@@ -3053,8 +3197,8 @@
         </p:nvSpPr>
         <p:spPr>
           <a:xfrm>
-            <a:off x="548640" y="3063240"/>
-            <a:ext cx="5303520" cy="365760"/>
+            <a:off x="457200" y="2971800"/>
+            <a:ext cx="3977640" cy="347472"/>
           </a:xfrm>
           <a:prstGeom prst="rect">
             <a:avLst/>
@@ -3078,8 +3222,8 @@
         </p:nvSpPr>
         <p:spPr>
           <a:xfrm>
-            <a:off x="685800" y="3108960"/>
-            <a:ext cx="5029200" cy="274320"/>
+            <a:off x="594360" y="3008376"/>
+            <a:ext cx="3703320" cy="274320"/>
           </a:xfrm>
           <a:prstGeom prst="rect">
             <a:avLst/>
@@ -3095,7 +3239,7 @@
               <a:buNone/>
             </a:pPr>
             <a:r>
-              <a:rPr lang="en-US" sz="1300" b="1" dirty="0">
+              <a:rPr lang="en-US" sz="1150" b="1" dirty="0">
                 <a:solidFill>
                   <a:srgbClr val="0284C7"/>
                 </a:solidFill>
@@ -3105,7 +3249,7 @@
               </a:rPr>
               <a:t>🔥 MITRE Heatmap</a:t>
             </a:r>
-            <a:endParaRPr lang="en-US" sz="1300" dirty="0"/>
+            <a:endParaRPr lang="en-US" sz="1150" dirty="0"/>
           </a:p>
         </p:txBody>
       </p:sp>
@@ -3117,8 +3261,8 @@
         </p:nvSpPr>
         <p:spPr>
           <a:xfrm>
-            <a:off x="731520" y="3474720"/>
-            <a:ext cx="4937760" cy="1051560"/>
+            <a:off x="594360" y="3355848"/>
+            <a:ext cx="3703320" cy="1298448"/>
           </a:xfrm>
           <a:prstGeom prst="rect">
             <a:avLst/>
@@ -3132,11 +3276,11 @@
           <a:p>
             <a:pPr>
               <a:spcBef>
-                <a:spcPts val="400"/>
-              </a:spcBef>
-            </a:pPr>
-            <a:r>
-              <a:rPr lang="en-US" sz="1050" b="1" dirty="0">
+                <a:spcPts val="300"/>
+              </a:spcBef>
+            </a:pPr>
+            <a:r>
+              <a:rPr lang="en-US" sz="950" b="1" dirty="0">
                 <a:solidFill>
                   <a:srgbClr val="0F172A"/>
                 </a:solidFill>
@@ -3148,12 +3292,12 @@
             </a:r>
             <a:pPr indent="0" marL="0">
               <a:spcBef>
-                <a:spcPts val="400"/>
-              </a:spcBef>
-              <a:buNone/>
-            </a:pPr>
-            <a:r>
-              <a:rPr lang="en-US" sz="1050" dirty="0">
+                <a:spcPts val="300"/>
+              </a:spcBef>
+              <a:buNone/>
+            </a:pPr>
+            <a:r>
+              <a:rPr lang="en-US" sz="950" dirty="0">
                 <a:solidFill>
                   <a:srgbClr val="1E293B"/>
                 </a:solidFill>
@@ -3164,7 +3308,7 @@
               <a:t>Interactive grid matrix visualizing detected ATT&amp;CK techniques across active system events.
 </a:t>
             </a:r>
-            <a:endParaRPr lang="en-US" sz="1050" dirty="0"/>
+            <a:endParaRPr lang="en-US" sz="950" dirty="0"/>
           </a:p>
         </p:txBody>
       </p:sp>
@@ -3176,12 +3320,12 @@
         </p:nvSpPr>
         <p:spPr>
           <a:xfrm>
-            <a:off x="6126480" y="3063240"/>
-            <a:ext cx="5303520" cy="1554480"/>
+            <a:off x="4709160" y="2971800"/>
+            <a:ext cx="3977640" cy="1737360"/>
           </a:xfrm>
           <a:prstGeom prst="roundRect">
             <a:avLst>
-              <a:gd name="adj" fmla="val 8824"/>
+              <a:gd name="adj" fmla="val 5263"/>
             </a:avLst>
           </a:prstGeom>
           <a:solidFill>
@@ -3203,8 +3347,8 @@
         </p:nvSpPr>
         <p:spPr>
           <a:xfrm>
-            <a:off x="6126480" y="3063240"/>
-            <a:ext cx="5303520" cy="365760"/>
+            <a:off x="4709160" y="2971800"/>
+            <a:ext cx="3977640" cy="347472"/>
           </a:xfrm>
           <a:prstGeom prst="rect">
             <a:avLst/>
@@ -3228,8 +3372,8 @@
         </p:nvSpPr>
         <p:spPr>
           <a:xfrm>
-            <a:off x="6263640" y="3108960"/>
-            <a:ext cx="5029200" cy="274320"/>
+            <a:off x="4846320" y="3008376"/>
+            <a:ext cx="3703320" cy="274320"/>
           </a:xfrm>
           <a:prstGeom prst="rect">
             <a:avLst/>
@@ -3245,7 +3389,7 @@
               <a:buNone/>
             </a:pPr>
             <a:r>
-              <a:rPr lang="en-US" sz="1300" b="1" dirty="0">
+              <a:rPr lang="en-US" sz="1150" b="1" dirty="0">
                 <a:solidFill>
                   <a:srgbClr val="0284C7"/>
                 </a:solidFill>
@@ -3255,7 +3399,7 @@
               </a:rPr>
               <a:t>📁 Incident Exporter</a:t>
             </a:r>
-            <a:endParaRPr lang="en-US" sz="1300" dirty="0"/>
+            <a:endParaRPr lang="en-US" sz="1150" dirty="0"/>
           </a:p>
         </p:txBody>
       </p:sp>
@@ -3267,8 +3411,8 @@
         </p:nvSpPr>
         <p:spPr>
           <a:xfrm>
-            <a:off x="6309360" y="3474720"/>
-            <a:ext cx="4937760" cy="1051560"/>
+            <a:off x="4846320" y="3355848"/>
+            <a:ext cx="3703320" cy="1298448"/>
           </a:xfrm>
           <a:prstGeom prst="rect">
             <a:avLst/>
@@ -3282,11 +3426,11 @@
           <a:p>
             <a:pPr>
               <a:spcBef>
-                <a:spcPts val="400"/>
-              </a:spcBef>
-            </a:pPr>
-            <a:r>
-              <a:rPr lang="en-US" sz="1050" b="1" dirty="0">
+                <a:spcPts val="300"/>
+              </a:spcBef>
+            </a:pPr>
+            <a:r>
+              <a:rPr lang="en-US" sz="950" b="1" dirty="0">
                 <a:solidFill>
                   <a:srgbClr val="0F172A"/>
                 </a:solidFill>
@@ -3298,12 +3442,12 @@
             </a:r>
             <a:pPr indent="0" marL="0">
               <a:spcBef>
-                <a:spcPts val="400"/>
-              </a:spcBef>
-              <a:buNone/>
-            </a:pPr>
-            <a:r>
-              <a:rPr lang="en-US" sz="1050" dirty="0">
+                <a:spcPts val="300"/>
+              </a:spcBef>
+              <a:buNone/>
+            </a:pPr>
+            <a:r>
+              <a:rPr lang="en-US" sz="950" dirty="0">
                 <a:solidFill>
                   <a:srgbClr val="1E293B"/>
                 </a:solidFill>
@@ -3314,7 +3458,7 @@
               <a:t>One-click generation of NIST SP 800-61 forensic report bundles with custom time filters.
 </a:t>
             </a:r>
-            <a:endParaRPr lang="en-US" sz="1050" dirty="0"/>
+            <a:endParaRPr lang="en-US" sz="950" dirty="0"/>
           </a:p>
         </p:txBody>
       </p:sp>
@@ -3358,8 +3502,8 @@
         </p:nvSpPr>
         <p:spPr>
           <a:xfrm>
-            <a:off x="548640" y="365760"/>
-            <a:ext cx="7772400" cy="457200"/>
+            <a:off x="457200" y="320040"/>
+            <a:ext cx="6035040" cy="365760"/>
           </a:xfrm>
           <a:prstGeom prst="rect">
             <a:avLst/>
@@ -3375,7 +3519,7 @@
               <a:buNone/>
             </a:pPr>
             <a:r>
-              <a:rPr lang="en-US" sz="2200" b="1" dirty="0">
+              <a:rPr lang="en-US" sz="1800" b="1" dirty="0">
                 <a:solidFill>
                   <a:srgbClr val="0F172A"/>
                 </a:solidFill>
@@ -3385,7 +3529,7 @@
               </a:rPr>
               <a:t>Performance Benchmarks &amp; Security Safeguards</a:t>
             </a:r>
-            <a:endParaRPr lang="en-US" sz="2200" dirty="0"/>
+            <a:endParaRPr lang="en-US" sz="1800" dirty="0"/>
           </a:p>
         </p:txBody>
       </p:sp>
@@ -3397,8 +3541,8 @@
         </p:nvSpPr>
         <p:spPr>
           <a:xfrm>
-            <a:off x="548640" y="777240"/>
-            <a:ext cx="7772400" cy="274320"/>
+            <a:off x="457200" y="685800"/>
+            <a:ext cx="6035040" cy="228600"/>
           </a:xfrm>
           <a:prstGeom prst="rect">
             <a:avLst/>
@@ -3414,7 +3558,7 @@
               <a:buNone/>
             </a:pPr>
             <a:r>
-              <a:rPr lang="en-US" sz="1200" dirty="0">
+              <a:rPr lang="en-US" sz="1050" dirty="0">
                 <a:solidFill>
                   <a:srgbClr val="0284C7"/>
                 </a:solidFill>
@@ -3424,7 +3568,7 @@
               </a:rPr>
               <a:t>Empirical Measurement of Agent Resource Usage &amp; Operating Controls</a:t>
             </a:r>
-            <a:endParaRPr lang="en-US" sz="1200" dirty="0"/>
+            <a:endParaRPr lang="en-US" sz="1050" dirty="0"/>
           </a:p>
         </p:txBody>
       </p:sp>
@@ -3436,12 +3580,12 @@
         </p:nvSpPr>
         <p:spPr>
           <a:xfrm>
-            <a:off x="8778240" y="365760"/>
-            <a:ext cx="2926080" cy="411480"/>
+            <a:off x="6675120" y="320040"/>
+            <a:ext cx="2011680" cy="365760"/>
           </a:xfrm>
           <a:prstGeom prst="roundRect">
             <a:avLst>
-              <a:gd name="adj" fmla="val 44444"/>
+              <a:gd name="adj" fmla="val 50000"/>
             </a:avLst>
           </a:prstGeom>
           <a:solidFill>
@@ -3463,8 +3607,8 @@
         </p:nvSpPr>
         <p:spPr>
           <a:xfrm>
-            <a:off x="8778240" y="365760"/>
-            <a:ext cx="2926080" cy="411480"/>
+            <a:off x="6675120" y="320040"/>
+            <a:ext cx="2011680" cy="365760"/>
           </a:xfrm>
           <a:prstGeom prst="rect">
             <a:avLst/>
@@ -3480,7 +3624,7 @@
               <a:buNone/>
             </a:pPr>
             <a:r>
-              <a:rPr lang="en-US" sz="1000" b="1" dirty="0">
+              <a:rPr lang="en-US" sz="900" b="1" dirty="0">
                 <a:solidFill>
                   <a:srgbClr val="7C3AED"/>
                 </a:solidFill>
@@ -3490,7 +3634,7 @@
               </a:rPr>
               <a:t>🎙️ Divij Kulkarni</a:t>
             </a:r>
-            <a:endParaRPr lang="en-US" sz="1000" dirty="0"/>
+            <a:endParaRPr lang="en-US" sz="900" dirty="0"/>
           </a:p>
         </p:txBody>
       </p:sp>
@@ -3502,8 +3646,8 @@
         </p:nvSpPr>
         <p:spPr>
           <a:xfrm>
-            <a:off x="548640" y="1143000"/>
-            <a:ext cx="11091672" cy="0"/>
+            <a:off x="457200" y="960120"/>
+            <a:ext cx="8229600" cy="0"/>
           </a:xfrm>
           <a:prstGeom prst="line">
             <a:avLst/>
@@ -3525,12 +3669,12 @@
         </p:nvSpPr>
         <p:spPr>
           <a:xfrm>
-            <a:off x="548640" y="1371600"/>
-            <a:ext cx="3474720" cy="3291840"/>
+            <a:off x="457200" y="1097280"/>
+            <a:ext cx="2560320" cy="3657600"/>
           </a:xfrm>
           <a:prstGeom prst="roundRect">
             <a:avLst>
-              <a:gd name="adj" fmla="val 4167"/>
+              <a:gd name="adj" fmla="val 3571"/>
             </a:avLst>
           </a:prstGeom>
           <a:solidFill>
@@ -3552,8 +3696,8 @@
         </p:nvSpPr>
         <p:spPr>
           <a:xfrm>
-            <a:off x="548640" y="1371600"/>
-            <a:ext cx="3474720" cy="365760"/>
+            <a:off x="457200" y="1097280"/>
+            <a:ext cx="2560320" cy="347472"/>
           </a:xfrm>
           <a:prstGeom prst="rect">
             <a:avLst/>
@@ -3577,8 +3721,8 @@
         </p:nvSpPr>
         <p:spPr>
           <a:xfrm>
-            <a:off x="685800" y="1417320"/>
-            <a:ext cx="3200400" cy="274320"/>
+            <a:off x="594360" y="1133856"/>
+            <a:ext cx="2286000" cy="274320"/>
           </a:xfrm>
           <a:prstGeom prst="rect">
             <a:avLst/>
@@ -3594,7 +3738,7 @@
               <a:buNone/>
             </a:pPr>
             <a:r>
-              <a:rPr lang="en-US" sz="1300" b="1" dirty="0">
+              <a:rPr lang="en-US" sz="1150" b="1" dirty="0">
                 <a:solidFill>
                   <a:srgbClr val="0284C7"/>
                 </a:solidFill>
@@ -3604,7 +3748,7 @@
               </a:rPr>
               <a:t>⚡ CPU &amp; RAM Overhead</a:t>
             </a:r>
-            <a:endParaRPr lang="en-US" sz="1300" dirty="0"/>
+            <a:endParaRPr lang="en-US" sz="1150" dirty="0"/>
           </a:p>
         </p:txBody>
       </p:sp>
@@ -3616,8 +3760,8 @@
         </p:nvSpPr>
         <p:spPr>
           <a:xfrm>
-            <a:off x="731520" y="1783080"/>
-            <a:ext cx="3108960" cy="2788920"/>
+            <a:off x="594360" y="1481328"/>
+            <a:ext cx="2286000" cy="3218688"/>
           </a:xfrm>
           <a:prstGeom prst="rect">
             <a:avLst/>
@@ -3631,11 +3775,11 @@
           <a:p>
             <a:pPr>
               <a:spcBef>
-                <a:spcPts val="400"/>
-              </a:spcBef>
-            </a:pPr>
-            <a:r>
-              <a:rPr lang="en-US" sz="1050" b="1" dirty="0">
+                <a:spcPts val="300"/>
+              </a:spcBef>
+            </a:pPr>
+            <a:r>
+              <a:rPr lang="en-US" sz="950" b="1" dirty="0">
                 <a:solidFill>
                   <a:srgbClr val="0F172A"/>
                 </a:solidFill>
@@ -3647,12 +3791,12 @@
             </a:r>
             <a:pPr indent="0" marL="0">
               <a:spcBef>
-                <a:spcPts val="400"/>
-              </a:spcBef>
-              <a:buNone/>
-            </a:pPr>
-            <a:r>
-              <a:rPr lang="en-US" sz="1050" dirty="0">
+                <a:spcPts val="300"/>
+              </a:spcBef>
+              <a:buNone/>
+            </a:pPr>
+            <a:r>
+              <a:rPr lang="en-US" sz="950" dirty="0">
                 <a:solidFill>
                   <a:srgbClr val="1E293B"/>
                 </a:solidFill>
@@ -3665,12 +3809,12 @@
             </a:r>
             <a:pPr indent="0" marL="0">
               <a:spcBef>
-                <a:spcPts val="400"/>
-              </a:spcBef>
-              <a:buNone/>
-            </a:pPr>
-            <a:r>
-              <a:rPr lang="en-US" sz="1050" b="1" dirty="0">
+                <a:spcPts val="300"/>
+              </a:spcBef>
+              <a:buNone/>
+            </a:pPr>
+            <a:r>
+              <a:rPr lang="en-US" sz="950" b="1" dirty="0">
                 <a:solidFill>
                   <a:srgbClr val="0F172A"/>
                 </a:solidFill>
@@ -3682,12 +3826,12 @@
             </a:r>
             <a:pPr indent="0" marL="0">
               <a:spcBef>
-                <a:spcPts val="400"/>
-              </a:spcBef>
-              <a:buNone/>
-            </a:pPr>
-            <a:r>
-              <a:rPr lang="en-US" sz="1050" dirty="0">
+                <a:spcPts val="300"/>
+              </a:spcBef>
+              <a:buNone/>
+            </a:pPr>
+            <a:r>
+              <a:rPr lang="en-US" sz="950" dirty="0">
                 <a:solidFill>
                   <a:srgbClr val="1E293B"/>
                 </a:solidFill>
@@ -3700,12 +3844,12 @@
             </a:r>
             <a:pPr indent="0" marL="0">
               <a:spcBef>
-                <a:spcPts val="400"/>
-              </a:spcBef>
-              <a:buNone/>
-            </a:pPr>
-            <a:r>
-              <a:rPr lang="en-US" sz="1050" b="1" dirty="0">
+                <a:spcPts val="300"/>
+              </a:spcBef>
+              <a:buNone/>
+            </a:pPr>
+            <a:r>
+              <a:rPr lang="en-US" sz="950" b="1" dirty="0">
                 <a:solidFill>
                   <a:srgbClr val="0F172A"/>
                 </a:solidFill>
@@ -3717,12 +3861,12 @@
             </a:r>
             <a:pPr indent="0" marL="0">
               <a:spcBef>
-                <a:spcPts val="400"/>
-              </a:spcBef>
-              <a:buNone/>
-            </a:pPr>
-            <a:r>
-              <a:rPr lang="en-US" sz="1050" dirty="0">
+                <a:spcPts val="300"/>
+              </a:spcBef>
+              <a:buNone/>
+            </a:pPr>
+            <a:r>
+              <a:rPr lang="en-US" sz="950" dirty="0">
                 <a:solidFill>
                   <a:srgbClr val="1E293B"/>
                 </a:solidFill>
@@ -3733,7 +3877,7 @@
               <a:t>Cold application launch in under 250 milliseconds.
 </a:t>
             </a:r>
-            <a:endParaRPr lang="en-US" sz="1050" dirty="0"/>
+            <a:endParaRPr lang="en-US" sz="950" dirty="0"/>
           </a:p>
         </p:txBody>
       </p:sp>
@@ -3745,12 +3889,12 @@
         </p:nvSpPr>
         <p:spPr>
           <a:xfrm>
-            <a:off x="4297680" y="1371600"/>
-            <a:ext cx="3474720" cy="3291840"/>
+            <a:off x="3291840" y="1097280"/>
+            <a:ext cx="2560320" cy="3657600"/>
           </a:xfrm>
           <a:prstGeom prst="roundRect">
             <a:avLst>
-              <a:gd name="adj" fmla="val 4167"/>
+              <a:gd name="adj" fmla="val 3571"/>
             </a:avLst>
           </a:prstGeom>
           <a:solidFill>
@@ -3772,8 +3916,8 @@
         </p:nvSpPr>
         <p:spPr>
           <a:xfrm>
-            <a:off x="4297680" y="1371600"/>
-            <a:ext cx="3474720" cy="365760"/>
+            <a:off x="3291840" y="1097280"/>
+            <a:ext cx="2560320" cy="347472"/>
           </a:xfrm>
           <a:prstGeom prst="rect">
             <a:avLst/>
@@ -3797,8 +3941,8 @@
         </p:nvSpPr>
         <p:spPr>
           <a:xfrm>
-            <a:off x="4434840" y="1417320"/>
-            <a:ext cx="3200400" cy="274320"/>
+            <a:off x="3429000" y="1133856"/>
+            <a:ext cx="2286000" cy="274320"/>
           </a:xfrm>
           <a:prstGeom prst="rect">
             <a:avLst/>
@@ -3814,7 +3958,7 @@
               <a:buNone/>
             </a:pPr>
             <a:r>
-              <a:rPr lang="en-US" sz="1300" b="1" dirty="0">
+              <a:rPr lang="en-US" sz="1150" b="1" dirty="0">
                 <a:solidFill>
                   <a:srgbClr val="0284C7"/>
                 </a:solidFill>
@@ -3822,9 +3966,9 @@
                 <a:ea typeface="Arial" pitchFamily="34" charset="-122"/>
                 <a:cs typeface="Arial" pitchFamily="34" charset="-120"/>
               </a:rPr>
-              <a:t>⏱️ Inference &amp; Probing Latency</a:t>
-            </a:r>
-            <a:endParaRPr lang="en-US" sz="1300" dirty="0"/>
+              <a:t>⏱️ Inference &amp; Latency</a:t>
+            </a:r>
+            <a:endParaRPr lang="en-US" sz="1150" dirty="0"/>
           </a:p>
         </p:txBody>
       </p:sp>
@@ -3836,8 +3980,8 @@
         </p:nvSpPr>
         <p:spPr>
           <a:xfrm>
-            <a:off x="4480560" y="1783080"/>
-            <a:ext cx="3108960" cy="2788920"/>
+            <a:off x="3429000" y="1481328"/>
+            <a:ext cx="2286000" cy="3218688"/>
           </a:xfrm>
           <a:prstGeom prst="rect">
             <a:avLst/>
@@ -3851,11 +3995,11 @@
           <a:p>
             <a:pPr>
               <a:spcBef>
-                <a:spcPts val="400"/>
-              </a:spcBef>
-            </a:pPr>
-            <a:r>
-              <a:rPr lang="en-US" sz="1050" b="1" dirty="0">
+                <a:spcPts val="300"/>
+              </a:spcBef>
+            </a:pPr>
+            <a:r>
+              <a:rPr lang="en-US" sz="950" b="1" dirty="0">
                 <a:solidFill>
                   <a:srgbClr val="0F172A"/>
                 </a:solidFill>
@@ -3867,12 +4011,12 @@
             </a:r>
             <a:pPr indent="0" marL="0">
               <a:spcBef>
-                <a:spcPts val="400"/>
-              </a:spcBef>
-              <a:buNone/>
-            </a:pPr>
-            <a:r>
-              <a:rPr lang="en-US" sz="1050" dirty="0">
+                <a:spcPts val="300"/>
+              </a:spcBef>
+              <a:buNone/>
+            </a:pPr>
+            <a:r>
+              <a:rPr lang="en-US" sz="950" dirty="0">
                 <a:solidFill>
                   <a:srgbClr val="1E293B"/>
                 </a:solidFill>
@@ -3885,12 +4029,12 @@
             </a:r>
             <a:pPr indent="0" marL="0">
               <a:spcBef>
-                <a:spcPts val="400"/>
-              </a:spcBef>
-              <a:buNone/>
-            </a:pPr>
-            <a:r>
-              <a:rPr lang="en-US" sz="1050" b="1" dirty="0">
+                <a:spcPts val="300"/>
+              </a:spcBef>
+              <a:buNone/>
+            </a:pPr>
+            <a:r>
+              <a:rPr lang="en-US" sz="950" b="1" dirty="0">
                 <a:solidFill>
                   <a:srgbClr val="0F172A"/>
                 </a:solidFill>
@@ -3902,12 +4046,12 @@
             </a:r>
             <a:pPr indent="0" marL="0">
               <a:spcBef>
-                <a:spcPts val="400"/>
-              </a:spcBef>
-              <a:buNone/>
-            </a:pPr>
-            <a:r>
-              <a:rPr lang="en-US" sz="1050" dirty="0">
+                <a:spcPts val="300"/>
+              </a:spcBef>
+              <a:buNone/>
+            </a:pPr>
+            <a:r>
+              <a:rPr lang="en-US" sz="950" dirty="0">
                 <a:solidFill>
                   <a:srgbClr val="1E293B"/>
                 </a:solidFill>
@@ -3920,12 +4064,12 @@
             </a:r>
             <a:pPr indent="0" marL="0">
               <a:spcBef>
-                <a:spcPts val="400"/>
-              </a:spcBef>
-              <a:buNone/>
-            </a:pPr>
-            <a:r>
-              <a:rPr lang="en-US" sz="1050" b="1" dirty="0">
+                <a:spcPts val="300"/>
+              </a:spcBef>
+              <a:buNone/>
+            </a:pPr>
+            <a:r>
+              <a:rPr lang="en-US" sz="950" b="1" dirty="0">
                 <a:solidFill>
                   <a:srgbClr val="0F172A"/>
                 </a:solidFill>
@@ -3937,12 +4081,12 @@
             </a:r>
             <a:pPr indent="0" marL="0">
               <a:spcBef>
-                <a:spcPts val="400"/>
-              </a:spcBef>
-              <a:buNone/>
-            </a:pPr>
-            <a:r>
-              <a:rPr lang="en-US" sz="1050" dirty="0">
+                <a:spcPts val="300"/>
+              </a:spcBef>
+              <a:buNone/>
+            </a:pPr>
+            <a:r>
+              <a:rPr lang="en-US" sz="950" dirty="0">
                 <a:solidFill>
                   <a:srgbClr val="1E293B"/>
                 </a:solidFill>
@@ -3953,7 +4097,7 @@
               <a:t>Local subnet device discovery duration.
 </a:t>
             </a:r>
-            <a:endParaRPr lang="en-US" sz="1050" dirty="0"/>
+            <a:endParaRPr lang="en-US" sz="950" dirty="0"/>
           </a:p>
         </p:txBody>
       </p:sp>
@@ -3965,12 +4109,12 @@
         </p:nvSpPr>
         <p:spPr>
           <a:xfrm>
-            <a:off x="8046720" y="1371600"/>
-            <a:ext cx="3566160" cy="3291840"/>
+            <a:off x="6126480" y="1097280"/>
+            <a:ext cx="2560320" cy="3657600"/>
           </a:xfrm>
           <a:prstGeom prst="roundRect">
             <a:avLst>
-              <a:gd name="adj" fmla="val 4167"/>
+              <a:gd name="adj" fmla="val 3571"/>
             </a:avLst>
           </a:prstGeom>
           <a:solidFill>
@@ -3992,8 +4136,8 @@
         </p:nvSpPr>
         <p:spPr>
           <a:xfrm>
-            <a:off x="8046720" y="1371600"/>
-            <a:ext cx="3566160" cy="365760"/>
+            <a:off x="6126480" y="1097280"/>
+            <a:ext cx="2560320" cy="347472"/>
           </a:xfrm>
           <a:prstGeom prst="rect">
             <a:avLst/>
@@ -4017,8 +4161,8 @@
         </p:nvSpPr>
         <p:spPr>
           <a:xfrm>
-            <a:off x="8183880" y="1417320"/>
-            <a:ext cx="3291840" cy="274320"/>
+            <a:off x="6263640" y="1133856"/>
+            <a:ext cx="2286000" cy="274320"/>
           </a:xfrm>
           <a:prstGeom prst="rect">
             <a:avLst/>
@@ -4034,7 +4178,7 @@
               <a:buNone/>
             </a:pPr>
             <a:r>
-              <a:rPr lang="en-US" sz="1300" b="1" dirty="0">
+              <a:rPr lang="en-US" sz="1150" b="1" dirty="0">
                 <a:solidFill>
                   <a:srgbClr val="0284C7"/>
                 </a:solidFill>
@@ -4042,9 +4186,9 @@
                 <a:ea typeface="Arial" pitchFamily="34" charset="-122"/>
                 <a:cs typeface="Arial" pitchFamily="34" charset="-120"/>
               </a:rPr>
-              <a:t>🔒 Security &amp; Operational Safety</a:t>
-            </a:r>
-            <a:endParaRPr lang="en-US" sz="1300" dirty="0"/>
+              <a:t>🔒 Operational Safety</a:t>
+            </a:r>
+            <a:endParaRPr lang="en-US" sz="1150" dirty="0"/>
           </a:p>
         </p:txBody>
       </p:sp>
@@ -4056,8 +4200,8 @@
         </p:nvSpPr>
         <p:spPr>
           <a:xfrm>
-            <a:off x="8229600" y="1783080"/>
-            <a:ext cx="3200400" cy="2788920"/>
+            <a:off x="6263640" y="1481328"/>
+            <a:ext cx="2286000" cy="3218688"/>
           </a:xfrm>
           <a:prstGeom prst="rect">
             <a:avLst/>
@@ -4071,11 +4215,11 @@
           <a:p>
             <a:pPr>
               <a:spcBef>
-                <a:spcPts val="400"/>
-              </a:spcBef>
-            </a:pPr>
-            <a:r>
-              <a:rPr lang="en-US" sz="1050" b="1" dirty="0">
+                <a:spcPts val="300"/>
+              </a:spcBef>
+            </a:pPr>
+            <a:r>
+              <a:rPr lang="en-US" sz="950" b="1" dirty="0">
                 <a:solidFill>
                   <a:srgbClr val="0F172A"/>
                 </a:solidFill>
@@ -4087,12 +4231,12 @@
             </a:r>
             <a:pPr indent="0" marL="0">
               <a:spcBef>
-                <a:spcPts val="400"/>
-              </a:spcBef>
-              <a:buNone/>
-            </a:pPr>
-            <a:r>
-              <a:rPr lang="en-US" sz="1050" dirty="0">
+                <a:spcPts val="300"/>
+              </a:spcBef>
+              <a:buNone/>
+            </a:pPr>
+            <a:r>
+              <a:rPr lang="en-US" sz="950" dirty="0">
                 <a:solidFill>
                   <a:srgbClr val="1E293B"/>
                 </a:solidFill>
@@ -4105,12 +4249,12 @@
             </a:r>
             <a:pPr indent="0" marL="0">
               <a:spcBef>
-                <a:spcPts val="400"/>
-              </a:spcBef>
-              <a:buNone/>
-            </a:pPr>
-            <a:r>
-              <a:rPr lang="en-US" sz="1050" b="1" dirty="0">
+                <a:spcPts val="300"/>
+              </a:spcBef>
+              <a:buNone/>
+            </a:pPr>
+            <a:r>
+              <a:rPr lang="en-US" sz="950" b="1" dirty="0">
                 <a:solidFill>
                   <a:srgbClr val="0F172A"/>
                 </a:solidFill>
@@ -4122,12 +4266,12 @@
             </a:r>
             <a:pPr indent="0" marL="0">
               <a:spcBef>
-                <a:spcPts val="400"/>
-              </a:spcBef>
-              <a:buNone/>
-            </a:pPr>
-            <a:r>
-              <a:rPr lang="en-US" sz="1050" dirty="0">
+                <a:spcPts val="300"/>
+              </a:spcBef>
+              <a:buNone/>
+            </a:pPr>
+            <a:r>
+              <a:rPr lang="en-US" sz="950" dirty="0">
                 <a:solidFill>
                   <a:srgbClr val="1E293B"/>
                 </a:solidFill>
@@ -4140,12 +4284,12 @@
             </a:r>
             <a:pPr indent="0" marL="0">
               <a:spcBef>
-                <a:spcPts val="400"/>
-              </a:spcBef>
-              <a:buNone/>
-            </a:pPr>
-            <a:r>
-              <a:rPr lang="en-US" sz="1050" b="1" dirty="0">
+                <a:spcPts val="300"/>
+              </a:spcBef>
+              <a:buNone/>
+            </a:pPr>
+            <a:r>
+              <a:rPr lang="en-US" sz="950" b="1" dirty="0">
                 <a:solidFill>
                   <a:srgbClr val="0F172A"/>
                 </a:solidFill>
@@ -4157,12 +4301,12 @@
             </a:r>
             <a:pPr indent="0" marL="0">
               <a:spcBef>
-                <a:spcPts val="400"/>
-              </a:spcBef>
-              <a:buNone/>
-            </a:pPr>
-            <a:r>
-              <a:rPr lang="en-US" sz="1050" dirty="0">
+                <a:spcPts val="300"/>
+              </a:spcBef>
+              <a:buNone/>
+            </a:pPr>
+            <a:r>
+              <a:rPr lang="en-US" sz="950" dirty="0">
                 <a:solidFill>
                   <a:srgbClr val="1E293B"/>
                 </a:solidFill>
@@ -4173,7 +4317,7 @@
               <a:t>Acts as a complementary monitoring layer; does not disable Windows Defender.
 </a:t>
             </a:r>
-            <a:endParaRPr lang="en-US" sz="1050" dirty="0"/>
+            <a:endParaRPr lang="en-US" sz="950" dirty="0"/>
           </a:p>
         </p:txBody>
       </p:sp>
@@ -4217,8 +4361,8 @@
         </p:nvSpPr>
         <p:spPr>
           <a:xfrm>
-            <a:off x="548640" y="365760"/>
-            <a:ext cx="7772400" cy="457200"/>
+            <a:off x="457200" y="320040"/>
+            <a:ext cx="6035040" cy="365760"/>
           </a:xfrm>
           <a:prstGeom prst="rect">
             <a:avLst/>
@@ -4234,7 +4378,7 @@
               <a:buNone/>
             </a:pPr>
             <a:r>
-              <a:rPr lang="en-US" sz="2200" b="1" dirty="0">
+              <a:rPr lang="en-US" sz="1800" b="1" dirty="0">
                 <a:solidFill>
                   <a:srgbClr val="0F172A"/>
                 </a:solidFill>
@@ -4244,7 +4388,7 @@
               </a:rPr>
               <a:t>Product Roadmap &amp; Future Scope</a:t>
             </a:r>
-            <a:endParaRPr lang="en-US" sz="2200" dirty="0"/>
+            <a:endParaRPr lang="en-US" sz="1800" dirty="0"/>
           </a:p>
         </p:txBody>
       </p:sp>
@@ -4256,8 +4400,8 @@
         </p:nvSpPr>
         <p:spPr>
           <a:xfrm>
-            <a:off x="548640" y="777240"/>
-            <a:ext cx="7772400" cy="274320"/>
+            <a:off x="457200" y="685800"/>
+            <a:ext cx="6035040" cy="228600"/>
           </a:xfrm>
           <a:prstGeom prst="rect">
             <a:avLst/>
@@ -4273,7 +4417,7 @@
               <a:buNone/>
             </a:pPr>
             <a:r>
-              <a:rPr lang="en-US" sz="1200" dirty="0">
+              <a:rPr lang="en-US" sz="1050" dirty="0">
                 <a:solidFill>
                   <a:srgbClr val="0284C7"/>
                 </a:solidFill>
@@ -4283,7 +4427,7 @@
               </a:rPr>
               <a:t>Transitioning from Endpoint MVP to Enterprise EDR Framework</a:t>
             </a:r>
-            <a:endParaRPr lang="en-US" sz="1200" dirty="0"/>
+            <a:endParaRPr lang="en-US" sz="1050" dirty="0"/>
           </a:p>
         </p:txBody>
       </p:sp>
@@ -4295,12 +4439,12 @@
         </p:nvSpPr>
         <p:spPr>
           <a:xfrm>
-            <a:off x="8778240" y="365760"/>
-            <a:ext cx="2926080" cy="411480"/>
+            <a:off x="6675120" y="320040"/>
+            <a:ext cx="2011680" cy="365760"/>
           </a:xfrm>
           <a:prstGeom prst="roundRect">
             <a:avLst>
-              <a:gd name="adj" fmla="val 44444"/>
+              <a:gd name="adj" fmla="val 50000"/>
             </a:avLst>
           </a:prstGeom>
           <a:solidFill>
@@ -4322,8 +4466,8 @@
         </p:nvSpPr>
         <p:spPr>
           <a:xfrm>
-            <a:off x="8778240" y="365760"/>
-            <a:ext cx="2926080" cy="411480"/>
+            <a:off x="6675120" y="320040"/>
+            <a:ext cx="2011680" cy="365760"/>
           </a:xfrm>
           <a:prstGeom prst="rect">
             <a:avLst/>
@@ -4339,7 +4483,7 @@
               <a:buNone/>
             </a:pPr>
             <a:r>
-              <a:rPr lang="en-US" sz="1000" b="1" dirty="0">
+              <a:rPr lang="en-US" sz="900" b="1" dirty="0">
                 <a:solidFill>
                   <a:srgbClr val="7C3AED"/>
                 </a:solidFill>
@@ -4349,7 +4493,7 @@
               </a:rPr>
               <a:t>🎙️ Soham Wadale</a:t>
             </a:r>
-            <a:endParaRPr lang="en-US" sz="1000" dirty="0"/>
+            <a:endParaRPr lang="en-US" sz="900" dirty="0"/>
           </a:p>
         </p:txBody>
       </p:sp>
@@ -4361,8 +4505,8 @@
         </p:nvSpPr>
         <p:spPr>
           <a:xfrm>
-            <a:off x="548640" y="1143000"/>
-            <a:ext cx="11091672" cy="0"/>
+            <a:off x="457200" y="960120"/>
+            <a:ext cx="8229600" cy="0"/>
           </a:xfrm>
           <a:prstGeom prst="line">
             <a:avLst/>
@@ -4384,12 +4528,12 @@
         </p:nvSpPr>
         <p:spPr>
           <a:xfrm>
-            <a:off x="548640" y="1371600"/>
-            <a:ext cx="5303520" cy="3291840"/>
+            <a:off x="457200" y="1097280"/>
+            <a:ext cx="3977640" cy="3657600"/>
           </a:xfrm>
           <a:prstGeom prst="roundRect">
             <a:avLst>
-              <a:gd name="adj" fmla="val 4167"/>
+              <a:gd name="adj" fmla="val 2500"/>
             </a:avLst>
           </a:prstGeom>
           <a:solidFill>
@@ -4411,8 +4555,8 @@
         </p:nvSpPr>
         <p:spPr>
           <a:xfrm>
-            <a:off x="548640" y="1371600"/>
-            <a:ext cx="5303520" cy="365760"/>
+            <a:off x="457200" y="1097280"/>
+            <a:ext cx="3977640" cy="347472"/>
           </a:xfrm>
           <a:prstGeom prst="rect">
             <a:avLst/>
@@ -4436,8 +4580,8 @@
         </p:nvSpPr>
         <p:spPr>
           <a:xfrm>
-            <a:off x="685800" y="1417320"/>
-            <a:ext cx="5029200" cy="274320"/>
+            <a:off x="594360" y="1133856"/>
+            <a:ext cx="3703320" cy="274320"/>
           </a:xfrm>
           <a:prstGeom prst="rect">
             <a:avLst/>
@@ -4453,7 +4597,7 @@
               <a:buNone/>
             </a:pPr>
             <a:r>
-              <a:rPr lang="en-US" sz="1300" b="1" dirty="0">
+              <a:rPr lang="en-US" sz="1150" b="1" dirty="0">
                 <a:solidFill>
                   <a:srgbClr val="0284C7"/>
                 </a:solidFill>
@@ -4463,7 +4607,7 @@
               </a:rPr>
               <a:t>🚀 Phase 1: Near-Term Enhancements</a:t>
             </a:r>
-            <a:endParaRPr lang="en-US" sz="1300" dirty="0"/>
+            <a:endParaRPr lang="en-US" sz="1150" dirty="0"/>
           </a:p>
         </p:txBody>
       </p:sp>
@@ -4475,8 +4619,8 @@
         </p:nvSpPr>
         <p:spPr>
           <a:xfrm>
-            <a:off x="731520" y="1783080"/>
-            <a:ext cx="4937760" cy="2788920"/>
+            <a:off x="594360" y="1481328"/>
+            <a:ext cx="3703320" cy="3218688"/>
           </a:xfrm>
           <a:prstGeom prst="rect">
             <a:avLst/>
@@ -4490,11 +4634,11 @@
           <a:p>
             <a:pPr>
               <a:spcBef>
-                <a:spcPts val="400"/>
-              </a:spcBef>
-            </a:pPr>
-            <a:r>
-              <a:rPr lang="en-US" sz="1050" b="1" dirty="0">
+                <a:spcPts val="300"/>
+              </a:spcBef>
+            </a:pPr>
+            <a:r>
+              <a:rPr lang="en-US" sz="950" b="1" dirty="0">
                 <a:solidFill>
                   <a:srgbClr val="0F172A"/>
                 </a:solidFill>
@@ -4506,12 +4650,12 @@
             </a:r>
             <a:pPr indent="0" marL="0">
               <a:spcBef>
-                <a:spcPts val="400"/>
-              </a:spcBef>
-              <a:buNone/>
-            </a:pPr>
-            <a:r>
-              <a:rPr lang="en-US" sz="1050" dirty="0">
+                <a:spcPts val="300"/>
+              </a:spcBef>
+              <a:buNone/>
+            </a:pPr>
+            <a:r>
+              <a:rPr lang="en-US" sz="950" dirty="0">
                 <a:solidFill>
                   <a:srgbClr val="1E293B"/>
                 </a:solidFill>
@@ -4524,12 +4668,12 @@
             </a:r>
             <a:pPr indent="0" marL="0">
               <a:spcBef>
-                <a:spcPts val="400"/>
-              </a:spcBef>
-              <a:buNone/>
-            </a:pPr>
-            <a:r>
-              <a:rPr lang="en-US" sz="1050" b="1" dirty="0">
+                <a:spcPts val="300"/>
+              </a:spcBef>
+              <a:buNone/>
+            </a:pPr>
+            <a:r>
+              <a:rPr lang="en-US" sz="950" b="1" dirty="0">
                 <a:solidFill>
                   <a:srgbClr val="0F172A"/>
                 </a:solidFill>
@@ -4541,12 +4685,12 @@
             </a:r>
             <a:pPr indent="0" marL="0">
               <a:spcBef>
-                <a:spcPts val="400"/>
-              </a:spcBef>
-              <a:buNone/>
-            </a:pPr>
-            <a:r>
-              <a:rPr lang="en-US" sz="1050" dirty="0">
+                <a:spcPts val="300"/>
+              </a:spcBef>
+              <a:buNone/>
+            </a:pPr>
+            <a:r>
+              <a:rPr lang="en-US" sz="950" dirty="0">
                 <a:solidFill>
                   <a:srgbClr val="1E293B"/>
                 </a:solidFill>
@@ -4559,12 +4703,12 @@
             </a:r>
             <a:pPr indent="0" marL="0">
               <a:spcBef>
-                <a:spcPts val="400"/>
-              </a:spcBef>
-              <a:buNone/>
-            </a:pPr>
-            <a:r>
-              <a:rPr lang="en-US" sz="1050" b="1" dirty="0">
+                <a:spcPts val="300"/>
+              </a:spcBef>
+              <a:buNone/>
+            </a:pPr>
+            <a:r>
+              <a:rPr lang="en-US" sz="950" b="1" dirty="0">
                 <a:solidFill>
                   <a:srgbClr val="0F172A"/>
                 </a:solidFill>
@@ -4576,12 +4720,12 @@
             </a:r>
             <a:pPr indent="0" marL="0">
               <a:spcBef>
-                <a:spcPts val="400"/>
-              </a:spcBef>
-              <a:buNone/>
-            </a:pPr>
-            <a:r>
-              <a:rPr lang="en-US" sz="1050" dirty="0">
+                <a:spcPts val="300"/>
+              </a:spcBef>
+              <a:buNone/>
+            </a:pPr>
+            <a:r>
+              <a:rPr lang="en-US" sz="950" dirty="0">
                 <a:solidFill>
                   <a:srgbClr val="1E293B"/>
                 </a:solidFill>
@@ -4592,7 +4736,7 @@
               <a:t>Live scanning of process memory buffers against custom YARA threat rules.
 </a:t>
             </a:r>
-            <a:endParaRPr lang="en-US" sz="1050" dirty="0"/>
+            <a:endParaRPr lang="en-US" sz="950" dirty="0"/>
           </a:p>
         </p:txBody>
       </p:sp>
@@ -4604,12 +4748,12 @@
         </p:nvSpPr>
         <p:spPr>
           <a:xfrm>
-            <a:off x="6217920" y="1371600"/>
-            <a:ext cx="5394960" cy="3291840"/>
+            <a:off x="4709160" y="1097280"/>
+            <a:ext cx="3977640" cy="3657600"/>
           </a:xfrm>
           <a:prstGeom prst="roundRect">
             <a:avLst>
-              <a:gd name="adj" fmla="val 4167"/>
+              <a:gd name="adj" fmla="val 2500"/>
             </a:avLst>
           </a:prstGeom>
           <a:solidFill>
@@ -4631,8 +4775,8 @@
         </p:nvSpPr>
         <p:spPr>
           <a:xfrm>
-            <a:off x="6217920" y="1371600"/>
-            <a:ext cx="5394960" cy="365760"/>
+            <a:off x="4709160" y="1097280"/>
+            <a:ext cx="3977640" cy="347472"/>
           </a:xfrm>
           <a:prstGeom prst="rect">
             <a:avLst/>
@@ -4656,8 +4800,8 @@
         </p:nvSpPr>
         <p:spPr>
           <a:xfrm>
-            <a:off x="6355080" y="1417320"/>
-            <a:ext cx="5120640" cy="274320"/>
+            <a:off x="4846320" y="1133856"/>
+            <a:ext cx="3703320" cy="274320"/>
           </a:xfrm>
           <a:prstGeom prst="rect">
             <a:avLst/>
@@ -4673,7 +4817,7 @@
               <a:buNone/>
             </a:pPr>
             <a:r>
-              <a:rPr lang="en-US" sz="1300" b="1" dirty="0">
+              <a:rPr lang="en-US" sz="1150" b="1" dirty="0">
                 <a:solidFill>
                   <a:srgbClr val="0284C7"/>
                 </a:solidFill>
@@ -4683,7 +4827,7 @@
               </a:rPr>
               <a:t>🌐 Phase 2: Enterprise Infrastructure</a:t>
             </a:r>
-            <a:endParaRPr lang="en-US" sz="1300" dirty="0"/>
+            <a:endParaRPr lang="en-US" sz="1150" dirty="0"/>
           </a:p>
         </p:txBody>
       </p:sp>
@@ -4695,8 +4839,8 @@
         </p:nvSpPr>
         <p:spPr>
           <a:xfrm>
-            <a:off x="6400800" y="1783080"/>
-            <a:ext cx="5029200" cy="2788920"/>
+            <a:off x="4846320" y="1481328"/>
+            <a:ext cx="3703320" cy="3218688"/>
           </a:xfrm>
           <a:prstGeom prst="rect">
             <a:avLst/>
@@ -4710,11 +4854,11 @@
           <a:p>
             <a:pPr>
               <a:spcBef>
-                <a:spcPts val="400"/>
-              </a:spcBef>
-            </a:pPr>
-            <a:r>
-              <a:rPr lang="en-US" sz="1050" b="1" dirty="0">
+                <a:spcPts val="300"/>
+              </a:spcBef>
+            </a:pPr>
+            <a:r>
+              <a:rPr lang="en-US" sz="950" b="1" dirty="0">
                 <a:solidFill>
                   <a:srgbClr val="0F172A"/>
                 </a:solidFill>
@@ -4726,12 +4870,12 @@
             </a:r>
             <a:pPr indent="0" marL="0">
               <a:spcBef>
-                <a:spcPts val="400"/>
-              </a:spcBef>
-              <a:buNone/>
-            </a:pPr>
-            <a:r>
-              <a:rPr lang="en-US" sz="1050" dirty="0">
+                <a:spcPts val="300"/>
+              </a:spcBef>
+              <a:buNone/>
+            </a:pPr>
+            <a:r>
+              <a:rPr lang="en-US" sz="950" dirty="0">
                 <a:solidFill>
                   <a:srgbClr val="1E293B"/>
                 </a:solidFill>
@@ -4744,12 +4888,12 @@
             </a:r>
             <a:pPr indent="0" marL="0">
               <a:spcBef>
-                <a:spcPts val="400"/>
-              </a:spcBef>
-              <a:buNone/>
-            </a:pPr>
-            <a:r>
-              <a:rPr lang="en-US" sz="1050" b="1" dirty="0">
+                <a:spcPts val="300"/>
+              </a:spcBef>
+              <a:buNone/>
+            </a:pPr>
+            <a:r>
+              <a:rPr lang="en-US" sz="950" b="1" dirty="0">
                 <a:solidFill>
                   <a:srgbClr val="0F172A"/>
                 </a:solidFill>
@@ -4761,12 +4905,12 @@
             </a:r>
             <a:pPr indent="0" marL="0">
               <a:spcBef>
-                <a:spcPts val="400"/>
-              </a:spcBef>
-              <a:buNone/>
-            </a:pPr>
-            <a:r>
-              <a:rPr lang="en-US" sz="1050" dirty="0">
+                <a:spcPts val="300"/>
+              </a:spcBef>
+              <a:buNone/>
+            </a:pPr>
+            <a:r>
+              <a:rPr lang="en-US" sz="950" dirty="0">
                 <a:solidFill>
                   <a:srgbClr val="1E293B"/>
                 </a:solidFill>
@@ -4779,12 +4923,12 @@
             </a:r>
             <a:pPr indent="0" marL="0">
               <a:spcBef>
-                <a:spcPts val="400"/>
-              </a:spcBef>
-              <a:buNone/>
-            </a:pPr>
-            <a:r>
-              <a:rPr lang="en-US" sz="1050" b="1" dirty="0">
+                <a:spcPts val="300"/>
+              </a:spcBef>
+              <a:buNone/>
+            </a:pPr>
+            <a:r>
+              <a:rPr lang="en-US" sz="950" b="1" dirty="0">
                 <a:solidFill>
                   <a:srgbClr val="0F172A"/>
                 </a:solidFill>
@@ -4796,12 +4940,12 @@
             </a:r>
             <a:pPr indent="0" marL="0">
               <a:spcBef>
-                <a:spcPts val="400"/>
-              </a:spcBef>
-              <a:buNone/>
-            </a:pPr>
-            <a:r>
-              <a:rPr lang="en-US" sz="1050" dirty="0">
+                <a:spcPts val="300"/>
+              </a:spcBef>
+              <a:buNone/>
+            </a:pPr>
+            <a:r>
+              <a:rPr lang="en-US" sz="950" dirty="0">
                 <a:solidFill>
                   <a:srgbClr val="1E293B"/>
                 </a:solidFill>
@@ -4812,7 +4956,7 @@
               <a:t>Federated on-device model updating with feedback loops.
 </a:t>
             </a:r>
-            <a:endParaRPr lang="en-US" sz="1050" dirty="0"/>
+            <a:endParaRPr lang="en-US" sz="950" dirty="0"/>
           </a:p>
         </p:txBody>
       </p:sp>
@@ -4856,8 +5000,8 @@
         </p:nvSpPr>
         <p:spPr>
           <a:xfrm>
-            <a:off x="914400" y="731520"/>
-            <a:ext cx="10360152" cy="365760"/>
+            <a:off x="457200" y="548640"/>
+            <a:ext cx="8229600" cy="320040"/>
           </a:xfrm>
           <a:prstGeom prst="rect">
             <a:avLst/>
@@ -4873,7 +5017,7 @@
               <a:buNone/>
             </a:pPr>
             <a:r>
-              <a:rPr lang="en-US" sz="1200" b="1" dirty="0">
+              <a:rPr lang="en-US" sz="1100" b="1" dirty="0">
                 <a:solidFill>
                   <a:srgbClr val="059669"/>
                 </a:solidFill>
@@ -4883,7 +5027,7 @@
               </a:rPr>
               <a:t>PROJECT COMPLETION &amp; EVALUATION</a:t>
             </a:r>
-            <a:endParaRPr lang="en-US" sz="1200" dirty="0"/>
+            <a:endParaRPr lang="en-US" sz="1100" dirty="0"/>
           </a:p>
         </p:txBody>
       </p:sp>
@@ -4895,8 +5039,8 @@
         </p:nvSpPr>
         <p:spPr>
           <a:xfrm>
-            <a:off x="914400" y="1188720"/>
-            <a:ext cx="10360152" cy="914400"/>
+            <a:off x="457200" y="960120"/>
+            <a:ext cx="8229600" cy="685800"/>
           </a:xfrm>
           <a:prstGeom prst="rect">
             <a:avLst/>
@@ -4912,7 +5056,7 @@
               <a:buNone/>
             </a:pPr>
             <a:r>
-              <a:rPr lang="en-US" sz="4800" b="1" dirty="0">
+              <a:rPr lang="en-US" sz="4000" b="1" dirty="0">
                 <a:solidFill>
                   <a:srgbClr val="FFFFFF"/>
                 </a:solidFill>
@@ -4922,7 +5066,7 @@
               </a:rPr>
               <a:t>Thank You!</a:t>
             </a:r>
-            <a:endParaRPr lang="en-US" sz="4800" dirty="0"/>
+            <a:endParaRPr lang="en-US" sz="4000" dirty="0"/>
           </a:p>
         </p:txBody>
       </p:sp>
@@ -4934,8 +5078,8 @@
         </p:nvSpPr>
         <p:spPr>
           <a:xfrm>
-            <a:off x="914400" y="2103120"/>
-            <a:ext cx="10360152" cy="457200"/>
+            <a:off x="457200" y="1691640"/>
+            <a:ext cx="8229600" cy="365760"/>
           </a:xfrm>
           <a:prstGeom prst="rect">
             <a:avLst/>
@@ -4951,7 +5095,7 @@
               <a:buNone/>
             </a:pPr>
             <a:r>
-              <a:rPr lang="en-US" sz="1800" dirty="0">
+              <a:rPr lang="en-US" sz="1400" dirty="0">
                 <a:solidFill>
                   <a:srgbClr val="CBD5E1"/>
                 </a:solidFill>
@@ -4961,7 +5105,7 @@
               </a:rPr>
               <a:t>Sentinel AI — Intelligent Endpoint Threat Detection &amp; Response System</a:t>
             </a:r>
-            <a:endParaRPr lang="en-US" sz="1800" dirty="0"/>
+            <a:endParaRPr lang="en-US" sz="1400" dirty="0"/>
           </a:p>
         </p:txBody>
       </p:sp>
@@ -4973,12 +5117,12 @@
         </p:nvSpPr>
         <p:spPr>
           <a:xfrm>
-            <a:off x="2286000" y="2834640"/>
-            <a:ext cx="7616952" cy="822960"/>
+            <a:off x="914400" y="2423160"/>
+            <a:ext cx="7315200" cy="1188720"/>
           </a:xfrm>
           <a:prstGeom prst="roundRect">
             <a:avLst>
-              <a:gd name="adj" fmla="val 11111"/>
+              <a:gd name="adj" fmla="val 7692"/>
             </a:avLst>
           </a:prstGeom>
           <a:solidFill>
@@ -5000,8 +5144,8 @@
         </p:nvSpPr>
         <p:spPr>
           <a:xfrm>
-            <a:off x="2286000" y="2971800"/>
-            <a:ext cx="7616952" cy="274320"/>
+            <a:off x="914400" y="2606040"/>
+            <a:ext cx="7315200" cy="274320"/>
           </a:xfrm>
           <a:prstGeom prst="rect">
             <a:avLst/>
@@ -5039,8 +5183,8 @@
         </p:nvSpPr>
         <p:spPr>
           <a:xfrm>
-            <a:off x="2286000" y="3246120"/>
-            <a:ext cx="7616952" cy="320040"/>
+            <a:off x="914400" y="2971800"/>
+            <a:ext cx="7315200" cy="365760"/>
           </a:xfrm>
           <a:prstGeom prst="rect">
             <a:avLst/>
@@ -5078,8 +5222,8 @@
         </p:nvSpPr>
         <p:spPr>
           <a:xfrm>
-            <a:off x="914400" y="4114800"/>
-            <a:ext cx="10360152" cy="365760"/>
+            <a:off x="457200" y="3931920"/>
+            <a:ext cx="8229600" cy="365760"/>
           </a:xfrm>
           <a:prstGeom prst="rect">
             <a:avLst/>
@@ -5095,7 +5239,7 @@
               <a:buNone/>
             </a:pPr>
             <a:r>
-              <a:rPr lang="en-US" sz="1200" dirty="0">
+              <a:rPr lang="en-US" sz="1100" dirty="0">
                 <a:solidFill>
                   <a:srgbClr val="CBD5E1"/>
                 </a:solidFill>
@@ -5105,7 +5249,7 @@
               </a:rPr>
               <a:t>Presenters: Tanmay Gawali (Lead)  |  Divij Kulkarni  |  Soham Wadale  |  Ananya Kaushik</a:t>
             </a:r>
-            <a:endParaRPr lang="en-US" sz="1200" dirty="0"/>
+            <a:endParaRPr lang="en-US" sz="1100" dirty="0"/>
           </a:p>
         </p:txBody>
       </p:sp>
@@ -5149,8 +5293,8 @@
         </p:nvSpPr>
         <p:spPr>
           <a:xfrm>
-            <a:off x="548640" y="365760"/>
-            <a:ext cx="7772400" cy="457200"/>
+            <a:off x="457200" y="320040"/>
+            <a:ext cx="6035040" cy="365760"/>
           </a:xfrm>
           <a:prstGeom prst="rect">
             <a:avLst/>
@@ -5166,7 +5310,7 @@
               <a:buNone/>
             </a:pPr>
             <a:r>
-              <a:rPr lang="en-US" sz="2200" b="1" dirty="0">
+              <a:rPr lang="en-US" sz="1800" b="1" dirty="0">
                 <a:solidFill>
                   <a:srgbClr val="0F172A"/>
                 </a:solidFill>
@@ -5176,7 +5320,7 @@
               </a:rPr>
               <a:t>The Endpoint Security Challenge</a:t>
             </a:r>
-            <a:endParaRPr lang="en-US" sz="2200" dirty="0"/>
+            <a:endParaRPr lang="en-US" sz="1800" dirty="0"/>
           </a:p>
         </p:txBody>
       </p:sp>
@@ -5188,8 +5332,8 @@
         </p:nvSpPr>
         <p:spPr>
           <a:xfrm>
-            <a:off x="548640" y="777240"/>
-            <a:ext cx="7772400" cy="274320"/>
+            <a:off x="457200" y="685800"/>
+            <a:ext cx="6035040" cy="228600"/>
           </a:xfrm>
           <a:prstGeom prst="rect">
             <a:avLst/>
@@ -5205,7 +5349,7 @@
               <a:buNone/>
             </a:pPr>
             <a:r>
-              <a:rPr lang="en-US" sz="1200" dirty="0">
+              <a:rPr lang="en-US" sz="1050" dirty="0">
                 <a:solidFill>
                   <a:srgbClr val="0284C7"/>
                 </a:solidFill>
@@ -5215,7 +5359,7 @@
               </a:rPr>
               <a:t>Limitations of Legacy Signature Antivirus &amp; Heavy Cloud EDRs</a:t>
             </a:r>
-            <a:endParaRPr lang="en-US" sz="1200" dirty="0"/>
+            <a:endParaRPr lang="en-US" sz="1050" dirty="0"/>
           </a:p>
         </p:txBody>
       </p:sp>
@@ -5227,12 +5371,12 @@
         </p:nvSpPr>
         <p:spPr>
           <a:xfrm>
-            <a:off x="8778240" y="365760"/>
-            <a:ext cx="2926080" cy="411480"/>
+            <a:off x="6675120" y="320040"/>
+            <a:ext cx="2011680" cy="365760"/>
           </a:xfrm>
           <a:prstGeom prst="roundRect">
             <a:avLst>
-              <a:gd name="adj" fmla="val 44444"/>
+              <a:gd name="adj" fmla="val 50000"/>
             </a:avLst>
           </a:prstGeom>
           <a:solidFill>
@@ -5254,8 +5398,8 @@
         </p:nvSpPr>
         <p:spPr>
           <a:xfrm>
-            <a:off x="8778240" y="365760"/>
-            <a:ext cx="2926080" cy="411480"/>
+            <a:off x="6675120" y="320040"/>
+            <a:ext cx="2011680" cy="365760"/>
           </a:xfrm>
           <a:prstGeom prst="rect">
             <a:avLst/>
@@ -5271,7 +5415,7 @@
               <a:buNone/>
             </a:pPr>
             <a:r>
-              <a:rPr lang="en-US" sz="1000" b="1" dirty="0">
+              <a:rPr lang="en-US" sz="900" b="1" dirty="0">
                 <a:solidFill>
                   <a:srgbClr val="7C3AED"/>
                 </a:solidFill>
@@ -5281,7 +5425,7 @@
               </a:rPr>
               <a:t>🎙️ Tanmay Gawali</a:t>
             </a:r>
-            <a:endParaRPr lang="en-US" sz="1000" dirty="0"/>
+            <a:endParaRPr lang="en-US" sz="900" dirty="0"/>
           </a:p>
         </p:txBody>
       </p:sp>
@@ -5293,8 +5437,8 @@
         </p:nvSpPr>
         <p:spPr>
           <a:xfrm>
-            <a:off x="548640" y="1143000"/>
-            <a:ext cx="11091672" cy="0"/>
+            <a:off x="457200" y="960120"/>
+            <a:ext cx="8229600" cy="0"/>
           </a:xfrm>
           <a:prstGeom prst="line">
             <a:avLst/>
@@ -5316,12 +5460,12 @@
         </p:nvSpPr>
         <p:spPr>
           <a:xfrm>
-            <a:off x="548640" y="1371600"/>
-            <a:ext cx="5303520" cy="3291840"/>
+            <a:off x="457200" y="1097280"/>
+            <a:ext cx="3977640" cy="3657600"/>
           </a:xfrm>
           <a:prstGeom prst="roundRect">
             <a:avLst>
-              <a:gd name="adj" fmla="val 4167"/>
+              <a:gd name="adj" fmla="val 2500"/>
             </a:avLst>
           </a:prstGeom>
           <a:solidFill>
@@ -5343,8 +5487,8 @@
         </p:nvSpPr>
         <p:spPr>
           <a:xfrm>
-            <a:off x="548640" y="1371600"/>
-            <a:ext cx="5303520" cy="365760"/>
+            <a:off x="457200" y="1097280"/>
+            <a:ext cx="3977640" cy="347472"/>
           </a:xfrm>
           <a:prstGeom prst="rect">
             <a:avLst/>
@@ -5368,8 +5512,8 @@
         </p:nvSpPr>
         <p:spPr>
           <a:xfrm>
-            <a:off x="685800" y="1417320"/>
-            <a:ext cx="5029200" cy="274320"/>
+            <a:off x="594360" y="1133856"/>
+            <a:ext cx="3703320" cy="274320"/>
           </a:xfrm>
           <a:prstGeom prst="rect">
             <a:avLst/>
@@ -5385,7 +5529,7 @@
               <a:buNone/>
             </a:pPr>
             <a:r>
-              <a:rPr lang="en-US" sz="1300" b="1" dirty="0">
+              <a:rPr lang="en-US" sz="1150" b="1" dirty="0">
                 <a:solidFill>
                   <a:srgbClr val="0284C7"/>
                 </a:solidFill>
@@ -5395,7 +5539,7 @@
               </a:rPr>
               <a:t>⚠️ Current Industry Vulnerabilities</a:t>
             </a:r>
-            <a:endParaRPr lang="en-US" sz="1300" dirty="0"/>
+            <a:endParaRPr lang="en-US" sz="1150" dirty="0"/>
           </a:p>
         </p:txBody>
       </p:sp>
@@ -5407,8 +5551,8 @@
         </p:nvSpPr>
         <p:spPr>
           <a:xfrm>
-            <a:off x="731520" y="1783080"/>
-            <a:ext cx="4937760" cy="2788920"/>
+            <a:off x="594360" y="1481328"/>
+            <a:ext cx="3703320" cy="3218688"/>
           </a:xfrm>
           <a:prstGeom prst="rect">
             <a:avLst/>
@@ -5422,11 +5566,11 @@
           <a:p>
             <a:pPr>
               <a:spcBef>
-                <a:spcPts val="400"/>
-              </a:spcBef>
-            </a:pPr>
-            <a:r>
-              <a:rPr lang="en-US" sz="1050" b="1" dirty="0">
+                <a:spcPts val="300"/>
+              </a:spcBef>
+            </a:pPr>
+            <a:r>
+              <a:rPr lang="en-US" sz="950" b="1" dirty="0">
                 <a:solidFill>
                   <a:srgbClr val="0F172A"/>
                 </a:solidFill>
@@ -5438,12 +5582,12 @@
             </a:r>
             <a:pPr indent="0" marL="0">
               <a:spcBef>
-                <a:spcPts val="400"/>
-              </a:spcBef>
-              <a:buNone/>
-            </a:pPr>
-            <a:r>
-              <a:rPr lang="en-US" sz="1050" dirty="0">
+                <a:spcPts val="300"/>
+              </a:spcBef>
+              <a:buNone/>
+            </a:pPr>
+            <a:r>
+              <a:rPr lang="en-US" sz="950" dirty="0">
                 <a:solidFill>
                   <a:srgbClr val="1E293B"/>
                 </a:solidFill>
@@ -5456,12 +5600,12 @@
             </a:r>
             <a:pPr indent="0" marL="0">
               <a:spcBef>
-                <a:spcPts val="400"/>
-              </a:spcBef>
-              <a:buNone/>
-            </a:pPr>
-            <a:r>
-              <a:rPr lang="en-US" sz="1050" b="1" dirty="0">
+                <a:spcPts val="300"/>
+              </a:spcBef>
+              <a:buNone/>
+            </a:pPr>
+            <a:r>
+              <a:rPr lang="en-US" sz="950" b="1" dirty="0">
                 <a:solidFill>
                   <a:srgbClr val="0F172A"/>
                 </a:solidFill>
@@ -5473,12 +5617,12 @@
             </a:r>
             <a:pPr indent="0" marL="0">
               <a:spcBef>
-                <a:spcPts val="400"/>
-              </a:spcBef>
-              <a:buNone/>
-            </a:pPr>
-            <a:r>
-              <a:rPr lang="en-US" sz="1050" dirty="0">
+                <a:spcPts val="300"/>
+              </a:spcBef>
+              <a:buNone/>
+            </a:pPr>
+            <a:r>
+              <a:rPr lang="en-US" sz="950" dirty="0">
                 <a:solidFill>
                   <a:srgbClr val="1E293B"/>
                 </a:solidFill>
@@ -5491,12 +5635,12 @@
             </a:r>
             <a:pPr indent="0" marL="0">
               <a:spcBef>
-                <a:spcPts val="400"/>
-              </a:spcBef>
-              <a:buNone/>
-            </a:pPr>
-            <a:r>
-              <a:rPr lang="en-US" sz="1050" b="1" dirty="0">
+                <a:spcPts val="300"/>
+              </a:spcBef>
+              <a:buNone/>
+            </a:pPr>
+            <a:r>
+              <a:rPr lang="en-US" sz="950" b="1" dirty="0">
                 <a:solidFill>
                   <a:srgbClr val="0F172A"/>
                 </a:solidFill>
@@ -5508,12 +5652,12 @@
             </a:r>
             <a:pPr indent="0" marL="0">
               <a:spcBef>
-                <a:spcPts val="400"/>
-              </a:spcBef>
-              <a:buNone/>
-            </a:pPr>
-            <a:r>
-              <a:rPr lang="en-US" sz="1050" dirty="0">
+                <a:spcPts val="300"/>
+              </a:spcBef>
+              <a:buNone/>
+            </a:pPr>
+            <a:r>
+              <a:rPr lang="en-US" sz="950" dirty="0">
                 <a:solidFill>
                   <a:srgbClr val="1E293B"/>
                 </a:solidFill>
@@ -5526,12 +5670,12 @@
             </a:r>
             <a:pPr indent="0" marL="0">
               <a:spcBef>
-                <a:spcPts val="400"/>
-              </a:spcBef>
-              <a:buNone/>
-            </a:pPr>
-            <a:r>
-              <a:rPr lang="en-US" sz="1050" b="1" dirty="0">
+                <a:spcPts val="300"/>
+              </a:spcBef>
+              <a:buNone/>
+            </a:pPr>
+            <a:r>
+              <a:rPr lang="en-US" sz="950" b="1" dirty="0">
                 <a:solidFill>
                   <a:srgbClr val="0F172A"/>
                 </a:solidFill>
@@ -5543,12 +5687,12 @@
             </a:r>
             <a:pPr indent="0" marL="0">
               <a:spcBef>
-                <a:spcPts val="400"/>
-              </a:spcBef>
-              <a:buNone/>
-            </a:pPr>
-            <a:r>
-              <a:rPr lang="en-US" sz="1050" dirty="0">
+                <a:spcPts val="300"/>
+              </a:spcBef>
+              <a:buNone/>
+            </a:pPr>
+            <a:r>
+              <a:rPr lang="en-US" sz="950" dirty="0">
                 <a:solidFill>
                   <a:srgbClr val="1E293B"/>
                 </a:solidFill>
@@ -5559,7 +5703,7 @@
               <a:t>Commercial EDR agents frequently consume 15-25% CPU, degrading host device performance.
 </a:t>
             </a:r>
-            <a:endParaRPr lang="en-US" sz="1050" dirty="0"/>
+            <a:endParaRPr lang="en-US" sz="950" dirty="0"/>
           </a:p>
         </p:txBody>
       </p:sp>
@@ -5571,12 +5715,12 @@
         </p:nvSpPr>
         <p:spPr>
           <a:xfrm>
-            <a:off x="6217920" y="1371600"/>
-            <a:ext cx="5394960" cy="3291840"/>
+            <a:off x="4709160" y="1097280"/>
+            <a:ext cx="3977640" cy="3657600"/>
           </a:xfrm>
           <a:prstGeom prst="roundRect">
             <a:avLst>
-              <a:gd name="adj" fmla="val 4167"/>
+              <a:gd name="adj" fmla="val 2500"/>
             </a:avLst>
           </a:prstGeom>
           <a:solidFill>
@@ -5598,8 +5742,8 @@
         </p:nvSpPr>
         <p:spPr>
           <a:xfrm>
-            <a:off x="6217920" y="1371600"/>
-            <a:ext cx="5394960" cy="365760"/>
+            <a:off x="4709160" y="1097280"/>
+            <a:ext cx="3977640" cy="347472"/>
           </a:xfrm>
           <a:prstGeom prst="rect">
             <a:avLst/>
@@ -5623,8 +5767,8 @@
         </p:nvSpPr>
         <p:spPr>
           <a:xfrm>
-            <a:off x="6355080" y="1417320"/>
-            <a:ext cx="5120640" cy="274320"/>
+            <a:off x="4846320" y="1133856"/>
+            <a:ext cx="3703320" cy="274320"/>
           </a:xfrm>
           <a:prstGeom prst="rect">
             <a:avLst/>
@@ -5640,7 +5784,7 @@
               <a:buNone/>
             </a:pPr>
             <a:r>
-              <a:rPr lang="en-US" sz="1300" b="1" dirty="0">
+              <a:rPr lang="en-US" sz="1150" b="1" dirty="0">
                 <a:solidFill>
                   <a:srgbClr val="0284C7"/>
                 </a:solidFill>
@@ -5650,7 +5794,7 @@
               </a:rPr>
               <a:t>🎯 The Sentinel AI Solution</a:t>
             </a:r>
-            <a:endParaRPr lang="en-US" sz="1300" dirty="0"/>
+            <a:endParaRPr lang="en-US" sz="1150" dirty="0"/>
           </a:p>
         </p:txBody>
       </p:sp>
@@ -5662,8 +5806,8 @@
         </p:nvSpPr>
         <p:spPr>
           <a:xfrm>
-            <a:off x="6400800" y="1783080"/>
-            <a:ext cx="5029200" cy="2788920"/>
+            <a:off x="4846320" y="1481328"/>
+            <a:ext cx="3703320" cy="3218688"/>
           </a:xfrm>
           <a:prstGeom prst="rect">
             <a:avLst/>
@@ -5677,11 +5821,11 @@
           <a:p>
             <a:pPr>
               <a:spcBef>
-                <a:spcPts val="400"/>
-              </a:spcBef>
-            </a:pPr>
-            <a:r>
-              <a:rPr lang="en-US" sz="1050" b="1" dirty="0">
+                <a:spcPts val="300"/>
+              </a:spcBef>
+            </a:pPr>
+            <a:r>
+              <a:rPr lang="en-US" sz="950" b="1" dirty="0">
                 <a:solidFill>
                   <a:srgbClr val="0F172A"/>
                 </a:solidFill>
@@ -5693,12 +5837,12 @@
             </a:r>
             <a:pPr indent="0" marL="0">
               <a:spcBef>
-                <a:spcPts val="400"/>
-              </a:spcBef>
-              <a:buNone/>
-            </a:pPr>
-            <a:r>
-              <a:rPr lang="en-US" sz="1050" dirty="0">
+                <a:spcPts val="300"/>
+              </a:spcBef>
+              <a:buNone/>
+            </a:pPr>
+            <a:r>
+              <a:rPr lang="en-US" sz="950" dirty="0">
                 <a:solidFill>
                   <a:srgbClr val="1E293B"/>
                 </a:solidFill>
@@ -5711,12 +5855,12 @@
             </a:r>
             <a:pPr indent="0" marL="0">
               <a:spcBef>
-                <a:spcPts val="400"/>
-              </a:spcBef>
-              <a:buNone/>
-            </a:pPr>
-            <a:r>
-              <a:rPr lang="en-US" sz="1050" b="1" dirty="0">
+                <a:spcPts val="300"/>
+              </a:spcBef>
+              <a:buNone/>
+            </a:pPr>
+            <a:r>
+              <a:rPr lang="en-US" sz="950" b="1" dirty="0">
                 <a:solidFill>
                   <a:srgbClr val="0F172A"/>
                 </a:solidFill>
@@ -5728,12 +5872,12 @@
             </a:r>
             <a:pPr indent="0" marL="0">
               <a:spcBef>
-                <a:spcPts val="400"/>
-              </a:spcBef>
-              <a:buNone/>
-            </a:pPr>
-            <a:r>
-              <a:rPr lang="en-US" sz="1050" dirty="0">
+                <a:spcPts val="300"/>
+              </a:spcBef>
+              <a:buNone/>
+            </a:pPr>
+            <a:r>
+              <a:rPr lang="en-US" sz="950" dirty="0">
                 <a:solidFill>
                   <a:srgbClr val="1E293B"/>
                 </a:solidFill>
@@ -5746,12 +5890,12 @@
             </a:r>
             <a:pPr indent="0" marL="0">
               <a:spcBef>
-                <a:spcPts val="400"/>
-              </a:spcBef>
-              <a:buNone/>
-            </a:pPr>
-            <a:r>
-              <a:rPr lang="en-US" sz="1050" b="1" dirty="0">
+                <a:spcPts val="300"/>
+              </a:spcBef>
+              <a:buNone/>
+            </a:pPr>
+            <a:r>
+              <a:rPr lang="en-US" sz="950" b="1" dirty="0">
                 <a:solidFill>
                   <a:srgbClr val="0F172A"/>
                 </a:solidFill>
@@ -5763,12 +5907,12 @@
             </a:r>
             <a:pPr indent="0" marL="0">
               <a:spcBef>
-                <a:spcPts val="400"/>
-              </a:spcBef>
-              <a:buNone/>
-            </a:pPr>
-            <a:r>
-              <a:rPr lang="en-US" sz="1050" dirty="0">
+                <a:spcPts val="300"/>
+              </a:spcBef>
+              <a:buNone/>
+            </a:pPr>
+            <a:r>
+              <a:rPr lang="en-US" sz="950" dirty="0">
                 <a:solidFill>
                   <a:srgbClr val="1E293B"/>
                 </a:solidFill>
@@ -5781,12 +5925,12 @@
             </a:r>
             <a:pPr indent="0" marL="0">
               <a:spcBef>
-                <a:spcPts val="400"/>
-              </a:spcBef>
-              <a:buNone/>
-            </a:pPr>
-            <a:r>
-              <a:rPr lang="en-US" sz="1050" b="1" dirty="0">
+                <a:spcPts val="300"/>
+              </a:spcBef>
+              <a:buNone/>
+            </a:pPr>
+            <a:r>
+              <a:rPr lang="en-US" sz="950" b="1" dirty="0">
                 <a:solidFill>
                   <a:srgbClr val="0F172A"/>
                 </a:solidFill>
@@ -5798,12 +5942,12 @@
             </a:r>
             <a:pPr indent="0" marL="0">
               <a:spcBef>
-                <a:spcPts val="400"/>
-              </a:spcBef>
-              <a:buNone/>
-            </a:pPr>
-            <a:r>
-              <a:rPr lang="en-US" sz="1050" dirty="0">
+                <a:spcPts val="300"/>
+              </a:spcBef>
+              <a:buNone/>
+            </a:pPr>
+            <a:r>
+              <a:rPr lang="en-US" sz="950" dirty="0">
                 <a:solidFill>
                   <a:srgbClr val="1E293B"/>
                 </a:solidFill>
@@ -5814,7 +5958,7 @@
               <a:t>Generates standardized NIST SP 800-61 Rev. 2 forensic packages for security operations.
 </a:t>
             </a:r>
-            <a:endParaRPr lang="en-US" sz="1050" dirty="0"/>
+            <a:endParaRPr lang="en-US" sz="950" dirty="0"/>
           </a:p>
         </p:txBody>
       </p:sp>
@@ -5858,8 +6002,8 @@
         </p:nvSpPr>
         <p:spPr>
           <a:xfrm>
-            <a:off x="548640" y="365760"/>
-            <a:ext cx="7772400" cy="457200"/>
+            <a:off x="457200" y="320040"/>
+            <a:ext cx="6035040" cy="365760"/>
           </a:xfrm>
           <a:prstGeom prst="rect">
             <a:avLst/>
@@ -5875,7 +6019,7 @@
               <a:buNone/>
             </a:pPr>
             <a:r>
-              <a:rPr lang="en-US" sz="2200" b="1" dirty="0">
+              <a:rPr lang="en-US" sz="1800" b="1" dirty="0">
                 <a:solidFill>
                   <a:srgbClr val="0F172A"/>
                 </a:solidFill>
@@ -5885,7 +6029,7 @@
               </a:rPr>
               <a:t>Team Role Allocation &amp; Technical Ownership</a:t>
             </a:r>
-            <a:endParaRPr lang="en-US" sz="2200" dirty="0"/>
+            <a:endParaRPr lang="en-US" sz="1800" dirty="0"/>
           </a:p>
         </p:txBody>
       </p:sp>
@@ -5897,8 +6041,8 @@
         </p:nvSpPr>
         <p:spPr>
           <a:xfrm>
-            <a:off x="548640" y="777240"/>
-            <a:ext cx="7772400" cy="274320"/>
+            <a:off x="457200" y="685800"/>
+            <a:ext cx="6035040" cy="228600"/>
           </a:xfrm>
           <a:prstGeom prst="rect">
             <a:avLst/>
@@ -5914,7 +6058,7 @@
               <a:buNone/>
             </a:pPr>
             <a:r>
-              <a:rPr lang="en-US" sz="1200" dirty="0">
+              <a:rPr lang="en-US" sz="1050" dirty="0">
                 <a:solidFill>
                   <a:srgbClr val="0284C7"/>
                 </a:solidFill>
@@ -5924,7 +6068,7 @@
               </a:rPr>
               <a:t>Structured Division of Responsibilities Across Architecture, Core &amp; Compliance</a:t>
             </a:r>
-            <a:endParaRPr lang="en-US" sz="1200" dirty="0"/>
+            <a:endParaRPr lang="en-US" sz="1050" dirty="0"/>
           </a:p>
         </p:txBody>
       </p:sp>
@@ -5936,12 +6080,12 @@
         </p:nvSpPr>
         <p:spPr>
           <a:xfrm>
-            <a:off x="8778240" y="365760"/>
-            <a:ext cx="2926080" cy="411480"/>
+            <a:off x="6675120" y="320040"/>
+            <a:ext cx="2011680" cy="365760"/>
           </a:xfrm>
           <a:prstGeom prst="roundRect">
             <a:avLst>
-              <a:gd name="adj" fmla="val 44444"/>
+              <a:gd name="adj" fmla="val 50000"/>
             </a:avLst>
           </a:prstGeom>
           <a:solidFill>
@@ -5963,8 +6107,8 @@
         </p:nvSpPr>
         <p:spPr>
           <a:xfrm>
-            <a:off x="8778240" y="365760"/>
-            <a:ext cx="2926080" cy="411480"/>
+            <a:off x="6675120" y="320040"/>
+            <a:ext cx="2011680" cy="365760"/>
           </a:xfrm>
           <a:prstGeom prst="rect">
             <a:avLst/>
@@ -5980,7 +6124,7 @@
               <a:buNone/>
             </a:pPr>
             <a:r>
-              <a:rPr lang="en-US" sz="1000" b="1" dirty="0">
+              <a:rPr lang="en-US" sz="900" b="1" dirty="0">
                 <a:solidFill>
                   <a:srgbClr val="7C3AED"/>
                 </a:solidFill>
@@ -5990,7 +6134,7 @@
               </a:rPr>
               <a:t>🎙️ Tanmay Gawali</a:t>
             </a:r>
-            <a:endParaRPr lang="en-US" sz="1000" dirty="0"/>
+            <a:endParaRPr lang="en-US" sz="900" dirty="0"/>
           </a:p>
         </p:txBody>
       </p:sp>
@@ -6002,8 +6146,8 @@
         </p:nvSpPr>
         <p:spPr>
           <a:xfrm>
-            <a:off x="548640" y="1143000"/>
-            <a:ext cx="11091672" cy="0"/>
+            <a:off x="457200" y="960120"/>
+            <a:ext cx="8229600" cy="0"/>
           </a:xfrm>
           <a:prstGeom prst="line">
             <a:avLst/>
@@ -6025,12 +6169,12 @@
         </p:nvSpPr>
         <p:spPr>
           <a:xfrm>
-            <a:off x="548640" y="1371600"/>
-            <a:ext cx="5303520" cy="1554480"/>
+            <a:off x="457200" y="1097280"/>
+            <a:ext cx="3977640" cy="1737360"/>
           </a:xfrm>
           <a:prstGeom prst="roundRect">
             <a:avLst>
-              <a:gd name="adj" fmla="val 8824"/>
+              <a:gd name="adj" fmla="val 5263"/>
             </a:avLst>
           </a:prstGeom>
           <a:solidFill>
@@ -6052,8 +6196,8 @@
         </p:nvSpPr>
         <p:spPr>
           <a:xfrm>
-            <a:off x="548640" y="1371600"/>
-            <a:ext cx="5303520" cy="365760"/>
+            <a:off x="457200" y="1097280"/>
+            <a:ext cx="3977640" cy="347472"/>
           </a:xfrm>
           <a:prstGeom prst="rect">
             <a:avLst/>
@@ -6077,8 +6221,8 @@
         </p:nvSpPr>
         <p:spPr>
           <a:xfrm>
-            <a:off x="685800" y="1417320"/>
-            <a:ext cx="5029200" cy="274320"/>
+            <a:off x="594360" y="1133856"/>
+            <a:ext cx="3703320" cy="274320"/>
           </a:xfrm>
           <a:prstGeom prst="rect">
             <a:avLst/>
@@ -6094,7 +6238,7 @@
               <a:buNone/>
             </a:pPr>
             <a:r>
-              <a:rPr lang="en-US" sz="1300" b="1" dirty="0">
+              <a:rPr lang="en-US" sz="1150" b="1" dirty="0">
                 <a:solidFill>
                   <a:srgbClr val="0284C7"/>
                 </a:solidFill>
@@ -6104,7 +6248,7 @@
               </a:rPr>
               <a:t>Tanmay Gawali (Team Lead) — AI Engine Architect</a:t>
             </a:r>
-            <a:endParaRPr lang="en-US" sz="1300" dirty="0"/>
+            <a:endParaRPr lang="en-US" sz="1150" dirty="0"/>
           </a:p>
         </p:txBody>
       </p:sp>
@@ -6116,8 +6260,8 @@
         </p:nvSpPr>
         <p:spPr>
           <a:xfrm>
-            <a:off x="731520" y="1783080"/>
-            <a:ext cx="4937760" cy="1051560"/>
+            <a:off x="594360" y="1481328"/>
+            <a:ext cx="3703320" cy="1298448"/>
           </a:xfrm>
           <a:prstGeom prst="rect">
             <a:avLst/>
@@ -6131,11 +6275,11 @@
           <a:p>
             <a:pPr>
               <a:spcBef>
-                <a:spcPts val="400"/>
-              </a:spcBef>
-            </a:pPr>
-            <a:r>
-              <a:rPr lang="en-US" sz="1050" b="1" dirty="0">
+                <a:spcPts val="300"/>
+              </a:spcBef>
+            </a:pPr>
+            <a:r>
+              <a:rPr lang="en-US" sz="950" b="1" dirty="0">
                 <a:solidFill>
                   <a:srgbClr val="0F172A"/>
                 </a:solidFill>
@@ -6147,12 +6291,12 @@
             </a:r>
             <a:pPr indent="0" marL="0">
               <a:spcBef>
-                <a:spcPts val="400"/>
-              </a:spcBef>
-              <a:buNone/>
-            </a:pPr>
-            <a:r>
-              <a:rPr lang="en-US" sz="1050" dirty="0">
+                <a:spcPts val="300"/>
+              </a:spcBef>
+              <a:buNone/>
+            </a:pPr>
+            <a:r>
+              <a:rPr lang="en-US" sz="950" dirty="0">
                 <a:solidFill>
                   <a:srgbClr val="1E293B"/>
                 </a:solidFill>
@@ -6165,12 +6309,12 @@
             </a:r>
             <a:pPr indent="0" marL="0">
               <a:spcBef>
-                <a:spcPts val="400"/>
-              </a:spcBef>
-              <a:buNone/>
-            </a:pPr>
-            <a:r>
-              <a:rPr lang="en-US" sz="1050" b="1" dirty="0">
+                <a:spcPts val="300"/>
+              </a:spcBef>
+              <a:buNone/>
+            </a:pPr>
+            <a:r>
+              <a:rPr lang="en-US" sz="950" b="1" dirty="0">
                 <a:solidFill>
                   <a:srgbClr val="0F172A"/>
                 </a:solidFill>
@@ -6182,12 +6326,12 @@
             </a:r>
             <a:pPr indent="0" marL="0">
               <a:spcBef>
-                <a:spcPts val="400"/>
-              </a:spcBef>
-              <a:buNone/>
-            </a:pPr>
-            <a:r>
-              <a:rPr lang="en-US" sz="1050" dirty="0">
+                <a:spcPts val="300"/>
+              </a:spcBef>
+              <a:buNone/>
+            </a:pPr>
+            <a:r>
+              <a:rPr lang="en-US" sz="950" dirty="0">
                 <a:solidFill>
                   <a:srgbClr val="1E293B"/>
                 </a:solidFill>
@@ -6198,7 +6342,7 @@
               <a:t>Project Vision, Problem Statement, ML Detection Engine &amp; Q&amp;A Lead.
 </a:t>
             </a:r>
-            <a:endParaRPr lang="en-US" sz="1050" dirty="0"/>
+            <a:endParaRPr lang="en-US" sz="950" dirty="0"/>
           </a:p>
         </p:txBody>
       </p:sp>
@@ -6210,12 +6354,12 @@
         </p:nvSpPr>
         <p:spPr>
           <a:xfrm>
-            <a:off x="6126480" y="1371600"/>
-            <a:ext cx="5303520" cy="1554480"/>
+            <a:off x="4709160" y="1097280"/>
+            <a:ext cx="3977640" cy="1737360"/>
           </a:xfrm>
           <a:prstGeom prst="roundRect">
             <a:avLst>
-              <a:gd name="adj" fmla="val 8824"/>
+              <a:gd name="adj" fmla="val 5263"/>
             </a:avLst>
           </a:prstGeom>
           <a:solidFill>
@@ -6237,8 +6381,8 @@
         </p:nvSpPr>
         <p:spPr>
           <a:xfrm>
-            <a:off x="6126480" y="1371600"/>
-            <a:ext cx="5303520" cy="365760"/>
+            <a:off x="4709160" y="1097280"/>
+            <a:ext cx="3977640" cy="347472"/>
           </a:xfrm>
           <a:prstGeom prst="rect">
             <a:avLst/>
@@ -6262,8 +6406,8 @@
         </p:nvSpPr>
         <p:spPr>
           <a:xfrm>
-            <a:off x="6263640" y="1417320"/>
-            <a:ext cx="5029200" cy="274320"/>
+            <a:off x="4846320" y="1133856"/>
+            <a:ext cx="3703320" cy="274320"/>
           </a:xfrm>
           <a:prstGeom prst="rect">
             <a:avLst/>
@@ -6279,7 +6423,7 @@
               <a:buNone/>
             </a:pPr>
             <a:r>
-              <a:rPr lang="en-US" sz="1300" b="1" dirty="0">
+              <a:rPr lang="en-US" sz="1150" b="1" dirty="0">
                 <a:solidFill>
                   <a:srgbClr val="0284C7"/>
                 </a:solidFill>
@@ -6289,7 +6433,7 @@
               </a:rPr>
               <a:t>Divij Kulkarni — Rust Core &amp; Systems Engineer</a:t>
             </a:r>
-            <a:endParaRPr lang="en-US" sz="1300" dirty="0"/>
+            <a:endParaRPr lang="en-US" sz="1150" dirty="0"/>
           </a:p>
         </p:txBody>
       </p:sp>
@@ -6301,8 +6445,8 @@
         </p:nvSpPr>
         <p:spPr>
           <a:xfrm>
-            <a:off x="6309360" y="1783080"/>
-            <a:ext cx="4937760" cy="1051560"/>
+            <a:off x="4846320" y="1481328"/>
+            <a:ext cx="3703320" cy="1298448"/>
           </a:xfrm>
           <a:prstGeom prst="rect">
             <a:avLst/>
@@ -6316,11 +6460,11 @@
           <a:p>
             <a:pPr>
               <a:spcBef>
-                <a:spcPts val="400"/>
-              </a:spcBef>
-            </a:pPr>
-            <a:r>
-              <a:rPr lang="en-US" sz="1050" b="1" dirty="0">
+                <a:spcPts val="300"/>
+              </a:spcBef>
+            </a:pPr>
+            <a:r>
+              <a:rPr lang="en-US" sz="950" b="1" dirty="0">
                 <a:solidFill>
                   <a:srgbClr val="0F172A"/>
                 </a:solidFill>
@@ -6332,12 +6476,12 @@
             </a:r>
             <a:pPr indent="0" marL="0">
               <a:spcBef>
-                <a:spcPts val="400"/>
-              </a:spcBef>
-              <a:buNone/>
-            </a:pPr>
-            <a:r>
-              <a:rPr lang="en-US" sz="1050" dirty="0">
+                <a:spcPts val="300"/>
+              </a:spcBef>
+              <a:buNone/>
+            </a:pPr>
+            <a:r>
+              <a:rPr lang="en-US" sz="950" dirty="0">
                 <a:solidFill>
                   <a:srgbClr val="1E293B"/>
                 </a:solidFill>
@@ -6350,12 +6494,12 @@
             </a:r>
             <a:pPr indent="0" marL="0">
               <a:spcBef>
-                <a:spcPts val="400"/>
-              </a:spcBef>
-              <a:buNone/>
-            </a:pPr>
-            <a:r>
-              <a:rPr lang="en-US" sz="1050" b="1" dirty="0">
+                <a:spcPts val="300"/>
+              </a:spcBef>
+              <a:buNone/>
+            </a:pPr>
+            <a:r>
+              <a:rPr lang="en-US" sz="950" b="1" dirty="0">
                 <a:solidFill>
                   <a:srgbClr val="0F172A"/>
                 </a:solidFill>
@@ -6367,12 +6511,12 @@
             </a:r>
             <a:pPr indent="0" marL="0">
               <a:spcBef>
-                <a:spcPts val="400"/>
-              </a:spcBef>
-              <a:buNone/>
-            </a:pPr>
-            <a:r>
-              <a:rPr lang="en-US" sz="1050" dirty="0">
+                <a:spcPts val="300"/>
+              </a:spcBef>
+              <a:buNone/>
+            </a:pPr>
+            <a:r>
+              <a:rPr lang="en-US" sz="950" dirty="0">
                 <a:solidFill>
                   <a:srgbClr val="1E293B"/>
                 </a:solidFill>
@@ -6383,7 +6527,7 @@
               <a:t>Tech Stack Justification, Real-Time Process Monitor, Benchmarks.
 </a:t>
             </a:r>
-            <a:endParaRPr lang="en-US" sz="1050" dirty="0"/>
+            <a:endParaRPr lang="en-US" sz="950" dirty="0"/>
           </a:p>
         </p:txBody>
       </p:sp>
@@ -6395,12 +6539,12 @@
         </p:nvSpPr>
         <p:spPr>
           <a:xfrm>
-            <a:off x="548640" y="3063240"/>
-            <a:ext cx="5303520" cy="1554480"/>
+            <a:off x="457200" y="2971800"/>
+            <a:ext cx="3977640" cy="1737360"/>
           </a:xfrm>
           <a:prstGeom prst="roundRect">
             <a:avLst>
-              <a:gd name="adj" fmla="val 8824"/>
+              <a:gd name="adj" fmla="val 5263"/>
             </a:avLst>
           </a:prstGeom>
           <a:solidFill>
@@ -6422,8 +6566,8 @@
         </p:nvSpPr>
         <p:spPr>
           <a:xfrm>
-            <a:off x="548640" y="3063240"/>
-            <a:ext cx="5303520" cy="365760"/>
+            <a:off x="457200" y="2971800"/>
+            <a:ext cx="3977640" cy="347472"/>
           </a:xfrm>
           <a:prstGeom prst="rect">
             <a:avLst/>
@@ -6447,8 +6591,8 @@
         </p:nvSpPr>
         <p:spPr>
           <a:xfrm>
-            <a:off x="685800" y="3108960"/>
-            <a:ext cx="5029200" cy="274320"/>
+            <a:off x="594360" y="3008376"/>
+            <a:ext cx="3703320" cy="274320"/>
           </a:xfrm>
           <a:prstGeom prst="rect">
             <a:avLst/>
@@ -6464,7 +6608,7 @@
               <a:buNone/>
             </a:pPr>
             <a:r>
-              <a:rPr lang="en-US" sz="1300" b="1" dirty="0">
+              <a:rPr lang="en-US" sz="1150" b="1" dirty="0">
                 <a:solidFill>
                   <a:srgbClr val="0284C7"/>
                 </a:solidFill>
@@ -6474,7 +6618,7 @@
               </a:rPr>
               <a:t>Soham Wadale — Network &amp; Subnet Engineer</a:t>
             </a:r>
-            <a:endParaRPr lang="en-US" sz="1300" dirty="0"/>
+            <a:endParaRPr lang="en-US" sz="1150" dirty="0"/>
           </a:p>
         </p:txBody>
       </p:sp>
@@ -6486,8 +6630,8 @@
         </p:nvSpPr>
         <p:spPr>
           <a:xfrm>
-            <a:off x="731520" y="3474720"/>
-            <a:ext cx="4937760" cy="1051560"/>
+            <a:off x="594360" y="3355848"/>
+            <a:ext cx="3703320" cy="1298448"/>
           </a:xfrm>
           <a:prstGeom prst="rect">
             <a:avLst/>
@@ -6501,11 +6645,11 @@
           <a:p>
             <a:pPr>
               <a:spcBef>
-                <a:spcPts val="400"/>
-              </a:spcBef>
-            </a:pPr>
-            <a:r>
-              <a:rPr lang="en-US" sz="1050" b="1" dirty="0">
+                <a:spcPts val="300"/>
+              </a:spcBef>
+            </a:pPr>
+            <a:r>
+              <a:rPr lang="en-US" sz="950" b="1" dirty="0">
                 <a:solidFill>
                   <a:srgbClr val="0F172A"/>
                 </a:solidFill>
@@ -6517,12 +6661,12 @@
             </a:r>
             <a:pPr indent="0" marL="0">
               <a:spcBef>
-                <a:spcPts val="400"/>
-              </a:spcBef>
-              <a:buNone/>
-            </a:pPr>
-            <a:r>
-              <a:rPr lang="en-US" sz="1050" dirty="0">
+                <a:spcPts val="300"/>
+              </a:spcBef>
+              <a:buNone/>
+            </a:pPr>
+            <a:r>
+              <a:rPr lang="en-US" sz="950" dirty="0">
                 <a:solidFill>
                   <a:srgbClr val="1E293B"/>
                 </a:solidFill>
@@ -6535,12 +6679,12 @@
             </a:r>
             <a:pPr indent="0" marL="0">
               <a:spcBef>
-                <a:spcPts val="400"/>
-              </a:spcBef>
-              <a:buNone/>
-            </a:pPr>
-            <a:r>
-              <a:rPr lang="en-US" sz="1050" b="1" dirty="0">
+                <a:spcPts val="300"/>
+              </a:spcBef>
+              <a:buNone/>
+            </a:pPr>
+            <a:r>
+              <a:rPr lang="en-US" sz="950" b="1" dirty="0">
                 <a:solidFill>
                   <a:srgbClr val="0F172A"/>
                 </a:solidFill>
@@ -6552,12 +6696,12 @@
             </a:r>
             <a:pPr indent="0" marL="0">
               <a:spcBef>
-                <a:spcPts val="400"/>
-              </a:spcBef>
-              <a:buNone/>
-            </a:pPr>
-            <a:r>
-              <a:rPr lang="en-US" sz="1050" dirty="0">
+                <a:spcPts val="300"/>
+              </a:spcBef>
+              <a:buNone/>
+            </a:pPr>
+            <a:r>
+              <a:rPr lang="en-US" sz="950" dirty="0">
                 <a:solidFill>
                   <a:srgbClr val="1E293B"/>
                 </a:solidFill>
@@ -6568,7 +6712,7 @@
               <a:t>Network Flow Tracking, Subnet Device Scanner, Persistence Monitor.
 </a:t>
             </a:r>
-            <a:endParaRPr lang="en-US" sz="1050" dirty="0"/>
+            <a:endParaRPr lang="en-US" sz="950" dirty="0"/>
           </a:p>
         </p:txBody>
       </p:sp>
@@ -6580,12 +6724,12 @@
         </p:nvSpPr>
         <p:spPr>
           <a:xfrm>
-            <a:off x="6126480" y="3063240"/>
-            <a:ext cx="5303520" cy="1554480"/>
+            <a:off x="4709160" y="2971800"/>
+            <a:ext cx="3977640" cy="1737360"/>
           </a:xfrm>
           <a:prstGeom prst="roundRect">
             <a:avLst>
-              <a:gd name="adj" fmla="val 8824"/>
+              <a:gd name="adj" fmla="val 5263"/>
             </a:avLst>
           </a:prstGeom>
           <a:solidFill>
@@ -6607,8 +6751,8 @@
         </p:nvSpPr>
         <p:spPr>
           <a:xfrm>
-            <a:off x="6126480" y="3063240"/>
-            <a:ext cx="5303520" cy="365760"/>
+            <a:off x="4709160" y="2971800"/>
+            <a:ext cx="3977640" cy="347472"/>
           </a:xfrm>
           <a:prstGeom prst="rect">
             <a:avLst/>
@@ -6632,8 +6776,8 @@
         </p:nvSpPr>
         <p:spPr>
           <a:xfrm>
-            <a:off x="6263640" y="3108960"/>
-            <a:ext cx="5029200" cy="274320"/>
+            <a:off x="4846320" y="3008376"/>
+            <a:ext cx="3703320" cy="274320"/>
           </a:xfrm>
           <a:prstGeom prst="rect">
             <a:avLst/>
@@ -6649,7 +6793,7 @@
               <a:buNone/>
             </a:pPr>
             <a:r>
-              <a:rPr lang="en-US" sz="1300" b="1" dirty="0">
+              <a:rPr lang="en-US" sz="1150" b="1" dirty="0">
                 <a:solidFill>
                   <a:srgbClr val="0284C7"/>
                 </a:solidFill>
@@ -6659,7 +6803,7 @@
               </a:rPr>
               <a:t>Ananya Kaushik — Frontend Architect &amp; Compliance Lead</a:t>
             </a:r>
-            <a:endParaRPr lang="en-US" sz="1300" dirty="0"/>
+            <a:endParaRPr lang="en-US" sz="1150" dirty="0"/>
           </a:p>
         </p:txBody>
       </p:sp>
@@ -6671,8 +6815,8 @@
         </p:nvSpPr>
         <p:spPr>
           <a:xfrm>
-            <a:off x="6309360" y="3474720"/>
-            <a:ext cx="4937760" cy="1051560"/>
+            <a:off x="4846320" y="3355848"/>
+            <a:ext cx="3703320" cy="1298448"/>
           </a:xfrm>
           <a:prstGeom prst="rect">
             <a:avLst/>
@@ -6686,11 +6830,11 @@
           <a:p>
             <a:pPr>
               <a:spcBef>
-                <a:spcPts val="400"/>
-              </a:spcBef>
-            </a:pPr>
-            <a:r>
-              <a:rPr lang="en-US" sz="1050" b="1" dirty="0">
+                <a:spcPts val="300"/>
+              </a:spcBef>
+            </a:pPr>
+            <a:r>
+              <a:rPr lang="en-US" sz="950" b="1" dirty="0">
                 <a:solidFill>
                   <a:srgbClr val="0F172A"/>
                 </a:solidFill>
@@ -6702,12 +6846,12 @@
             </a:r>
             <a:pPr indent="0" marL="0">
               <a:spcBef>
-                <a:spcPts val="400"/>
-              </a:spcBef>
-              <a:buNone/>
-            </a:pPr>
-            <a:r>
-              <a:rPr lang="en-US" sz="1050" dirty="0">
+                <a:spcPts val="300"/>
+              </a:spcBef>
+              <a:buNone/>
+            </a:pPr>
+            <a:r>
+              <a:rPr lang="en-US" sz="950" dirty="0">
                 <a:solidFill>
                   <a:srgbClr val="1E293B"/>
                 </a:solidFill>
@@ -6720,12 +6864,12 @@
             </a:r>
             <a:pPr indent="0" marL="0">
               <a:spcBef>
-                <a:spcPts val="400"/>
-              </a:spcBef>
-              <a:buNone/>
-            </a:pPr>
-            <a:r>
-              <a:rPr lang="en-US" sz="1050" b="1" dirty="0">
+                <a:spcPts val="300"/>
+              </a:spcBef>
+              <a:buNone/>
+            </a:pPr>
+            <a:r>
+              <a:rPr lang="en-US" sz="950" b="1" dirty="0">
                 <a:solidFill>
                   <a:srgbClr val="0F172A"/>
                 </a:solidFill>
@@ -6737,12 +6881,12 @@
             </a:r>
             <a:pPr indent="0" marL="0">
               <a:spcBef>
-                <a:spcPts val="400"/>
-              </a:spcBef>
-              <a:buNone/>
-            </a:pPr>
-            <a:r>
-              <a:rPr lang="en-US" sz="1050" dirty="0">
+                <a:spcPts val="300"/>
+              </a:spcBef>
+              <a:buNone/>
+            </a:pPr>
+            <a:r>
+              <a:rPr lang="en-US" sz="950" dirty="0">
                 <a:solidFill>
                   <a:srgbClr val="1E293B"/>
                 </a:solidFill>
@@ -6753,7 +6897,7 @@
               <a:t>MITRE Alert Triage, NIST Forensic Exporter, UI Console Demonstration.
 </a:t>
             </a:r>
-            <a:endParaRPr lang="en-US" sz="1050" dirty="0"/>
+            <a:endParaRPr lang="en-US" sz="950" dirty="0"/>
           </a:p>
         </p:txBody>
       </p:sp>
@@ -6797,8 +6941,8 @@
         </p:nvSpPr>
         <p:spPr>
           <a:xfrm>
-            <a:off x="548640" y="365760"/>
-            <a:ext cx="7772400" cy="457200"/>
+            <a:off x="457200" y="320040"/>
+            <a:ext cx="6035040" cy="365760"/>
           </a:xfrm>
           <a:prstGeom prst="rect">
             <a:avLst/>
@@ -6814,7 +6958,7 @@
               <a:buNone/>
             </a:pPr>
             <a:r>
-              <a:rPr lang="en-US" sz="2200" b="1" dirty="0">
+              <a:rPr lang="en-US" sz="1800" b="1" dirty="0">
                 <a:solidFill>
                   <a:srgbClr val="0F172A"/>
                 </a:solidFill>
@@ -6824,7 +6968,7 @@
               </a:rPr>
               <a:t>High-Level System Architecture</a:t>
             </a:r>
-            <a:endParaRPr lang="en-US" sz="2200" dirty="0"/>
+            <a:endParaRPr lang="en-US" sz="1800" dirty="0"/>
           </a:p>
         </p:txBody>
       </p:sp>
@@ -6836,8 +6980,8 @@
         </p:nvSpPr>
         <p:spPr>
           <a:xfrm>
-            <a:off x="548640" y="777240"/>
-            <a:ext cx="7772400" cy="274320"/>
+            <a:off x="457200" y="685800"/>
+            <a:ext cx="6035040" cy="228600"/>
           </a:xfrm>
           <a:prstGeom prst="rect">
             <a:avLst/>
@@ -6853,7 +6997,7 @@
               <a:buNone/>
             </a:pPr>
             <a:r>
-              <a:rPr lang="en-US" sz="1200" dirty="0">
+              <a:rPr lang="en-US" sz="1050" dirty="0">
                 <a:solidFill>
                   <a:srgbClr val="0284C7"/>
                 </a:solidFill>
@@ -6863,7 +7007,7 @@
               </a:rPr>
               <a:t>Low-Overhead Native Rust Core with Embedded ONNX Inference</a:t>
             </a:r>
-            <a:endParaRPr lang="en-US" sz="1200" dirty="0"/>
+            <a:endParaRPr lang="en-US" sz="1050" dirty="0"/>
           </a:p>
         </p:txBody>
       </p:sp>
@@ -6875,12 +7019,12 @@
         </p:nvSpPr>
         <p:spPr>
           <a:xfrm>
-            <a:off x="8778240" y="365760"/>
-            <a:ext cx="2926080" cy="411480"/>
+            <a:off x="6675120" y="320040"/>
+            <a:ext cx="2011680" cy="365760"/>
           </a:xfrm>
           <a:prstGeom prst="roundRect">
             <a:avLst>
-              <a:gd name="adj" fmla="val 44444"/>
+              <a:gd name="adj" fmla="val 50000"/>
             </a:avLst>
           </a:prstGeom>
           <a:solidFill>
@@ -6902,8 +7046,8 @@
         </p:nvSpPr>
         <p:spPr>
           <a:xfrm>
-            <a:off x="8778240" y="365760"/>
-            <a:ext cx="2926080" cy="411480"/>
+            <a:off x="6675120" y="320040"/>
+            <a:ext cx="2011680" cy="365760"/>
           </a:xfrm>
           <a:prstGeom prst="rect">
             <a:avLst/>
@@ -6919,7 +7063,7 @@
               <a:buNone/>
             </a:pPr>
             <a:r>
-              <a:rPr lang="en-US" sz="1000" b="1" dirty="0">
+              <a:rPr lang="en-US" sz="900" b="1" dirty="0">
                 <a:solidFill>
                   <a:srgbClr val="7C3AED"/>
                 </a:solidFill>
@@ -6929,7 +7073,7 @@
               </a:rPr>
               <a:t>🎙️ Divij Kulkarni</a:t>
             </a:r>
-            <a:endParaRPr lang="en-US" sz="1000" dirty="0"/>
+            <a:endParaRPr lang="en-US" sz="900" dirty="0"/>
           </a:p>
         </p:txBody>
       </p:sp>
@@ -6941,8 +7085,8 @@
         </p:nvSpPr>
         <p:spPr>
           <a:xfrm>
-            <a:off x="548640" y="1143000"/>
-            <a:ext cx="11091672" cy="0"/>
+            <a:off x="457200" y="960120"/>
+            <a:ext cx="8229600" cy="0"/>
           </a:xfrm>
           <a:prstGeom prst="line">
             <a:avLst/>
@@ -6964,12 +7108,12 @@
         </p:nvSpPr>
         <p:spPr>
           <a:xfrm>
-            <a:off x="548640" y="1371600"/>
-            <a:ext cx="3474720" cy="3291840"/>
+            <a:off x="457200" y="1097280"/>
+            <a:ext cx="2560320" cy="3657600"/>
           </a:xfrm>
           <a:prstGeom prst="roundRect">
             <a:avLst>
-              <a:gd name="adj" fmla="val 4167"/>
+              <a:gd name="adj" fmla="val 3571"/>
             </a:avLst>
           </a:prstGeom>
           <a:solidFill>
@@ -6991,8 +7135,8 @@
         </p:nvSpPr>
         <p:spPr>
           <a:xfrm>
-            <a:off x="548640" y="1371600"/>
-            <a:ext cx="3474720" cy="365760"/>
+            <a:off x="457200" y="1097280"/>
+            <a:ext cx="2560320" cy="347472"/>
           </a:xfrm>
           <a:prstGeom prst="rect">
             <a:avLst/>
@@ -7016,8 +7160,8 @@
         </p:nvSpPr>
         <p:spPr>
           <a:xfrm>
-            <a:off x="685800" y="1417320"/>
-            <a:ext cx="3200400" cy="274320"/>
+            <a:off x="594360" y="1133856"/>
+            <a:ext cx="2286000" cy="274320"/>
           </a:xfrm>
           <a:prstGeom prst="rect">
             <a:avLst/>
@@ -7033,7 +7177,7 @@
               <a:buNone/>
             </a:pPr>
             <a:r>
-              <a:rPr lang="en-US" sz="1300" b="1" dirty="0">
+              <a:rPr lang="en-US" sz="1150" b="1" dirty="0">
                 <a:solidFill>
                   <a:srgbClr val="0284C7"/>
                 </a:solidFill>
@@ -7043,7 +7187,7 @@
               </a:rPr>
               <a:t>⚛️ Desktop Shell &amp; UI</a:t>
             </a:r>
-            <a:endParaRPr lang="en-US" sz="1300" dirty="0"/>
+            <a:endParaRPr lang="en-US" sz="1150" dirty="0"/>
           </a:p>
         </p:txBody>
       </p:sp>
@@ -7055,8 +7199,8 @@
         </p:nvSpPr>
         <p:spPr>
           <a:xfrm>
-            <a:off x="731520" y="1783080"/>
-            <a:ext cx="3108960" cy="2788920"/>
+            <a:off x="594360" y="1481328"/>
+            <a:ext cx="2286000" cy="3218688"/>
           </a:xfrm>
           <a:prstGeom prst="rect">
             <a:avLst/>
@@ -7070,11 +7214,11 @@
           <a:p>
             <a:pPr>
               <a:spcBef>
-                <a:spcPts val="400"/>
-              </a:spcBef>
-            </a:pPr>
-            <a:r>
-              <a:rPr lang="en-US" sz="1050" b="1" dirty="0">
+                <a:spcPts val="300"/>
+              </a:spcBef>
+            </a:pPr>
+            <a:r>
+              <a:rPr lang="en-US" sz="950" b="1" dirty="0">
                 <a:solidFill>
                   <a:srgbClr val="0F172A"/>
                 </a:solidFill>
@@ -7086,12 +7230,12 @@
             </a:r>
             <a:pPr indent="0" marL="0">
               <a:spcBef>
-                <a:spcPts val="400"/>
-              </a:spcBef>
-              <a:buNone/>
-            </a:pPr>
-            <a:r>
-              <a:rPr lang="en-US" sz="1050" dirty="0">
+                <a:spcPts val="300"/>
+              </a:spcBef>
+              <a:buNone/>
+            </a:pPr>
+            <a:r>
+              <a:rPr lang="en-US" sz="950" dirty="0">
                 <a:solidFill>
                   <a:srgbClr val="1E293B"/>
                 </a:solidFill>
@@ -7104,12 +7248,12 @@
             </a:r>
             <a:pPr indent="0" marL="0">
               <a:spcBef>
-                <a:spcPts val="400"/>
-              </a:spcBef>
-              <a:buNone/>
-            </a:pPr>
-            <a:r>
-              <a:rPr lang="en-US" sz="1050" b="1" dirty="0">
+                <a:spcPts val="300"/>
+              </a:spcBef>
+              <a:buNone/>
+            </a:pPr>
+            <a:r>
+              <a:rPr lang="en-US" sz="950" b="1" dirty="0">
                 <a:solidFill>
                   <a:srgbClr val="0F172A"/>
                 </a:solidFill>
@@ -7121,12 +7265,12 @@
             </a:r>
             <a:pPr indent="0" marL="0">
               <a:spcBef>
-                <a:spcPts val="400"/>
-              </a:spcBef>
-              <a:buNone/>
-            </a:pPr>
-            <a:r>
-              <a:rPr lang="en-US" sz="1050" dirty="0">
+                <a:spcPts val="300"/>
+              </a:spcBef>
+              <a:buNone/>
+            </a:pPr>
+            <a:r>
+              <a:rPr lang="en-US" sz="950" dirty="0">
                 <a:solidFill>
                   <a:srgbClr val="1E293B"/>
                 </a:solidFill>
@@ -7139,12 +7283,12 @@
             </a:r>
             <a:pPr indent="0" marL="0">
               <a:spcBef>
-                <a:spcPts val="400"/>
-              </a:spcBef>
-              <a:buNone/>
-            </a:pPr>
-            <a:r>
-              <a:rPr lang="en-US" sz="1050" b="1" dirty="0">
+                <a:spcPts val="300"/>
+              </a:spcBef>
+              <a:buNone/>
+            </a:pPr>
+            <a:r>
+              <a:rPr lang="en-US" sz="950" b="1" dirty="0">
                 <a:solidFill>
                   <a:srgbClr val="0F172A"/>
                 </a:solidFill>
@@ -7156,12 +7300,12 @@
             </a:r>
             <a:pPr indent="0" marL="0">
               <a:spcBef>
-                <a:spcPts val="400"/>
-              </a:spcBef>
-              <a:buNone/>
-            </a:pPr>
-            <a:r>
-              <a:rPr lang="en-US" sz="1050" dirty="0">
+                <a:spcPts val="300"/>
+              </a:spcBef>
+              <a:buNone/>
+            </a:pPr>
+            <a:r>
+              <a:rPr lang="en-US" sz="950" dirty="0">
                 <a:solidFill>
                   <a:srgbClr val="1E293B"/>
                 </a:solidFill>
@@ -7172,7 +7316,7 @@
               <a:t>Asynchronous, type-safe command invocation to native Rust backend threads.
 </a:t>
             </a:r>
-            <a:endParaRPr lang="en-US" sz="1050" dirty="0"/>
+            <a:endParaRPr lang="en-US" sz="950" dirty="0"/>
           </a:p>
         </p:txBody>
       </p:sp>
@@ -7184,12 +7328,12 @@
         </p:nvSpPr>
         <p:spPr>
           <a:xfrm>
-            <a:off x="4297680" y="1371600"/>
-            <a:ext cx="3474720" cy="3291840"/>
+            <a:off x="3291840" y="1097280"/>
+            <a:ext cx="2560320" cy="3657600"/>
           </a:xfrm>
           <a:prstGeom prst="roundRect">
             <a:avLst>
-              <a:gd name="adj" fmla="val 4167"/>
+              <a:gd name="adj" fmla="val 3571"/>
             </a:avLst>
           </a:prstGeom>
           <a:solidFill>
@@ -7211,8 +7355,8 @@
         </p:nvSpPr>
         <p:spPr>
           <a:xfrm>
-            <a:off x="4297680" y="1371600"/>
-            <a:ext cx="3474720" cy="365760"/>
+            <a:off x="3291840" y="1097280"/>
+            <a:ext cx="2560320" cy="347472"/>
           </a:xfrm>
           <a:prstGeom prst="rect">
             <a:avLst/>
@@ -7236,8 +7380,8 @@
         </p:nvSpPr>
         <p:spPr>
           <a:xfrm>
-            <a:off x="4434840" y="1417320"/>
-            <a:ext cx="3200400" cy="274320"/>
+            <a:off x="3429000" y="1133856"/>
+            <a:ext cx="2286000" cy="274320"/>
           </a:xfrm>
           <a:prstGeom prst="rect">
             <a:avLst/>
@@ -7253,7 +7397,7 @@
               <a:buNone/>
             </a:pPr>
             <a:r>
-              <a:rPr lang="en-US" sz="1300" b="1" dirty="0">
+              <a:rPr lang="en-US" sz="1150" b="1" dirty="0">
                 <a:solidFill>
                   <a:srgbClr val="0284C7"/>
                 </a:solidFill>
@@ -7263,7 +7407,7 @@
               </a:rPr>
               <a:t>🦀 Native Rust Core Engine</a:t>
             </a:r>
-            <a:endParaRPr lang="en-US" sz="1300" dirty="0"/>
+            <a:endParaRPr lang="en-US" sz="1150" dirty="0"/>
           </a:p>
         </p:txBody>
       </p:sp>
@@ -7275,8 +7419,8 @@
         </p:nvSpPr>
         <p:spPr>
           <a:xfrm>
-            <a:off x="4480560" y="1783080"/>
-            <a:ext cx="3108960" cy="2788920"/>
+            <a:off x="3429000" y="1481328"/>
+            <a:ext cx="2286000" cy="3218688"/>
           </a:xfrm>
           <a:prstGeom prst="rect">
             <a:avLst/>
@@ -7290,11 +7434,11 @@
           <a:p>
             <a:pPr>
               <a:spcBef>
-                <a:spcPts val="400"/>
-              </a:spcBef>
-            </a:pPr>
-            <a:r>
-              <a:rPr lang="en-US" sz="1050" b="1" dirty="0">
+                <a:spcPts val="300"/>
+              </a:spcBef>
+            </a:pPr>
+            <a:r>
+              <a:rPr lang="en-US" sz="950" b="1" dirty="0">
                 <a:solidFill>
                   <a:srgbClr val="0F172A"/>
                 </a:solidFill>
@@ -7306,12 +7450,12 @@
             </a:r>
             <a:pPr indent="0" marL="0">
               <a:spcBef>
-                <a:spcPts val="400"/>
-              </a:spcBef>
-              <a:buNone/>
-            </a:pPr>
-            <a:r>
-              <a:rPr lang="en-US" sz="1050" dirty="0">
+                <a:spcPts val="300"/>
+              </a:spcBef>
+              <a:buNone/>
+            </a:pPr>
+            <a:r>
+              <a:rPr lang="en-US" sz="950" dirty="0">
                 <a:solidFill>
                   <a:srgbClr val="1E293B"/>
                 </a:solidFill>
@@ -7324,12 +7468,12 @@
             </a:r>
             <a:pPr indent="0" marL="0">
               <a:spcBef>
-                <a:spcPts val="400"/>
-              </a:spcBef>
-              <a:buNone/>
-            </a:pPr>
-            <a:r>
-              <a:rPr lang="en-US" sz="1050" b="1" dirty="0">
+                <a:spcPts val="300"/>
+              </a:spcBef>
+              <a:buNone/>
+            </a:pPr>
+            <a:r>
+              <a:rPr lang="en-US" sz="950" b="1" dirty="0">
                 <a:solidFill>
                   <a:srgbClr val="0F172A"/>
                 </a:solidFill>
@@ -7341,12 +7485,12 @@
             </a:r>
             <a:pPr indent="0" marL="0">
               <a:spcBef>
-                <a:spcPts val="400"/>
-              </a:spcBef>
-              <a:buNone/>
-            </a:pPr>
-            <a:r>
-              <a:rPr lang="en-US" sz="1050" dirty="0">
+                <a:spcPts val="300"/>
+              </a:spcBef>
+              <a:buNone/>
+            </a:pPr>
+            <a:r>
+              <a:rPr lang="en-US" sz="950" dirty="0">
                 <a:solidFill>
                   <a:srgbClr val="1E293B"/>
                 </a:solidFill>
@@ -7359,12 +7503,12 @@
             </a:r>
             <a:pPr indent="0" marL="0">
               <a:spcBef>
-                <a:spcPts val="400"/>
-              </a:spcBef>
-              <a:buNone/>
-            </a:pPr>
-            <a:r>
-              <a:rPr lang="en-US" sz="1050" b="1" dirty="0">
+                <a:spcPts val="300"/>
+              </a:spcBef>
+              <a:buNone/>
+            </a:pPr>
+            <a:r>
+              <a:rPr lang="en-US" sz="950" b="1" dirty="0">
                 <a:solidFill>
                   <a:srgbClr val="0F172A"/>
                 </a:solidFill>
@@ -7376,12 +7520,12 @@
             </a:r>
             <a:pPr indent="0" marL="0">
               <a:spcBef>
-                <a:spcPts val="400"/>
-              </a:spcBef>
-              <a:buNone/>
-            </a:pPr>
-            <a:r>
-              <a:rPr lang="en-US" sz="1050" dirty="0">
+                <a:spcPts val="300"/>
+              </a:spcBef>
+              <a:buNone/>
+            </a:pPr>
+            <a:r>
+              <a:rPr lang="en-US" sz="950" dirty="0">
                 <a:solidFill>
                   <a:srgbClr val="1E293B"/>
                 </a:solidFill>
@@ -7392,7 +7536,7 @@
               <a:t>Zero-admin local storage managing 14 normalized telemetry tables.
 </a:t>
             </a:r>
-            <a:endParaRPr lang="en-US" sz="1050" dirty="0"/>
+            <a:endParaRPr lang="en-US" sz="950" dirty="0"/>
           </a:p>
         </p:txBody>
       </p:sp>
@@ -7404,12 +7548,12 @@
         </p:nvSpPr>
         <p:spPr>
           <a:xfrm>
-            <a:off x="8046720" y="1371600"/>
-            <a:ext cx="3566160" cy="3291840"/>
+            <a:off x="6126480" y="1097280"/>
+            <a:ext cx="2560320" cy="3657600"/>
           </a:xfrm>
           <a:prstGeom prst="roundRect">
             <a:avLst>
-              <a:gd name="adj" fmla="val 4167"/>
+              <a:gd name="adj" fmla="val 3571"/>
             </a:avLst>
           </a:prstGeom>
           <a:solidFill>
@@ -7431,8 +7575,8 @@
         </p:nvSpPr>
         <p:spPr>
           <a:xfrm>
-            <a:off x="8046720" y="1371600"/>
-            <a:ext cx="3566160" cy="365760"/>
+            <a:off x="6126480" y="1097280"/>
+            <a:ext cx="2560320" cy="347472"/>
           </a:xfrm>
           <a:prstGeom prst="rect">
             <a:avLst/>
@@ -7456,8 +7600,8 @@
         </p:nvSpPr>
         <p:spPr>
           <a:xfrm>
-            <a:off x="8183880" y="1417320"/>
-            <a:ext cx="3291840" cy="274320"/>
+            <a:off x="6263640" y="1133856"/>
+            <a:ext cx="2286000" cy="274320"/>
           </a:xfrm>
           <a:prstGeom prst="rect">
             <a:avLst/>
@@ -7473,7 +7617,7 @@
               <a:buNone/>
             </a:pPr>
             <a:r>
-              <a:rPr lang="en-US" sz="1300" b="1" dirty="0">
+              <a:rPr lang="en-US" sz="1150" b="1" dirty="0">
                 <a:solidFill>
                   <a:srgbClr val="0284C7"/>
                 </a:solidFill>
@@ -7483,7 +7627,7 @@
               </a:rPr>
               <a:t>🧠 Machine Learning &amp; Storage</a:t>
             </a:r>
-            <a:endParaRPr lang="en-US" sz="1300" dirty="0"/>
+            <a:endParaRPr lang="en-US" sz="1150" dirty="0"/>
           </a:p>
         </p:txBody>
       </p:sp>
@@ -7495,8 +7639,8 @@
         </p:nvSpPr>
         <p:spPr>
           <a:xfrm>
-            <a:off x="8229600" y="1783080"/>
-            <a:ext cx="3200400" cy="2788920"/>
+            <a:off x="6263640" y="1481328"/>
+            <a:ext cx="2286000" cy="3218688"/>
           </a:xfrm>
           <a:prstGeom prst="rect">
             <a:avLst/>
@@ -7510,11 +7654,11 @@
           <a:p>
             <a:pPr>
               <a:spcBef>
-                <a:spcPts val="400"/>
-              </a:spcBef>
-            </a:pPr>
-            <a:r>
-              <a:rPr lang="en-US" sz="1050" b="1" dirty="0">
+                <a:spcPts val="300"/>
+              </a:spcBef>
+            </a:pPr>
+            <a:r>
+              <a:rPr lang="en-US" sz="950" b="1" dirty="0">
                 <a:solidFill>
                   <a:srgbClr val="0F172A"/>
                 </a:solidFill>
@@ -7526,12 +7670,12 @@
             </a:r>
             <a:pPr indent="0" marL="0">
               <a:spcBef>
-                <a:spcPts val="400"/>
-              </a:spcBef>
-              <a:buNone/>
-            </a:pPr>
-            <a:r>
-              <a:rPr lang="en-US" sz="1050" dirty="0">
+                <a:spcPts val="300"/>
+              </a:spcBef>
+              <a:buNone/>
+            </a:pPr>
+            <a:r>
+              <a:rPr lang="en-US" sz="950" dirty="0">
                 <a:solidFill>
                   <a:srgbClr val="1E293B"/>
                 </a:solidFill>
@@ -7544,12 +7688,12 @@
             </a:r>
             <a:pPr indent="0" marL="0">
               <a:spcBef>
-                <a:spcPts val="400"/>
-              </a:spcBef>
-              <a:buNone/>
-            </a:pPr>
-            <a:r>
-              <a:rPr lang="en-US" sz="1050" b="1" dirty="0">
+                <a:spcPts val="300"/>
+              </a:spcBef>
+              <a:buNone/>
+            </a:pPr>
+            <a:r>
+              <a:rPr lang="en-US" sz="950" b="1" dirty="0">
                 <a:solidFill>
                   <a:srgbClr val="0F172A"/>
                 </a:solidFill>
@@ -7561,12 +7705,12 @@
             </a:r>
             <a:pPr indent="0" marL="0">
               <a:spcBef>
-                <a:spcPts val="400"/>
-              </a:spcBef>
-              <a:buNone/>
-            </a:pPr>
-            <a:r>
-              <a:rPr lang="en-US" sz="1050" dirty="0">
+                <a:spcPts val="300"/>
+              </a:spcBef>
+              <a:buNone/>
+            </a:pPr>
+            <a:r>
+              <a:rPr lang="en-US" sz="950" dirty="0">
                 <a:solidFill>
                   <a:srgbClr val="1E293B"/>
                 </a:solidFill>
@@ -7579,12 +7723,12 @@
             </a:r>
             <a:pPr indent="0" marL="0">
               <a:spcBef>
-                <a:spcPts val="400"/>
-              </a:spcBef>
-              <a:buNone/>
-            </a:pPr>
-            <a:r>
-              <a:rPr lang="en-US" sz="1050" b="1" dirty="0">
+                <a:spcPts val="300"/>
+              </a:spcBef>
+              <a:buNone/>
+            </a:pPr>
+            <a:r>
+              <a:rPr lang="en-US" sz="950" b="1" dirty="0">
                 <a:solidFill>
                   <a:srgbClr val="0F172A"/>
                 </a:solidFill>
@@ -7596,12 +7740,12 @@
             </a:r>
             <a:pPr indent="0" marL="0">
               <a:spcBef>
-                <a:spcPts val="400"/>
-              </a:spcBef>
-              <a:buNone/>
-            </a:pPr>
-            <a:r>
-              <a:rPr lang="en-US" sz="1050" dirty="0">
+                <a:spcPts val="300"/>
+              </a:spcBef>
+              <a:buNone/>
+            </a:pPr>
+            <a:r>
+              <a:rPr lang="en-US" sz="950" dirty="0">
                 <a:solidFill>
                   <a:srgbClr val="1E293B"/>
                 </a:solidFill>
@@ -7612,7 +7756,7 @@
               <a:t>Local cache of public IOC hash lists (abuse.ch, URLhaus).
 </a:t>
             </a:r>
-            <a:endParaRPr lang="en-US" sz="1050" dirty="0"/>
+            <a:endParaRPr lang="en-US" sz="950" dirty="0"/>
           </a:p>
         </p:txBody>
       </p:sp>
@@ -7656,8 +7800,8 @@
         </p:nvSpPr>
         <p:spPr>
           <a:xfrm>
-            <a:off x="548640" y="365760"/>
-            <a:ext cx="7772400" cy="457200"/>
+            <a:off x="457200" y="320040"/>
+            <a:ext cx="6035040" cy="365760"/>
           </a:xfrm>
           <a:prstGeom prst="rect">
             <a:avLst/>
@@ -7673,7 +7817,7 @@
               <a:buNone/>
             </a:pPr>
             <a:r>
-              <a:rPr lang="en-US" sz="2200" b="1" dirty="0">
+              <a:rPr lang="en-US" sz="1800" b="1" dirty="0">
                 <a:solidFill>
                   <a:srgbClr val="0F172A"/>
                 </a:solidFill>
@@ -7683,7 +7827,7 @@
               </a:rPr>
               <a:t>Module 1: Real-Time Process &amp; Behavior Engine</a:t>
             </a:r>
-            <a:endParaRPr lang="en-US" sz="2200" dirty="0"/>
+            <a:endParaRPr lang="en-US" sz="1800" dirty="0"/>
           </a:p>
         </p:txBody>
       </p:sp>
@@ -7695,8 +7839,8 @@
         </p:nvSpPr>
         <p:spPr>
           <a:xfrm>
-            <a:off x="548640" y="777240"/>
-            <a:ext cx="7772400" cy="274320"/>
+            <a:off x="457200" y="685800"/>
+            <a:ext cx="6035040" cy="228600"/>
           </a:xfrm>
           <a:prstGeom prst="rect">
             <a:avLst/>
@@ -7712,7 +7856,7 @@
               <a:buNone/>
             </a:pPr>
             <a:r>
-              <a:rPr lang="en-US" sz="1200" dirty="0">
+              <a:rPr lang="en-US" sz="1050" dirty="0">
                 <a:solidFill>
                   <a:srgbClr val="0284C7"/>
                 </a:solidFill>
@@ -7722,7 +7866,7 @@
               </a:rPr>
               <a:t>Continuous Host Telemetry &amp; Heuristic Integrity Probing</a:t>
             </a:r>
-            <a:endParaRPr lang="en-US" sz="1200" dirty="0"/>
+            <a:endParaRPr lang="en-US" sz="1050" dirty="0"/>
           </a:p>
         </p:txBody>
       </p:sp>
@@ -7734,12 +7878,12 @@
         </p:nvSpPr>
         <p:spPr>
           <a:xfrm>
-            <a:off x="8778240" y="365760"/>
-            <a:ext cx="2926080" cy="411480"/>
+            <a:off x="6675120" y="320040"/>
+            <a:ext cx="2011680" cy="365760"/>
           </a:xfrm>
           <a:prstGeom prst="roundRect">
             <a:avLst>
-              <a:gd name="adj" fmla="val 44444"/>
+              <a:gd name="adj" fmla="val 50000"/>
             </a:avLst>
           </a:prstGeom>
           <a:solidFill>
@@ -7761,8 +7905,8 @@
         </p:nvSpPr>
         <p:spPr>
           <a:xfrm>
-            <a:off x="8778240" y="365760"/>
-            <a:ext cx="2926080" cy="411480"/>
+            <a:off x="6675120" y="320040"/>
+            <a:ext cx="2011680" cy="365760"/>
           </a:xfrm>
           <a:prstGeom prst="rect">
             <a:avLst/>
@@ -7778,7 +7922,7 @@
               <a:buNone/>
             </a:pPr>
             <a:r>
-              <a:rPr lang="en-US" sz="1000" b="1" dirty="0">
+              <a:rPr lang="en-US" sz="900" b="1" dirty="0">
                 <a:solidFill>
                   <a:srgbClr val="7C3AED"/>
                 </a:solidFill>
@@ -7788,7 +7932,7 @@
               </a:rPr>
               <a:t>🎙️ Divij Kulkarni</a:t>
             </a:r>
-            <a:endParaRPr lang="en-US" sz="1000" dirty="0"/>
+            <a:endParaRPr lang="en-US" sz="900" dirty="0"/>
           </a:p>
         </p:txBody>
       </p:sp>
@@ -7800,8 +7944,8 @@
         </p:nvSpPr>
         <p:spPr>
           <a:xfrm>
-            <a:off x="548640" y="1143000"/>
-            <a:ext cx="11091672" cy="0"/>
+            <a:off x="457200" y="960120"/>
+            <a:ext cx="8229600" cy="0"/>
           </a:xfrm>
           <a:prstGeom prst="line">
             <a:avLst/>
@@ -7823,12 +7967,12 @@
         </p:nvSpPr>
         <p:spPr>
           <a:xfrm>
-            <a:off x="548640" y="1371600"/>
-            <a:ext cx="5303520" cy="3291840"/>
+            <a:off x="457200" y="1097280"/>
+            <a:ext cx="3977640" cy="3657600"/>
           </a:xfrm>
           <a:prstGeom prst="roundRect">
             <a:avLst>
-              <a:gd name="adj" fmla="val 4167"/>
+              <a:gd name="adj" fmla="val 2500"/>
             </a:avLst>
           </a:prstGeom>
           <a:solidFill>
@@ -7850,8 +7994,8 @@
         </p:nvSpPr>
         <p:spPr>
           <a:xfrm>
-            <a:off x="548640" y="1371600"/>
-            <a:ext cx="5303520" cy="365760"/>
+            <a:off x="457200" y="1097280"/>
+            <a:ext cx="3977640" cy="347472"/>
           </a:xfrm>
           <a:prstGeom prst="rect">
             <a:avLst/>
@@ -7875,8 +8019,8 @@
         </p:nvSpPr>
         <p:spPr>
           <a:xfrm>
-            <a:off x="685800" y="1417320"/>
-            <a:ext cx="5029200" cy="274320"/>
+            <a:off x="594360" y="1133856"/>
+            <a:ext cx="3703320" cy="274320"/>
           </a:xfrm>
           <a:prstGeom prst="rect">
             <a:avLst/>
@@ -7892,7 +8036,7 @@
               <a:buNone/>
             </a:pPr>
             <a:r>
-              <a:rPr lang="en-US" sz="1300" b="1" dirty="0">
+              <a:rPr lang="en-US" sz="1150" b="1" dirty="0">
                 <a:solidFill>
                   <a:srgbClr val="0284C7"/>
                 </a:solidFill>
@@ -7902,7 +8046,7 @@
               </a:rPr>
               <a:t>⚡ Continuous Telemetry Collection</a:t>
             </a:r>
-            <a:endParaRPr lang="en-US" sz="1300" dirty="0"/>
+            <a:endParaRPr lang="en-US" sz="1150" dirty="0"/>
           </a:p>
         </p:txBody>
       </p:sp>
@@ -7914,8 +8058,8 @@
         </p:nvSpPr>
         <p:spPr>
           <a:xfrm>
-            <a:off x="731520" y="1783080"/>
-            <a:ext cx="4937760" cy="2788920"/>
+            <a:off x="594360" y="1481328"/>
+            <a:ext cx="3703320" cy="3218688"/>
           </a:xfrm>
           <a:prstGeom prst="rect">
             <a:avLst/>
@@ -7929,11 +8073,11 @@
           <a:p>
             <a:pPr>
               <a:spcBef>
-                <a:spcPts val="400"/>
-              </a:spcBef>
-            </a:pPr>
-            <a:r>
-              <a:rPr lang="en-US" sz="1050" b="1" dirty="0">
+                <a:spcPts val="300"/>
+              </a:spcBef>
+            </a:pPr>
+            <a:r>
+              <a:rPr lang="en-US" sz="950" b="1" dirty="0">
                 <a:solidFill>
                   <a:srgbClr val="0F172A"/>
                 </a:solidFill>
@@ -7945,12 +8089,12 @@
             </a:r>
             <a:pPr indent="0" marL="0">
               <a:spcBef>
-                <a:spcPts val="400"/>
-              </a:spcBef>
-              <a:buNone/>
-            </a:pPr>
-            <a:r>
-              <a:rPr lang="en-US" sz="1050" dirty="0">
+                <a:spcPts val="300"/>
+              </a:spcBef>
+              <a:buNone/>
+            </a:pPr>
+            <a:r>
+              <a:rPr lang="en-US" sz="950" dirty="0">
                 <a:solidFill>
                   <a:srgbClr val="1E293B"/>
                 </a:solidFill>
@@ -7963,12 +8107,12 @@
             </a:r>
             <a:pPr indent="0" marL="0">
               <a:spcBef>
-                <a:spcPts val="400"/>
-              </a:spcBef>
-              <a:buNone/>
-            </a:pPr>
-            <a:r>
-              <a:rPr lang="en-US" sz="1050" b="1" dirty="0">
+                <a:spcPts val="300"/>
+              </a:spcBef>
+              <a:buNone/>
+            </a:pPr>
+            <a:r>
+              <a:rPr lang="en-US" sz="950" b="1" dirty="0">
                 <a:solidFill>
                   <a:srgbClr val="0F172A"/>
                 </a:solidFill>
@@ -7980,12 +8124,12 @@
             </a:r>
             <a:pPr indent="0" marL="0">
               <a:spcBef>
-                <a:spcPts val="400"/>
-              </a:spcBef>
-              <a:buNone/>
-            </a:pPr>
-            <a:r>
-              <a:rPr lang="en-US" sz="1050" dirty="0">
+                <a:spcPts val="300"/>
+              </a:spcBef>
+              <a:buNone/>
+            </a:pPr>
+            <a:r>
+              <a:rPr lang="en-US" sz="950" dirty="0">
                 <a:solidFill>
                   <a:srgbClr val="1E293B"/>
                 </a:solidFill>
@@ -7998,12 +8142,12 @@
             </a:r>
             <a:pPr indent="0" marL="0">
               <a:spcBef>
-                <a:spcPts val="400"/>
-              </a:spcBef>
-              <a:buNone/>
-            </a:pPr>
-            <a:r>
-              <a:rPr lang="en-US" sz="1050" b="1" dirty="0">
+                <a:spcPts val="300"/>
+              </a:spcBef>
+              <a:buNone/>
+            </a:pPr>
+            <a:r>
+              <a:rPr lang="en-US" sz="950" b="1" dirty="0">
                 <a:solidFill>
                   <a:srgbClr val="0F172A"/>
                 </a:solidFill>
@@ -8015,12 +8159,12 @@
             </a:r>
             <a:pPr indent="0" marL="0">
               <a:spcBef>
-                <a:spcPts val="400"/>
-              </a:spcBef>
-              <a:buNone/>
-            </a:pPr>
-            <a:r>
-              <a:rPr lang="en-US" sz="1050" dirty="0">
+                <a:spcPts val="300"/>
+              </a:spcBef>
+              <a:buNone/>
+            </a:pPr>
+            <a:r>
+              <a:rPr lang="en-US" sz="950" dirty="0">
                 <a:solidFill>
                   <a:srgbClr val="1E293B"/>
                 </a:solidFill>
@@ -8033,12 +8177,12 @@
             </a:r>
             <a:pPr indent="0" marL="0">
               <a:spcBef>
-                <a:spcPts val="400"/>
-              </a:spcBef>
-              <a:buNone/>
-            </a:pPr>
-            <a:r>
-              <a:rPr lang="en-US" sz="1050" b="1" dirty="0">
+                <a:spcPts val="300"/>
+              </a:spcBef>
+              <a:buNone/>
+            </a:pPr>
+            <a:r>
+              <a:rPr lang="en-US" sz="950" b="1" dirty="0">
                 <a:solidFill>
                   <a:srgbClr val="0F172A"/>
                 </a:solidFill>
@@ -8050,12 +8194,12 @@
             </a:r>
             <a:pPr indent="0" marL="0">
               <a:spcBef>
-                <a:spcPts val="400"/>
-              </a:spcBef>
-              <a:buNone/>
-            </a:pPr>
-            <a:r>
-              <a:rPr lang="en-US" sz="1050" dirty="0">
+                <a:spcPts val="300"/>
+              </a:spcBef>
+              <a:buNone/>
+            </a:pPr>
+            <a:r>
+              <a:rPr lang="en-US" sz="950" dirty="0">
                 <a:solidFill>
                   <a:srgbClr val="1E293B"/>
                 </a:solidFill>
@@ -8066,7 +8210,7 @@
               <a:t>Queries Authenticode signatures to identify unsigned or self-signed binaries.
 </a:t>
             </a:r>
-            <a:endParaRPr lang="en-US" sz="1050" dirty="0"/>
+            <a:endParaRPr lang="en-US" sz="950" dirty="0"/>
           </a:p>
         </p:txBody>
       </p:sp>
@@ -8078,12 +8222,12 @@
         </p:nvSpPr>
         <p:spPr>
           <a:xfrm>
-            <a:off x="6217920" y="1371600"/>
-            <a:ext cx="5394960" cy="3291840"/>
+            <a:off x="4709160" y="1097280"/>
+            <a:ext cx="3977640" cy="3657600"/>
           </a:xfrm>
           <a:prstGeom prst="roundRect">
             <a:avLst>
-              <a:gd name="adj" fmla="val 4167"/>
+              <a:gd name="adj" fmla="val 2500"/>
             </a:avLst>
           </a:prstGeom>
           <a:solidFill>
@@ -8105,8 +8249,8 @@
         </p:nvSpPr>
         <p:spPr>
           <a:xfrm>
-            <a:off x="6217920" y="1371600"/>
-            <a:ext cx="5394960" cy="365760"/>
+            <a:off x="4709160" y="1097280"/>
+            <a:ext cx="3977640" cy="347472"/>
           </a:xfrm>
           <a:prstGeom prst="rect">
             <a:avLst/>
@@ -8130,8 +8274,8 @@
         </p:nvSpPr>
         <p:spPr>
           <a:xfrm>
-            <a:off x="6355080" y="1417320"/>
-            <a:ext cx="5120640" cy="274320"/>
+            <a:off x="4846320" y="1133856"/>
+            <a:ext cx="3703320" cy="274320"/>
           </a:xfrm>
           <a:prstGeom prst="rect">
             <a:avLst/>
@@ -8147,7 +8291,7 @@
               <a:buNone/>
             </a:pPr>
             <a:r>
-              <a:rPr lang="en-US" sz="1300" b="1" dirty="0">
+              <a:rPr lang="en-US" sz="1150" b="1" dirty="0">
                 <a:solidFill>
                   <a:srgbClr val="0284C7"/>
                 </a:solidFill>
@@ -8157,7 +8301,7 @@
               </a:rPr>
               <a:t>🛡️ Behavioral Heuristic Rules</a:t>
             </a:r>
-            <a:endParaRPr lang="en-US" sz="1300" dirty="0"/>
+            <a:endParaRPr lang="en-US" sz="1150" dirty="0"/>
           </a:p>
         </p:txBody>
       </p:sp>
@@ -8169,8 +8313,8 @@
         </p:nvSpPr>
         <p:spPr>
           <a:xfrm>
-            <a:off x="6400800" y="1783080"/>
-            <a:ext cx="5029200" cy="2788920"/>
+            <a:off x="4846320" y="1481328"/>
+            <a:ext cx="3703320" cy="3218688"/>
           </a:xfrm>
           <a:prstGeom prst="rect">
             <a:avLst/>
@@ -8184,11 +8328,11 @@
           <a:p>
             <a:pPr>
               <a:spcBef>
-                <a:spcPts val="400"/>
-              </a:spcBef>
-            </a:pPr>
-            <a:r>
-              <a:rPr lang="en-US" sz="1050" b="1" dirty="0">
+                <a:spcPts val="300"/>
+              </a:spcBef>
+            </a:pPr>
+            <a:r>
+              <a:rPr lang="en-US" sz="950" b="1" dirty="0">
                 <a:solidFill>
                   <a:srgbClr val="0F172A"/>
                 </a:solidFill>
@@ -8200,12 +8344,12 @@
             </a:r>
             <a:pPr indent="0" marL="0">
               <a:spcBef>
-                <a:spcPts val="400"/>
-              </a:spcBef>
-              <a:buNone/>
-            </a:pPr>
-            <a:r>
-              <a:rPr lang="en-US" sz="1050" dirty="0">
+                <a:spcPts val="300"/>
+              </a:spcBef>
+              <a:buNone/>
+            </a:pPr>
+            <a:r>
+              <a:rPr lang="en-US" sz="950" dirty="0">
                 <a:solidFill>
                   <a:srgbClr val="1E293B"/>
                 </a:solidFill>
@@ -8218,12 +8362,12 @@
             </a:r>
             <a:pPr indent="0" marL="0">
               <a:spcBef>
-                <a:spcPts val="400"/>
-              </a:spcBef>
-              <a:buNone/>
-            </a:pPr>
-            <a:r>
-              <a:rPr lang="en-US" sz="1050" b="1" dirty="0">
+                <a:spcPts val="300"/>
+              </a:spcBef>
+              <a:buNone/>
+            </a:pPr>
+            <a:r>
+              <a:rPr lang="en-US" sz="950" b="1" dirty="0">
                 <a:solidFill>
                   <a:srgbClr val="0F172A"/>
                 </a:solidFill>
@@ -8235,12 +8379,12 @@
             </a:r>
             <a:pPr indent="0" marL="0">
               <a:spcBef>
-                <a:spcPts val="400"/>
-              </a:spcBef>
-              <a:buNone/>
-            </a:pPr>
-            <a:r>
-              <a:rPr lang="en-US" sz="1050" dirty="0">
+                <a:spcPts val="300"/>
+              </a:spcBef>
+              <a:buNone/>
+            </a:pPr>
+            <a:r>
+              <a:rPr lang="en-US" sz="950" dirty="0">
                 <a:solidFill>
                   <a:srgbClr val="1E293B"/>
                 </a:solidFill>
@@ -8253,12 +8397,12 @@
             </a:r>
             <a:pPr indent="0" marL="0">
               <a:spcBef>
-                <a:spcPts val="400"/>
-              </a:spcBef>
-              <a:buNone/>
-            </a:pPr>
-            <a:r>
-              <a:rPr lang="en-US" sz="1050" b="1" dirty="0">
+                <a:spcPts val="300"/>
+              </a:spcBef>
+              <a:buNone/>
+            </a:pPr>
+            <a:r>
+              <a:rPr lang="en-US" sz="950" b="1" dirty="0">
                 <a:solidFill>
                   <a:srgbClr val="0F172A"/>
                 </a:solidFill>
@@ -8270,12 +8414,12 @@
             </a:r>
             <a:pPr indent="0" marL="0">
               <a:spcBef>
-                <a:spcPts val="400"/>
-              </a:spcBef>
-              <a:buNone/>
-            </a:pPr>
-            <a:r>
-              <a:rPr lang="en-US" sz="1050" dirty="0">
+                <a:spcPts val="300"/>
+              </a:spcBef>
+              <a:buNone/>
+            </a:pPr>
+            <a:r>
+              <a:rPr lang="en-US" sz="950" dirty="0">
                 <a:solidFill>
                   <a:srgbClr val="1E293B"/>
                 </a:solidFill>
@@ -8288,12 +8432,12 @@
             </a:r>
             <a:pPr indent="0" marL="0">
               <a:spcBef>
-                <a:spcPts val="400"/>
-              </a:spcBef>
-              <a:buNone/>
-            </a:pPr>
-            <a:r>
-              <a:rPr lang="en-US" sz="1050" b="1" dirty="0">
+                <a:spcPts val="300"/>
+              </a:spcBef>
+              <a:buNone/>
+            </a:pPr>
+            <a:r>
+              <a:rPr lang="en-US" sz="950" b="1" dirty="0">
                 <a:solidFill>
                   <a:srgbClr val="0F172A"/>
                 </a:solidFill>
@@ -8305,12 +8449,12 @@
             </a:r>
             <a:pPr indent="0" marL="0">
               <a:spcBef>
-                <a:spcPts val="400"/>
-              </a:spcBef>
-              <a:buNone/>
-            </a:pPr>
-            <a:r>
-              <a:rPr lang="en-US" sz="1050" dirty="0">
+                <a:spcPts val="300"/>
+              </a:spcBef>
+              <a:buNone/>
+            </a:pPr>
+            <a:r>
+              <a:rPr lang="en-US" sz="950" dirty="0">
                 <a:solidFill>
                   <a:srgbClr val="1E293B"/>
                 </a:solidFill>
@@ -8321,7 +8465,7 @@
               <a:t>Flags irregular spawns (e.g. cmd.exe or powershell.exe spawned by excel.exe).
 </a:t>
             </a:r>
-            <a:endParaRPr lang="en-US" sz="1050" dirty="0"/>
+            <a:endParaRPr lang="en-US" sz="950" dirty="0"/>
           </a:p>
         </p:txBody>
       </p:sp>
@@ -8365,8 +8509,8 @@
         </p:nvSpPr>
         <p:spPr>
           <a:xfrm>
-            <a:off x="548640" y="365760"/>
-            <a:ext cx="7772400" cy="457200"/>
+            <a:off x="457200" y="320040"/>
+            <a:ext cx="6035040" cy="365760"/>
           </a:xfrm>
           <a:prstGeom prst="rect">
             <a:avLst/>
@@ -8382,7 +8526,7 @@
               <a:buNone/>
             </a:pPr>
             <a:r>
-              <a:rPr lang="en-US" sz="2200" b="1" dirty="0">
+              <a:rPr lang="en-US" sz="1800" b="1" dirty="0">
                 <a:solidFill>
                   <a:srgbClr val="0F172A"/>
                 </a:solidFill>
@@ -8392,7 +8536,7 @@
               </a:rPr>
               <a:t>Module 2: Embedded ONNX AI Threat Classifier</a:t>
             </a:r>
-            <a:endParaRPr lang="en-US" sz="2200" dirty="0"/>
+            <a:endParaRPr lang="en-US" sz="1800" dirty="0"/>
           </a:p>
         </p:txBody>
       </p:sp>
@@ -8404,8 +8548,8 @@
         </p:nvSpPr>
         <p:spPr>
           <a:xfrm>
-            <a:off x="548640" y="777240"/>
-            <a:ext cx="7772400" cy="274320"/>
+            <a:off x="457200" y="685800"/>
+            <a:ext cx="6035040" cy="228600"/>
           </a:xfrm>
           <a:prstGeom prst="rect">
             <a:avLst/>
@@ -8421,7 +8565,7 @@
               <a:buNone/>
             </a:pPr>
             <a:r>
-              <a:rPr lang="en-US" sz="1200" dirty="0">
+              <a:rPr lang="en-US" sz="1050" dirty="0">
                 <a:solidFill>
                   <a:srgbClr val="0284C7"/>
                 </a:solidFill>
@@ -8431,7 +8575,7 @@
               </a:rPr>
               <a:t>Local Inference for Zero-Day Behavior Classification</a:t>
             </a:r>
-            <a:endParaRPr lang="en-US" sz="1200" dirty="0"/>
+            <a:endParaRPr lang="en-US" sz="1050" dirty="0"/>
           </a:p>
         </p:txBody>
       </p:sp>
@@ -8443,12 +8587,12 @@
         </p:nvSpPr>
         <p:spPr>
           <a:xfrm>
-            <a:off x="8778240" y="365760"/>
-            <a:ext cx="2926080" cy="411480"/>
+            <a:off x="6675120" y="320040"/>
+            <a:ext cx="2011680" cy="365760"/>
           </a:xfrm>
           <a:prstGeom prst="roundRect">
             <a:avLst>
-              <a:gd name="adj" fmla="val 44444"/>
+              <a:gd name="adj" fmla="val 50000"/>
             </a:avLst>
           </a:prstGeom>
           <a:solidFill>
@@ -8470,8 +8614,8 @@
         </p:nvSpPr>
         <p:spPr>
           <a:xfrm>
-            <a:off x="8778240" y="365760"/>
-            <a:ext cx="2926080" cy="411480"/>
+            <a:off x="6675120" y="320040"/>
+            <a:ext cx="2011680" cy="365760"/>
           </a:xfrm>
           <a:prstGeom prst="rect">
             <a:avLst/>
@@ -8487,7 +8631,7 @@
               <a:buNone/>
             </a:pPr>
             <a:r>
-              <a:rPr lang="en-US" sz="1000" b="1" dirty="0">
+              <a:rPr lang="en-US" sz="900" b="1" dirty="0">
                 <a:solidFill>
                   <a:srgbClr val="7C3AED"/>
                 </a:solidFill>
@@ -8497,7 +8641,7 @@
               </a:rPr>
               <a:t>🎙️ Tanmay Gawali</a:t>
             </a:r>
-            <a:endParaRPr lang="en-US" sz="1000" dirty="0"/>
+            <a:endParaRPr lang="en-US" sz="900" dirty="0"/>
           </a:p>
         </p:txBody>
       </p:sp>
@@ -8509,8 +8653,8 @@
         </p:nvSpPr>
         <p:spPr>
           <a:xfrm>
-            <a:off x="548640" y="1143000"/>
-            <a:ext cx="11091672" cy="0"/>
+            <a:off x="457200" y="960120"/>
+            <a:ext cx="8229600" cy="0"/>
           </a:xfrm>
           <a:prstGeom prst="line">
             <a:avLst/>
@@ -8532,12 +8676,12 @@
         </p:nvSpPr>
         <p:spPr>
           <a:xfrm>
-            <a:off x="548640" y="1371600"/>
-            <a:ext cx="5303520" cy="3291840"/>
+            <a:off x="457200" y="1097280"/>
+            <a:ext cx="3977640" cy="3657600"/>
           </a:xfrm>
           <a:prstGeom prst="roundRect">
             <a:avLst>
-              <a:gd name="adj" fmla="val 4167"/>
+              <a:gd name="adj" fmla="val 2500"/>
             </a:avLst>
           </a:prstGeom>
           <a:solidFill>
@@ -8559,8 +8703,8 @@
         </p:nvSpPr>
         <p:spPr>
           <a:xfrm>
-            <a:off x="548640" y="1371600"/>
-            <a:ext cx="5303520" cy="365760"/>
+            <a:off x="457200" y="1097280"/>
+            <a:ext cx="3977640" cy="347472"/>
           </a:xfrm>
           <a:prstGeom prst="rect">
             <a:avLst/>
@@ -8584,8 +8728,8 @@
         </p:nvSpPr>
         <p:spPr>
           <a:xfrm>
-            <a:off x="685800" y="1417320"/>
-            <a:ext cx="5029200" cy="274320"/>
+            <a:off x="594360" y="1133856"/>
+            <a:ext cx="3703320" cy="274320"/>
           </a:xfrm>
           <a:prstGeom prst="rect">
             <a:avLst/>
@@ -8601,7 +8745,7 @@
               <a:buNone/>
             </a:pPr>
             <a:r>
-              <a:rPr lang="en-US" sz="1300" b="1" dirty="0">
+              <a:rPr lang="en-US" sz="1150" b="1" dirty="0">
                 <a:solidFill>
                   <a:srgbClr val="0284C7"/>
                 </a:solidFill>
@@ -8611,7 +8755,7 @@
               </a:rPr>
               <a:t>🤖 Model Training &amp; Architecture</a:t>
             </a:r>
-            <a:endParaRPr lang="en-US" sz="1300" dirty="0"/>
+            <a:endParaRPr lang="en-US" sz="1150" dirty="0"/>
           </a:p>
         </p:txBody>
       </p:sp>
@@ -8623,8 +8767,8 @@
         </p:nvSpPr>
         <p:spPr>
           <a:xfrm>
-            <a:off x="731520" y="1783080"/>
-            <a:ext cx="4937760" cy="2788920"/>
+            <a:off x="594360" y="1481328"/>
+            <a:ext cx="3703320" cy="3218688"/>
           </a:xfrm>
           <a:prstGeom prst="rect">
             <a:avLst/>
@@ -8638,11 +8782,11 @@
           <a:p>
             <a:pPr>
               <a:spcBef>
-                <a:spcPts val="400"/>
-              </a:spcBef>
-            </a:pPr>
-            <a:r>
-              <a:rPr lang="en-US" sz="1050" b="1" dirty="0">
+                <a:spcPts val="300"/>
+              </a:spcBef>
+            </a:pPr>
+            <a:r>
+              <a:rPr lang="en-US" sz="950" b="1" dirty="0">
                 <a:solidFill>
                   <a:srgbClr val="0F172A"/>
                 </a:solidFill>
@@ -8654,12 +8798,12 @@
             </a:r>
             <a:pPr indent="0" marL="0">
               <a:spcBef>
-                <a:spcPts val="400"/>
-              </a:spcBef>
-              <a:buNone/>
-            </a:pPr>
-            <a:r>
-              <a:rPr lang="en-US" sz="1050" dirty="0">
+                <a:spcPts val="300"/>
+              </a:spcBef>
+              <a:buNone/>
+            </a:pPr>
+            <a:r>
+              <a:rPr lang="en-US" sz="950" dirty="0">
                 <a:solidFill>
                   <a:srgbClr val="1E293B"/>
                 </a:solidFill>
@@ -8672,12 +8816,12 @@
             </a:r>
             <a:pPr indent="0" marL="0">
               <a:spcBef>
-                <a:spcPts val="400"/>
-              </a:spcBef>
-              <a:buNone/>
-            </a:pPr>
-            <a:r>
-              <a:rPr lang="en-US" sz="1050" b="1" dirty="0">
+                <a:spcPts val="300"/>
+              </a:spcBef>
+              <a:buNone/>
+            </a:pPr>
+            <a:r>
+              <a:rPr lang="en-US" sz="950" b="1" dirty="0">
                 <a:solidFill>
                   <a:srgbClr val="0F172A"/>
                 </a:solidFill>
@@ -8689,12 +8833,12 @@
             </a:r>
             <a:pPr indent="0" marL="0">
               <a:spcBef>
-                <a:spcPts val="400"/>
-              </a:spcBef>
-              <a:buNone/>
-            </a:pPr>
-            <a:r>
-              <a:rPr lang="en-US" sz="1050" dirty="0">
+                <a:spcPts val="300"/>
+              </a:spcBef>
+              <a:buNone/>
+            </a:pPr>
+            <a:r>
+              <a:rPr lang="en-US" sz="950" dirty="0">
                 <a:solidFill>
                   <a:srgbClr val="1E293B"/>
                 </a:solidFill>
@@ -8707,12 +8851,12 @@
             </a:r>
             <a:pPr indent="0" marL="0">
               <a:spcBef>
-                <a:spcPts val="400"/>
-              </a:spcBef>
-              <a:buNone/>
-            </a:pPr>
-            <a:r>
-              <a:rPr lang="en-US" sz="1050" b="1" dirty="0">
+                <a:spcPts val="300"/>
+              </a:spcBef>
+              <a:buNone/>
+            </a:pPr>
+            <a:r>
+              <a:rPr lang="en-US" sz="950" b="1" dirty="0">
                 <a:solidFill>
                   <a:srgbClr val="0F172A"/>
                 </a:solidFill>
@@ -8724,12 +8868,12 @@
             </a:r>
             <a:pPr indent="0" marL="0">
               <a:spcBef>
-                <a:spcPts val="400"/>
-              </a:spcBef>
-              <a:buNone/>
-            </a:pPr>
-            <a:r>
-              <a:rPr lang="en-US" sz="1050" dirty="0">
+                <a:spcPts val="300"/>
+              </a:spcBef>
+              <a:buNone/>
+            </a:pPr>
+            <a:r>
+              <a:rPr lang="en-US" sz="950" dirty="0">
                 <a:solidFill>
                   <a:srgbClr val="1E293B"/>
                 </a:solidFill>
@@ -8742,12 +8886,12 @@
             </a:r>
             <a:pPr indent="0" marL="0">
               <a:spcBef>
-                <a:spcPts val="400"/>
-              </a:spcBef>
-              <a:buNone/>
-            </a:pPr>
-            <a:r>
-              <a:rPr lang="en-US" sz="1050" b="1" dirty="0">
+                <a:spcPts val="300"/>
+              </a:spcBef>
+              <a:buNone/>
+            </a:pPr>
+            <a:r>
+              <a:rPr lang="en-US" sz="950" b="1" dirty="0">
                 <a:solidFill>
                   <a:srgbClr val="0F172A"/>
                 </a:solidFill>
@@ -8759,12 +8903,12 @@
             </a:r>
             <a:pPr indent="0" marL="0">
               <a:spcBef>
-                <a:spcPts val="400"/>
-              </a:spcBef>
-              <a:buNone/>
-            </a:pPr>
-            <a:r>
-              <a:rPr lang="en-US" sz="1050" dirty="0">
+                <a:spcPts val="300"/>
+              </a:spcBef>
+              <a:buNone/>
+            </a:pPr>
+            <a:r>
+              <a:rPr lang="en-US" sz="950" dirty="0">
                 <a:solidFill>
                   <a:srgbClr val="1E293B"/>
                 </a:solidFill>
@@ -8775,7 +8919,7 @@
               <a:t>Runs inference locally inside the Rust binary without embedding Python interpreters.
 </a:t>
             </a:r>
-            <a:endParaRPr lang="en-US" sz="1050" dirty="0"/>
+            <a:endParaRPr lang="en-US" sz="950" dirty="0"/>
           </a:p>
         </p:txBody>
       </p:sp>
@@ -8787,12 +8931,12 @@
         </p:nvSpPr>
         <p:spPr>
           <a:xfrm>
-            <a:off x="6217920" y="1371600"/>
-            <a:ext cx="5394960" cy="3291840"/>
+            <a:off x="4709160" y="1097280"/>
+            <a:ext cx="3977640" cy="3657600"/>
           </a:xfrm>
           <a:prstGeom prst="roundRect">
             <a:avLst>
-              <a:gd name="adj" fmla="val 4167"/>
+              <a:gd name="adj" fmla="val 2500"/>
             </a:avLst>
           </a:prstGeom>
           <a:solidFill>
@@ -8814,8 +8958,8 @@
         </p:nvSpPr>
         <p:spPr>
           <a:xfrm>
-            <a:off x="6217920" y="1371600"/>
-            <a:ext cx="5394960" cy="365760"/>
+            <a:off x="4709160" y="1097280"/>
+            <a:ext cx="3977640" cy="347472"/>
           </a:xfrm>
           <a:prstGeom prst="rect">
             <a:avLst/>
@@ -8839,8 +8983,8 @@
         </p:nvSpPr>
         <p:spPr>
           <a:xfrm>
-            <a:off x="6355080" y="1417320"/>
-            <a:ext cx="5120640" cy="274320"/>
+            <a:off x="4846320" y="1133856"/>
+            <a:ext cx="3703320" cy="274320"/>
           </a:xfrm>
           <a:prstGeom prst="rect">
             <a:avLst/>
@@ -8856,7 +9000,7 @@
               <a:buNone/>
             </a:pPr>
             <a:r>
-              <a:rPr lang="en-US" sz="1300" b="1" dirty="0">
+              <a:rPr lang="en-US" sz="1150" b="1" dirty="0">
                 <a:solidFill>
                   <a:srgbClr val="0284C7"/>
                 </a:solidFill>
@@ -8866,7 +9010,7 @@
               </a:rPr>
               <a:t>📈 Empirical Performance &amp; Explainability</a:t>
             </a:r>
-            <a:endParaRPr lang="en-US" sz="1300" dirty="0"/>
+            <a:endParaRPr lang="en-US" sz="1150" dirty="0"/>
           </a:p>
         </p:txBody>
       </p:sp>
@@ -8878,8 +9022,8 @@
         </p:nvSpPr>
         <p:spPr>
           <a:xfrm>
-            <a:off x="6400800" y="1783080"/>
-            <a:ext cx="5029200" cy="2788920"/>
+            <a:off x="4846320" y="1481328"/>
+            <a:ext cx="3703320" cy="3218688"/>
           </a:xfrm>
           <a:prstGeom prst="rect">
             <a:avLst/>
@@ -8893,11 +9037,11 @@
           <a:p>
             <a:pPr>
               <a:spcBef>
-                <a:spcPts val="400"/>
-              </a:spcBef>
-            </a:pPr>
-            <a:r>
-              <a:rPr lang="en-US" sz="1050" b="1" dirty="0">
+                <a:spcPts val="300"/>
+              </a:spcBef>
+            </a:pPr>
+            <a:r>
+              <a:rPr lang="en-US" sz="950" b="1" dirty="0">
                 <a:solidFill>
                   <a:srgbClr val="0F172A"/>
                 </a:solidFill>
@@ -8909,12 +9053,12 @@
             </a:r>
             <a:pPr indent="0" marL="0">
               <a:spcBef>
-                <a:spcPts val="400"/>
-              </a:spcBef>
-              <a:buNone/>
-            </a:pPr>
-            <a:r>
-              <a:rPr lang="en-US" sz="1050" dirty="0">
+                <a:spcPts val="300"/>
+              </a:spcBef>
+              <a:buNone/>
+            </a:pPr>
+            <a:r>
+              <a:rPr lang="en-US" sz="950" dirty="0">
                 <a:solidFill>
                   <a:srgbClr val="1E293B"/>
                 </a:solidFill>
@@ -8927,12 +9071,12 @@
             </a:r>
             <a:pPr indent="0" marL="0">
               <a:spcBef>
-                <a:spcPts val="400"/>
-              </a:spcBef>
-              <a:buNone/>
-            </a:pPr>
-            <a:r>
-              <a:rPr lang="en-US" sz="1050" b="1" dirty="0">
+                <a:spcPts val="300"/>
+              </a:spcBef>
+              <a:buNone/>
+            </a:pPr>
+            <a:r>
+              <a:rPr lang="en-US" sz="950" b="1" dirty="0">
                 <a:solidFill>
                   <a:srgbClr val="0F172A"/>
                 </a:solidFill>
@@ -8944,12 +9088,12 @@
             </a:r>
             <a:pPr indent="0" marL="0">
               <a:spcBef>
-                <a:spcPts val="400"/>
-              </a:spcBef>
-              <a:buNone/>
-            </a:pPr>
-            <a:r>
-              <a:rPr lang="en-US" sz="1050" dirty="0">
+                <a:spcPts val="300"/>
+              </a:spcBef>
+              <a:buNone/>
+            </a:pPr>
+            <a:r>
+              <a:rPr lang="en-US" sz="950" dirty="0">
                 <a:solidFill>
                   <a:srgbClr val="1E293B"/>
                 </a:solidFill>
@@ -8962,12 +9106,12 @@
             </a:r>
             <a:pPr indent="0" marL="0">
               <a:spcBef>
-                <a:spcPts val="400"/>
-              </a:spcBef>
-              <a:buNone/>
-            </a:pPr>
-            <a:r>
-              <a:rPr lang="en-US" sz="1050" b="1" dirty="0">
+                <a:spcPts val="300"/>
+              </a:spcBef>
+              <a:buNone/>
+            </a:pPr>
+            <a:r>
+              <a:rPr lang="en-US" sz="950" b="1" dirty="0">
                 <a:solidFill>
                   <a:srgbClr val="0F172A"/>
                 </a:solidFill>
@@ -8979,12 +9123,12 @@
             </a:r>
             <a:pPr indent="0" marL="0">
               <a:spcBef>
-                <a:spcPts val="400"/>
-              </a:spcBef>
-              <a:buNone/>
-            </a:pPr>
-            <a:r>
-              <a:rPr lang="en-US" sz="1050" dirty="0">
+                <a:spcPts val="300"/>
+              </a:spcBef>
+              <a:buNone/>
+            </a:pPr>
+            <a:r>
+              <a:rPr lang="en-US" sz="950" dirty="0">
                 <a:solidFill>
                   <a:srgbClr val="1E293B"/>
                 </a:solidFill>
@@ -8997,12 +9141,12 @@
             </a:r>
             <a:pPr indent="0" marL="0">
               <a:spcBef>
-                <a:spcPts val="400"/>
-              </a:spcBef>
-              <a:buNone/>
-            </a:pPr>
-            <a:r>
-              <a:rPr lang="en-US" sz="1050" b="1" dirty="0">
+                <a:spcPts val="300"/>
+              </a:spcBef>
+              <a:buNone/>
+            </a:pPr>
+            <a:r>
+              <a:rPr lang="en-US" sz="950" b="1" dirty="0">
                 <a:solidFill>
                   <a:srgbClr val="0F172A"/>
                 </a:solidFill>
@@ -9014,12 +9158,12 @@
             </a:r>
             <a:pPr indent="0" marL="0">
               <a:spcBef>
-                <a:spcPts val="400"/>
-              </a:spcBef>
-              <a:buNone/>
-            </a:pPr>
-            <a:r>
-              <a:rPr lang="en-US" sz="1050" dirty="0">
+                <a:spcPts val="300"/>
+              </a:spcBef>
+              <a:buNone/>
+            </a:pPr>
+            <a:r>
+              <a:rPr lang="en-US" sz="950" dirty="0">
                 <a:solidFill>
                   <a:srgbClr val="1E293B"/>
                 </a:solidFill>
@@ -9030,7 +9174,7 @@
               <a:t>Classifies threats into Trojan, Ransomware-like, PUA, or Suspicious categories.
 </a:t>
             </a:r>
-            <a:endParaRPr lang="en-US" sz="1050" dirty="0"/>
+            <a:endParaRPr lang="en-US" sz="950" dirty="0"/>
           </a:p>
         </p:txBody>
       </p:sp>
@@ -9074,8 +9218,8 @@
         </p:nvSpPr>
         <p:spPr>
           <a:xfrm>
-            <a:off x="548640" y="365760"/>
-            <a:ext cx="7772400" cy="457200"/>
+            <a:off x="457200" y="320040"/>
+            <a:ext cx="6035040" cy="365760"/>
           </a:xfrm>
           <a:prstGeom prst="rect">
             <a:avLst/>
@@ -9091,7 +9235,7 @@
               <a:buNone/>
             </a:pPr>
             <a:r>
-              <a:rPr lang="en-US" sz="2200" b="1" dirty="0">
+              <a:rPr lang="en-US" sz="1800" b="1" dirty="0">
                 <a:solidFill>
                   <a:srgbClr val="0F172A"/>
                 </a:solidFill>
@@ -9101,7 +9245,7 @@
               </a:rPr>
               <a:t>Module 3: Network Flow Monitor &amp; Subnet Scanner</a:t>
             </a:r>
-            <a:endParaRPr lang="en-US" sz="2200" dirty="0"/>
+            <a:endParaRPr lang="en-US" sz="1800" dirty="0"/>
           </a:p>
         </p:txBody>
       </p:sp>
@@ -9113,8 +9257,8 @@
         </p:nvSpPr>
         <p:spPr>
           <a:xfrm>
-            <a:off x="548640" y="777240"/>
-            <a:ext cx="7772400" cy="274320"/>
+            <a:off x="457200" y="685800"/>
+            <a:ext cx="6035040" cy="228600"/>
           </a:xfrm>
           <a:prstGeom prst="rect">
             <a:avLst/>
@@ -9130,7 +9274,7 @@
               <a:buNone/>
             </a:pPr>
             <a:r>
-              <a:rPr lang="en-US" sz="1200" dirty="0">
+              <a:rPr lang="en-US" sz="1050" dirty="0">
                 <a:solidFill>
                   <a:srgbClr val="0284C7"/>
                 </a:solidFill>
@@ -9140,7 +9284,7 @@
               </a:rPr>
               <a:t>5-Tuple Socket Correlation &amp; Local Subnet Device Discovery</a:t>
             </a:r>
-            <a:endParaRPr lang="en-US" sz="1200" dirty="0"/>
+            <a:endParaRPr lang="en-US" sz="1050" dirty="0"/>
           </a:p>
         </p:txBody>
       </p:sp>
@@ -9152,12 +9296,12 @@
         </p:nvSpPr>
         <p:spPr>
           <a:xfrm>
-            <a:off x="8778240" y="365760"/>
-            <a:ext cx="2926080" cy="411480"/>
+            <a:off x="6675120" y="320040"/>
+            <a:ext cx="2011680" cy="365760"/>
           </a:xfrm>
           <a:prstGeom prst="roundRect">
             <a:avLst>
-              <a:gd name="adj" fmla="val 44444"/>
+              <a:gd name="adj" fmla="val 50000"/>
             </a:avLst>
           </a:prstGeom>
           <a:solidFill>
@@ -9179,8 +9323,8 @@
         </p:nvSpPr>
         <p:spPr>
           <a:xfrm>
-            <a:off x="8778240" y="365760"/>
-            <a:ext cx="2926080" cy="411480"/>
+            <a:off x="6675120" y="320040"/>
+            <a:ext cx="2011680" cy="365760"/>
           </a:xfrm>
           <a:prstGeom prst="rect">
             <a:avLst/>
@@ -9196,7 +9340,7 @@
               <a:buNone/>
             </a:pPr>
             <a:r>
-              <a:rPr lang="en-US" sz="1000" b="1" dirty="0">
+              <a:rPr lang="en-US" sz="900" b="1" dirty="0">
                 <a:solidFill>
                   <a:srgbClr val="7C3AED"/>
                 </a:solidFill>
@@ -9206,7 +9350,7 @@
               </a:rPr>
               <a:t>🎙️ Soham Wadale</a:t>
             </a:r>
-            <a:endParaRPr lang="en-US" sz="1000" dirty="0"/>
+            <a:endParaRPr lang="en-US" sz="900" dirty="0"/>
           </a:p>
         </p:txBody>
       </p:sp>
@@ -9218,8 +9362,8 @@
         </p:nvSpPr>
         <p:spPr>
           <a:xfrm>
-            <a:off x="548640" y="1143000"/>
-            <a:ext cx="11091672" cy="0"/>
+            <a:off x="457200" y="960120"/>
+            <a:ext cx="8229600" cy="0"/>
           </a:xfrm>
           <a:prstGeom prst="line">
             <a:avLst/>
@@ -9241,12 +9385,12 @@
         </p:nvSpPr>
         <p:spPr>
           <a:xfrm>
-            <a:off x="548640" y="1371600"/>
-            <a:ext cx="5303520" cy="3291840"/>
+            <a:off x="457200" y="1097280"/>
+            <a:ext cx="3977640" cy="3657600"/>
           </a:xfrm>
           <a:prstGeom prst="roundRect">
             <a:avLst>
-              <a:gd name="adj" fmla="val 4167"/>
+              <a:gd name="adj" fmla="val 2500"/>
             </a:avLst>
           </a:prstGeom>
           <a:solidFill>
@@ -9268,8 +9412,8 @@
         </p:nvSpPr>
         <p:spPr>
           <a:xfrm>
-            <a:off x="548640" y="1371600"/>
-            <a:ext cx="5303520" cy="365760"/>
+            <a:off x="457200" y="1097280"/>
+            <a:ext cx="3977640" cy="347472"/>
           </a:xfrm>
           <a:prstGeom prst="rect">
             <a:avLst/>
@@ -9293,8 +9437,8 @@
         </p:nvSpPr>
         <p:spPr>
           <a:xfrm>
-            <a:off x="685800" y="1417320"/>
-            <a:ext cx="5029200" cy="274320"/>
+            <a:off x="594360" y="1133856"/>
+            <a:ext cx="3703320" cy="274320"/>
           </a:xfrm>
           <a:prstGeom prst="rect">
             <a:avLst/>
@@ -9310,7 +9454,7 @@
               <a:buNone/>
             </a:pPr>
             <a:r>
-              <a:rPr lang="en-US" sz="1300" b="1" dirty="0">
+              <a:rPr lang="en-US" sz="1150" b="1" dirty="0">
                 <a:solidFill>
                   <a:srgbClr val="0284C7"/>
                 </a:solidFill>
@@ -9320,7 +9464,7 @@
               </a:rPr>
               <a:t>🌐 Network Flow Correlation</a:t>
             </a:r>
-            <a:endParaRPr lang="en-US" sz="1300" dirty="0"/>
+            <a:endParaRPr lang="en-US" sz="1150" dirty="0"/>
           </a:p>
         </p:txBody>
       </p:sp>
@@ -9332,8 +9476,8 @@
         </p:nvSpPr>
         <p:spPr>
           <a:xfrm>
-            <a:off x="731520" y="1783080"/>
-            <a:ext cx="4937760" cy="2788920"/>
+            <a:off x="594360" y="1481328"/>
+            <a:ext cx="3703320" cy="3218688"/>
           </a:xfrm>
           <a:prstGeom prst="rect">
             <a:avLst/>
@@ -9347,11 +9491,11 @@
           <a:p>
             <a:pPr>
               <a:spcBef>
-                <a:spcPts val="400"/>
-              </a:spcBef>
-            </a:pPr>
-            <a:r>
-              <a:rPr lang="en-US" sz="1050" b="1" dirty="0">
+                <a:spcPts val="300"/>
+              </a:spcBef>
+            </a:pPr>
+            <a:r>
+              <a:rPr lang="en-US" sz="950" b="1" dirty="0">
                 <a:solidFill>
                   <a:srgbClr val="0F172A"/>
                 </a:solidFill>
@@ -9363,12 +9507,12 @@
             </a:r>
             <a:pPr indent="0" marL="0">
               <a:spcBef>
-                <a:spcPts val="400"/>
-              </a:spcBef>
-              <a:buNone/>
-            </a:pPr>
-            <a:r>
-              <a:rPr lang="en-US" sz="1050" dirty="0">
+                <a:spcPts val="300"/>
+              </a:spcBef>
+              <a:buNone/>
+            </a:pPr>
+            <a:r>
+              <a:rPr lang="en-US" sz="950" dirty="0">
                 <a:solidFill>
                   <a:srgbClr val="1E293B"/>
                 </a:solidFill>
@@ -9381,12 +9525,12 @@
             </a:r>
             <a:pPr indent="0" marL="0">
               <a:spcBef>
-                <a:spcPts val="400"/>
-              </a:spcBef>
-              <a:buNone/>
-            </a:pPr>
-            <a:r>
-              <a:rPr lang="en-US" sz="1050" b="1" dirty="0">
+                <a:spcPts val="300"/>
+              </a:spcBef>
+              <a:buNone/>
+            </a:pPr>
+            <a:r>
+              <a:rPr lang="en-US" sz="950" b="1" dirty="0">
                 <a:solidFill>
                   <a:srgbClr val="0F172A"/>
                 </a:solidFill>
@@ -9398,12 +9542,12 @@
             </a:r>
             <a:pPr indent="0" marL="0">
               <a:spcBef>
-                <a:spcPts val="400"/>
-              </a:spcBef>
-              <a:buNone/>
-            </a:pPr>
-            <a:r>
-              <a:rPr lang="en-US" sz="1050" dirty="0">
+                <a:spcPts val="300"/>
+              </a:spcBef>
+              <a:buNone/>
+            </a:pPr>
+            <a:r>
+              <a:rPr lang="en-US" sz="950" dirty="0">
                 <a:solidFill>
                   <a:srgbClr val="1E293B"/>
                 </a:solidFill>
@@ -9416,12 +9560,12 @@
             </a:r>
             <a:pPr indent="0" marL="0">
               <a:spcBef>
-                <a:spcPts val="400"/>
-              </a:spcBef>
-              <a:buNone/>
-            </a:pPr>
-            <a:r>
-              <a:rPr lang="en-US" sz="1050" b="1" dirty="0">
+                <a:spcPts val="300"/>
+              </a:spcBef>
+              <a:buNone/>
+            </a:pPr>
+            <a:r>
+              <a:rPr lang="en-US" sz="950" b="1" dirty="0">
                 <a:solidFill>
                   <a:srgbClr val="0F172A"/>
                 </a:solidFill>
@@ -9433,12 +9577,12 @@
             </a:r>
             <a:pPr indent="0" marL="0">
               <a:spcBef>
-                <a:spcPts val="400"/>
-              </a:spcBef>
-              <a:buNone/>
-            </a:pPr>
-            <a:r>
-              <a:rPr lang="en-US" sz="1050" dirty="0">
+                <a:spcPts val="300"/>
+              </a:spcBef>
+              <a:buNone/>
+            </a:pPr>
+            <a:r>
+              <a:rPr lang="en-US" sz="950" dirty="0">
                 <a:solidFill>
                   <a:srgbClr val="1E293B"/>
                 </a:solidFill>
@@ -9451,12 +9595,12 @@
             </a:r>
             <a:pPr indent="0" marL="0">
               <a:spcBef>
-                <a:spcPts val="400"/>
-              </a:spcBef>
-              <a:buNone/>
-            </a:pPr>
-            <a:r>
-              <a:rPr lang="en-US" sz="1050" b="1" dirty="0">
+                <a:spcPts val="300"/>
+              </a:spcBef>
+              <a:buNone/>
+            </a:pPr>
+            <a:r>
+              <a:rPr lang="en-US" sz="950" b="1" dirty="0">
                 <a:solidFill>
                   <a:srgbClr val="0F172A"/>
                 </a:solidFill>
@@ -9468,12 +9612,12 @@
             </a:r>
             <a:pPr indent="0" marL="0">
               <a:spcBef>
-                <a:spcPts val="400"/>
-              </a:spcBef>
-              <a:buNone/>
-            </a:pPr>
-            <a:r>
-              <a:rPr lang="en-US" sz="1050" dirty="0">
+                <a:spcPts val="300"/>
+              </a:spcBef>
+              <a:buNone/>
+            </a:pPr>
+            <a:r>
+              <a:rPr lang="en-US" sz="950" dirty="0">
                 <a:solidFill>
                   <a:srgbClr val="1E293B"/>
                 </a:solidFill>
@@ -9484,7 +9628,7 @@
               <a:t>Allows instant creation of Windows Filtering Platform (WFP) blocking rules for malicious IPs.
 </a:t>
             </a:r>
-            <a:endParaRPr lang="en-US" sz="1050" dirty="0"/>
+            <a:endParaRPr lang="en-US" sz="950" dirty="0"/>
           </a:p>
         </p:txBody>
       </p:sp>
@@ -9496,12 +9640,12 @@
         </p:nvSpPr>
         <p:spPr>
           <a:xfrm>
-            <a:off x="6217920" y="1371600"/>
-            <a:ext cx="5394960" cy="3291840"/>
+            <a:off x="4709160" y="1097280"/>
+            <a:ext cx="3977640" cy="3657600"/>
           </a:xfrm>
           <a:prstGeom prst="roundRect">
             <a:avLst>
-              <a:gd name="adj" fmla="val 4167"/>
+              <a:gd name="adj" fmla="val 2500"/>
             </a:avLst>
           </a:prstGeom>
           <a:solidFill>
@@ -9523,8 +9667,8 @@
         </p:nvSpPr>
         <p:spPr>
           <a:xfrm>
-            <a:off x="6217920" y="1371600"/>
-            <a:ext cx="5394960" cy="365760"/>
+            <a:off x="4709160" y="1097280"/>
+            <a:ext cx="3977640" cy="347472"/>
           </a:xfrm>
           <a:prstGeom prst="rect">
             <a:avLst/>
@@ -9548,8 +9692,8 @@
         </p:nvSpPr>
         <p:spPr>
           <a:xfrm>
-            <a:off x="6355080" y="1417320"/>
-            <a:ext cx="5120640" cy="274320"/>
+            <a:off x="4846320" y="1133856"/>
+            <a:ext cx="3703320" cy="274320"/>
           </a:xfrm>
           <a:prstGeom prst="rect">
             <a:avLst/>
@@ -9565,7 +9709,7 @@
               <a:buNone/>
             </a:pPr>
             <a:r>
-              <a:rPr lang="en-US" sz="1300" b="1" dirty="0">
+              <a:rPr lang="en-US" sz="1150" b="1" dirty="0">
                 <a:solidFill>
                   <a:srgbClr val="0284C7"/>
                 </a:solidFill>
@@ -9575,7 +9719,7 @@
               </a:rPr>
               <a:t>📡 Subnet Device Discovery</a:t>
             </a:r>
-            <a:endParaRPr lang="en-US" sz="1300" dirty="0"/>
+            <a:endParaRPr lang="en-US" sz="1150" dirty="0"/>
           </a:p>
         </p:txBody>
       </p:sp>
@@ -9587,8 +9731,8 @@
         </p:nvSpPr>
         <p:spPr>
           <a:xfrm>
-            <a:off x="6400800" y="1783080"/>
-            <a:ext cx="5029200" cy="2788920"/>
+            <a:off x="4846320" y="1481328"/>
+            <a:ext cx="3703320" cy="3218688"/>
           </a:xfrm>
           <a:prstGeom prst="rect">
             <a:avLst/>
@@ -9602,11 +9746,11 @@
           <a:p>
             <a:pPr>
               <a:spcBef>
-                <a:spcPts val="400"/>
-              </a:spcBef>
-            </a:pPr>
-            <a:r>
-              <a:rPr lang="en-US" sz="1050" b="1" dirty="0">
+                <a:spcPts val="300"/>
+              </a:spcBef>
+            </a:pPr>
+            <a:r>
+              <a:rPr lang="en-US" sz="950" b="1" dirty="0">
                 <a:solidFill>
                   <a:srgbClr val="0F172A"/>
                 </a:solidFill>
@@ -9618,12 +9762,12 @@
             </a:r>
             <a:pPr indent="0" marL="0">
               <a:spcBef>
-                <a:spcPts val="400"/>
-              </a:spcBef>
-              <a:buNone/>
-            </a:pPr>
-            <a:r>
-              <a:rPr lang="en-US" sz="1050" dirty="0">
+                <a:spcPts val="300"/>
+              </a:spcBef>
+              <a:buNone/>
+            </a:pPr>
+            <a:r>
+              <a:rPr lang="en-US" sz="950" dirty="0">
                 <a:solidFill>
                   <a:srgbClr val="1E293B"/>
                 </a:solidFill>
@@ -9636,12 +9780,12 @@
             </a:r>
             <a:pPr indent="0" marL="0">
               <a:spcBef>
-                <a:spcPts val="400"/>
-              </a:spcBef>
-              <a:buNone/>
-            </a:pPr>
-            <a:r>
-              <a:rPr lang="en-US" sz="1050" b="1" dirty="0">
+                <a:spcPts val="300"/>
+              </a:spcBef>
+              <a:buNone/>
+            </a:pPr>
+            <a:r>
+              <a:rPr lang="en-US" sz="950" b="1" dirty="0">
                 <a:solidFill>
                   <a:srgbClr val="0F172A"/>
                 </a:solidFill>
@@ -9653,12 +9797,12 @@
             </a:r>
             <a:pPr indent="0" marL="0">
               <a:spcBef>
-                <a:spcPts val="400"/>
-              </a:spcBef>
-              <a:buNone/>
-            </a:pPr>
-            <a:r>
-              <a:rPr lang="en-US" sz="1050" dirty="0">
+                <a:spcPts val="300"/>
+              </a:spcBef>
+              <a:buNone/>
+            </a:pPr>
+            <a:r>
+              <a:rPr lang="en-US" sz="950" dirty="0">
                 <a:solidFill>
                   <a:srgbClr val="1E293B"/>
                 </a:solidFill>
@@ -9671,12 +9815,12 @@
             </a:r>
             <a:pPr indent="0" marL="0">
               <a:spcBef>
-                <a:spcPts val="400"/>
-              </a:spcBef>
-              <a:buNone/>
-            </a:pPr>
-            <a:r>
-              <a:rPr lang="en-US" sz="1050" b="1" dirty="0">
+                <a:spcPts val="300"/>
+              </a:spcBef>
+              <a:buNone/>
+            </a:pPr>
+            <a:r>
+              <a:rPr lang="en-US" sz="950" b="1" dirty="0">
                 <a:solidFill>
                   <a:srgbClr val="0F172A"/>
                 </a:solidFill>
@@ -9688,12 +9832,12 @@
             </a:r>
             <a:pPr indent="0" marL="0">
               <a:spcBef>
-                <a:spcPts val="400"/>
-              </a:spcBef>
-              <a:buNone/>
-            </a:pPr>
-            <a:r>
-              <a:rPr lang="en-US" sz="1050" dirty="0">
+                <a:spcPts val="300"/>
+              </a:spcBef>
+              <a:buNone/>
+            </a:pPr>
+            <a:r>
+              <a:rPr lang="en-US" sz="950" dirty="0">
                 <a:solidFill>
                   <a:srgbClr val="1E293B"/>
                 </a:solidFill>
@@ -9706,12 +9850,12 @@
             </a:r>
             <a:pPr indent="0" marL="0">
               <a:spcBef>
-                <a:spcPts val="400"/>
-              </a:spcBef>
-              <a:buNone/>
-            </a:pPr>
-            <a:r>
-              <a:rPr lang="en-US" sz="1050" b="1" dirty="0">
+                <a:spcPts val="300"/>
+              </a:spcBef>
+              <a:buNone/>
+            </a:pPr>
+            <a:r>
+              <a:rPr lang="en-US" sz="950" b="1" dirty="0">
                 <a:solidFill>
                   <a:srgbClr val="0F172A"/>
                 </a:solidFill>
@@ -9723,12 +9867,12 @@
             </a:r>
             <a:pPr indent="0" marL="0">
               <a:spcBef>
-                <a:spcPts val="400"/>
-              </a:spcBef>
-              <a:buNone/>
-            </a:pPr>
-            <a:r>
-              <a:rPr lang="en-US" sz="1050" dirty="0">
+                <a:spcPts val="300"/>
+              </a:spcBef>
+              <a:buNone/>
+            </a:pPr>
+            <a:r>
+              <a:rPr lang="en-US" sz="950" dirty="0">
                 <a:solidFill>
                   <a:srgbClr val="1E293B"/>
                 </a:solidFill>
@@ -9739,7 +9883,7 @@
               <a:t>Flags newly connected devices attempting rapid sequential port probes.
 </a:t>
             </a:r>
-            <a:endParaRPr lang="en-US" sz="1050" dirty="0"/>
+            <a:endParaRPr lang="en-US" sz="950" dirty="0"/>
           </a:p>
         </p:txBody>
       </p:sp>
@@ -9783,8 +9927,8 @@
         </p:nvSpPr>
         <p:spPr>
           <a:xfrm>
-            <a:off x="548640" y="365760"/>
-            <a:ext cx="7772400" cy="457200"/>
+            <a:off x="457200" y="320040"/>
+            <a:ext cx="6035040" cy="365760"/>
           </a:xfrm>
           <a:prstGeom prst="rect">
             <a:avLst/>
@@ -9800,7 +9944,7 @@
               <a:buNone/>
             </a:pPr>
             <a:r>
-              <a:rPr lang="en-US" sz="2200" b="1" dirty="0">
+              <a:rPr lang="en-US" sz="1800" b="1" dirty="0">
                 <a:solidFill>
                   <a:srgbClr val="0F172A"/>
                 </a:solidFill>
@@ -9810,7 +9954,7 @@
               </a:rPr>
               <a:t>Module 4: Windows Registry &amp; Persistence Inspector</a:t>
             </a:r>
-            <a:endParaRPr lang="en-US" sz="2200" dirty="0"/>
+            <a:endParaRPr lang="en-US" sz="1800" dirty="0"/>
           </a:p>
         </p:txBody>
       </p:sp>
@@ -9822,8 +9966,8 @@
         </p:nvSpPr>
         <p:spPr>
           <a:xfrm>
-            <a:off x="548640" y="777240"/>
-            <a:ext cx="7772400" cy="274320"/>
+            <a:off x="457200" y="685800"/>
+            <a:ext cx="6035040" cy="228600"/>
           </a:xfrm>
           <a:prstGeom prst="rect">
             <a:avLst/>
@@ -9839,7 +9983,7 @@
               <a:buNone/>
             </a:pPr>
             <a:r>
-              <a:rPr lang="en-US" sz="1200" dirty="0">
+              <a:rPr lang="en-US" sz="1050" dirty="0">
                 <a:solidFill>
                   <a:srgbClr val="0284C7"/>
                 </a:solidFill>
@@ -9849,7 +9993,7 @@
               </a:rPr>
               <a:t>Defending Against System Startup &amp; Boot Autostart Hijacking</a:t>
             </a:r>
-            <a:endParaRPr lang="en-US" sz="1200" dirty="0"/>
+            <a:endParaRPr lang="en-US" sz="1050" dirty="0"/>
           </a:p>
         </p:txBody>
       </p:sp>
@@ -9861,12 +10005,12 @@
         </p:nvSpPr>
         <p:spPr>
           <a:xfrm>
-            <a:off x="8778240" y="365760"/>
-            <a:ext cx="2926080" cy="411480"/>
+            <a:off x="6675120" y="320040"/>
+            <a:ext cx="2011680" cy="365760"/>
           </a:xfrm>
           <a:prstGeom prst="roundRect">
             <a:avLst>
-              <a:gd name="adj" fmla="val 44444"/>
+              <a:gd name="adj" fmla="val 50000"/>
             </a:avLst>
           </a:prstGeom>
           <a:solidFill>
@@ -9888,8 +10032,8 @@
         </p:nvSpPr>
         <p:spPr>
           <a:xfrm>
-            <a:off x="8778240" y="365760"/>
-            <a:ext cx="2926080" cy="411480"/>
+            <a:off x="6675120" y="320040"/>
+            <a:ext cx="2011680" cy="365760"/>
           </a:xfrm>
           <a:prstGeom prst="rect">
             <a:avLst/>
@@ -9905,7 +10049,7 @@
               <a:buNone/>
             </a:pPr>
             <a:r>
-              <a:rPr lang="en-US" sz="1000" b="1" dirty="0">
+              <a:rPr lang="en-US" sz="900" b="1" dirty="0">
                 <a:solidFill>
                   <a:srgbClr val="7C3AED"/>
                 </a:solidFill>
@@ -9915,7 +10059,7 @@
               </a:rPr>
               <a:t>🎙️ Soham Wadale</a:t>
             </a:r>
-            <a:endParaRPr lang="en-US" sz="1000" dirty="0"/>
+            <a:endParaRPr lang="en-US" sz="900" dirty="0"/>
           </a:p>
         </p:txBody>
       </p:sp>
@@ -9927,8 +10071,8 @@
         </p:nvSpPr>
         <p:spPr>
           <a:xfrm>
-            <a:off x="548640" y="1143000"/>
-            <a:ext cx="11091672" cy="0"/>
+            <a:off x="457200" y="960120"/>
+            <a:ext cx="8229600" cy="0"/>
           </a:xfrm>
           <a:prstGeom prst="line">
             <a:avLst/>
@@ -9950,12 +10094,12 @@
         </p:nvSpPr>
         <p:spPr>
           <a:xfrm>
-            <a:off x="548640" y="1371600"/>
-            <a:ext cx="5303520" cy="3291840"/>
+            <a:off x="457200" y="1097280"/>
+            <a:ext cx="3977640" cy="3657600"/>
           </a:xfrm>
           <a:prstGeom prst="roundRect">
             <a:avLst>
-              <a:gd name="adj" fmla="val 4167"/>
+              <a:gd name="adj" fmla="val 2500"/>
             </a:avLst>
           </a:prstGeom>
           <a:solidFill>
@@ -9977,8 +10121,8 @@
         </p:nvSpPr>
         <p:spPr>
           <a:xfrm>
-            <a:off x="548640" y="1371600"/>
-            <a:ext cx="5303520" cy="365760"/>
+            <a:off x="457200" y="1097280"/>
+            <a:ext cx="3977640" cy="347472"/>
           </a:xfrm>
           <a:prstGeom prst="rect">
             <a:avLst/>
@@ -10002,8 +10146,8 @@
         </p:nvSpPr>
         <p:spPr>
           <a:xfrm>
-            <a:off x="685800" y="1417320"/>
-            <a:ext cx="5029200" cy="274320"/>
+            <a:off x="594360" y="1133856"/>
+            <a:ext cx="3703320" cy="274320"/>
           </a:xfrm>
           <a:prstGeom prst="rect">
             <a:avLst/>
@@ -10019,7 +10163,7 @@
               <a:buNone/>
             </a:pPr>
             <a:r>
-              <a:rPr lang="en-US" sz="1300" b="1" dirty="0">
+              <a:rPr lang="en-US" sz="1150" b="1" dirty="0">
                 <a:solidFill>
                   <a:srgbClr val="0284C7"/>
                 </a:solidFill>
@@ -10029,7 +10173,7 @@
               </a:rPr>
               <a:t>🔑 Windows Registry Inspection</a:t>
             </a:r>
-            <a:endParaRPr lang="en-US" sz="1300" dirty="0"/>
+            <a:endParaRPr lang="en-US" sz="1150" dirty="0"/>
           </a:p>
         </p:txBody>
       </p:sp>
@@ -10041,8 +10185,8 @@
         </p:nvSpPr>
         <p:spPr>
           <a:xfrm>
-            <a:off x="731520" y="1783080"/>
-            <a:ext cx="4937760" cy="2788920"/>
+            <a:off x="594360" y="1481328"/>
+            <a:ext cx="3703320" cy="3218688"/>
           </a:xfrm>
           <a:prstGeom prst="rect">
             <a:avLst/>
@@ -10056,11 +10200,11 @@
           <a:p>
             <a:pPr>
               <a:spcBef>
-                <a:spcPts val="400"/>
-              </a:spcBef>
-            </a:pPr>
-            <a:r>
-              <a:rPr lang="en-US" sz="1050" b="1" dirty="0">
+                <a:spcPts val="300"/>
+              </a:spcBef>
+            </a:pPr>
+            <a:r>
+              <a:rPr lang="en-US" sz="950" b="1" dirty="0">
                 <a:solidFill>
                   <a:srgbClr val="0F172A"/>
                 </a:solidFill>
@@ -10072,12 +10216,12 @@
             </a:r>
             <a:pPr indent="0" marL="0">
               <a:spcBef>
-                <a:spcPts val="400"/>
-              </a:spcBef>
-              <a:buNone/>
-            </a:pPr>
-            <a:r>
-              <a:rPr lang="en-US" sz="1050" dirty="0">
+                <a:spcPts val="300"/>
+              </a:spcBef>
+              <a:buNone/>
+            </a:pPr>
+            <a:r>
+              <a:rPr lang="en-US" sz="950" dirty="0">
                 <a:solidFill>
                   <a:srgbClr val="1E293B"/>
                 </a:solidFill>
@@ -10090,12 +10234,12 @@
             </a:r>
             <a:pPr indent="0" marL="0">
               <a:spcBef>
-                <a:spcPts val="400"/>
-              </a:spcBef>
-              <a:buNone/>
-            </a:pPr>
-            <a:r>
-              <a:rPr lang="en-US" sz="1050" b="1" dirty="0">
+                <a:spcPts val="300"/>
+              </a:spcBef>
+              <a:buNone/>
+            </a:pPr>
+            <a:r>
+              <a:rPr lang="en-US" sz="950" b="1" dirty="0">
                 <a:solidFill>
                   <a:srgbClr val="0F172A"/>
                 </a:solidFill>
@@ -10107,12 +10251,12 @@
             </a:r>
             <a:pPr indent="0" marL="0">
               <a:spcBef>
-                <a:spcPts val="400"/>
-              </a:spcBef>
-              <a:buNone/>
-            </a:pPr>
-            <a:r>
-              <a:rPr lang="en-US" sz="1050" dirty="0">
+                <a:spcPts val="300"/>
+              </a:spcBef>
+              <a:buNone/>
+            </a:pPr>
+            <a:r>
+              <a:rPr lang="en-US" sz="950" dirty="0">
                 <a:solidFill>
                   <a:srgbClr val="1E293B"/>
                 </a:solidFill>
@@ -10125,12 +10269,12 @@
             </a:r>
             <a:pPr indent="0" marL="0">
               <a:spcBef>
-                <a:spcPts val="400"/>
-              </a:spcBef>
-              <a:buNone/>
-            </a:pPr>
-            <a:r>
-              <a:rPr lang="en-US" sz="1050" b="1" dirty="0">
+                <a:spcPts val="300"/>
+              </a:spcBef>
+              <a:buNone/>
+            </a:pPr>
+            <a:r>
+              <a:rPr lang="en-US" sz="950" b="1" dirty="0">
                 <a:solidFill>
                   <a:srgbClr val="0F172A"/>
                 </a:solidFill>
@@ -10142,12 +10286,12 @@
             </a:r>
             <a:pPr indent="0" marL="0">
               <a:spcBef>
-                <a:spcPts val="400"/>
-              </a:spcBef>
-              <a:buNone/>
-            </a:pPr>
-            <a:r>
-              <a:rPr lang="en-US" sz="1050" dirty="0">
+                <a:spcPts val="300"/>
+              </a:spcBef>
+              <a:buNone/>
+            </a:pPr>
+            <a:r>
+              <a:rPr lang="en-US" sz="950" dirty="0">
                 <a:solidFill>
                   <a:srgbClr val="1E293B"/>
                 </a:solidFill>
@@ -10158,7 +10302,7 @@
               <a:t>Audits Windows Task Scheduler entries for obfuscated executable launch flags.
 </a:t>
             </a:r>
-            <a:endParaRPr lang="en-US" sz="1050" dirty="0"/>
+            <a:endParaRPr lang="en-US" sz="950" dirty="0"/>
           </a:p>
         </p:txBody>
       </p:sp>
@@ -10170,12 +10314,12 @@
         </p:nvSpPr>
         <p:spPr>
           <a:xfrm>
-            <a:off x="6217920" y="1371600"/>
-            <a:ext cx="5394960" cy="3291840"/>
+            <a:off x="4709160" y="1097280"/>
+            <a:ext cx="3977640" cy="3657600"/>
           </a:xfrm>
           <a:prstGeom prst="roundRect">
             <a:avLst>
-              <a:gd name="adj" fmla="val 4167"/>
+              <a:gd name="adj" fmla="val 2500"/>
             </a:avLst>
           </a:prstGeom>
           <a:solidFill>
@@ -10197,8 +10341,8 @@
         </p:nvSpPr>
         <p:spPr>
           <a:xfrm>
-            <a:off x="6217920" y="1371600"/>
-            <a:ext cx="5394960" cy="365760"/>
+            <a:off x="4709160" y="1097280"/>
+            <a:ext cx="3977640" cy="347472"/>
           </a:xfrm>
           <a:prstGeom prst="rect">
             <a:avLst/>
@@ -10222,8 +10366,8 @@
         </p:nvSpPr>
         <p:spPr>
           <a:xfrm>
-            <a:off x="6355080" y="1417320"/>
-            <a:ext cx="5120640" cy="274320"/>
+            <a:off x="4846320" y="1133856"/>
+            <a:ext cx="3703320" cy="274320"/>
           </a:xfrm>
           <a:prstGeom prst="rect">
             <a:avLst/>
@@ -10239,7 +10383,7 @@
               <a:buNone/>
             </a:pPr>
             <a:r>
-              <a:rPr lang="en-US" sz="1300" b="1" dirty="0">
+              <a:rPr lang="en-US" sz="1150" b="1" dirty="0">
                 <a:solidFill>
                   <a:srgbClr val="0284C7"/>
                 </a:solidFill>
@@ -10249,7 +10393,7 @@
               </a:rPr>
               <a:t>📁 Startup Folder &amp; MITRE Mapping</a:t>
             </a:r>
-            <a:endParaRPr lang="en-US" sz="1300" dirty="0"/>
+            <a:endParaRPr lang="en-US" sz="1150" dirty="0"/>
           </a:p>
         </p:txBody>
       </p:sp>
@@ -10261,8 +10405,8 @@
         </p:nvSpPr>
         <p:spPr>
           <a:xfrm>
-            <a:off x="6400800" y="1783080"/>
-            <a:ext cx="5029200" cy="2788920"/>
+            <a:off x="4846320" y="1481328"/>
+            <a:ext cx="3703320" cy="3218688"/>
           </a:xfrm>
           <a:prstGeom prst="rect">
             <a:avLst/>
@@ -10276,11 +10420,11 @@
           <a:p>
             <a:pPr>
               <a:spcBef>
-                <a:spcPts val="400"/>
-              </a:spcBef>
-            </a:pPr>
-            <a:r>
-              <a:rPr lang="en-US" sz="1050" b="1" dirty="0">
+                <a:spcPts val="300"/>
+              </a:spcBef>
+            </a:pPr>
+            <a:r>
+              <a:rPr lang="en-US" sz="950" b="1" dirty="0">
                 <a:solidFill>
                   <a:srgbClr val="0F172A"/>
                 </a:solidFill>
@@ -10292,12 +10436,12 @@
             </a:r>
             <a:pPr indent="0" marL="0">
               <a:spcBef>
-                <a:spcPts val="400"/>
-              </a:spcBef>
-              <a:buNone/>
-            </a:pPr>
-            <a:r>
-              <a:rPr lang="en-US" sz="1050" dirty="0">
+                <a:spcPts val="300"/>
+              </a:spcBef>
+              <a:buNone/>
+            </a:pPr>
+            <a:r>
+              <a:rPr lang="en-US" sz="950" dirty="0">
                 <a:solidFill>
                   <a:srgbClr val="1E293B"/>
                 </a:solidFill>
@@ -10310,12 +10454,12 @@
             </a:r>
             <a:pPr indent="0" marL="0">
               <a:spcBef>
-                <a:spcPts val="400"/>
-              </a:spcBef>
-              <a:buNone/>
-            </a:pPr>
-            <a:r>
-              <a:rPr lang="en-US" sz="1050" b="1" dirty="0">
+                <a:spcPts val="300"/>
+              </a:spcBef>
+              <a:buNone/>
+            </a:pPr>
+            <a:r>
+              <a:rPr lang="en-US" sz="950" b="1" dirty="0">
                 <a:solidFill>
                   <a:srgbClr val="0F172A"/>
                 </a:solidFill>
@@ -10327,12 +10471,12 @@
             </a:r>
             <a:pPr indent="0" marL="0">
               <a:spcBef>
-                <a:spcPts val="400"/>
-              </a:spcBef>
-              <a:buNone/>
-            </a:pPr>
-            <a:r>
-              <a:rPr lang="en-US" sz="1050" dirty="0">
+                <a:spcPts val="300"/>
+              </a:spcBef>
+              <a:buNone/>
+            </a:pPr>
+            <a:r>
+              <a:rPr lang="en-US" sz="950" dirty="0">
                 <a:solidFill>
                   <a:srgbClr val="1E293B"/>
                 </a:solidFill>
@@ -10345,12 +10489,12 @@
             </a:r>
             <a:pPr indent="0" marL="0">
               <a:spcBef>
-                <a:spcPts val="400"/>
-              </a:spcBef>
-              <a:buNone/>
-            </a:pPr>
-            <a:r>
-              <a:rPr lang="en-US" sz="1050" b="1" dirty="0">
+                <a:spcPts val="300"/>
+              </a:spcBef>
+              <a:buNone/>
+            </a:pPr>
+            <a:r>
+              <a:rPr lang="en-US" sz="950" b="1" dirty="0">
                 <a:solidFill>
                   <a:srgbClr val="0F172A"/>
                 </a:solidFill>
@@ -10362,12 +10506,12 @@
             </a:r>
             <a:pPr indent="0" marL="0">
               <a:spcBef>
-                <a:spcPts val="400"/>
-              </a:spcBef>
-              <a:buNone/>
-            </a:pPr>
-            <a:r>
-              <a:rPr lang="en-US" sz="1050" dirty="0">
+                <a:spcPts val="300"/>
+              </a:spcBef>
+              <a:buNone/>
+            </a:pPr>
+            <a:r>
+              <a:rPr lang="en-US" sz="950" dirty="0">
                 <a:solidFill>
                   <a:srgbClr val="1E293B"/>
                 </a:solidFill>
@@ -10378,7 +10522,7 @@
               <a:t>Tags all persistence modifications with official MITRE technique ID T1547.
 </a:t>
             </a:r>
-            <a:endParaRPr lang="en-US" sz="1050" dirty="0"/>
+            <a:endParaRPr lang="en-US" sz="950" dirty="0"/>
           </a:p>
         </p:txBody>
       </p:sp>
@@ -10422,8 +10566,8 @@
         </p:nvSpPr>
         <p:spPr>
           <a:xfrm>
-            <a:off x="548640" y="365760"/>
-            <a:ext cx="7772400" cy="457200"/>
+            <a:off x="457200" y="320040"/>
+            <a:ext cx="6035040" cy="365760"/>
           </a:xfrm>
           <a:prstGeom prst="rect">
             <a:avLst/>
@@ -10439,7 +10583,7 @@
               <a:buNone/>
             </a:pPr>
             <a:r>
-              <a:rPr lang="en-US" sz="2200" b="1" dirty="0">
+              <a:rPr lang="en-US" sz="1800" b="1" dirty="0">
                 <a:solidFill>
                   <a:srgbClr val="0F172A"/>
                 </a:solidFill>
@@ -10449,7 +10593,7 @@
               </a:rPr>
               <a:t>Module 5: Alert Triage &amp; Incident Compliance</a:t>
             </a:r>
-            <a:endParaRPr lang="en-US" sz="2200" dirty="0"/>
+            <a:endParaRPr lang="en-US" sz="1800" dirty="0"/>
           </a:p>
         </p:txBody>
       </p:sp>
@@ -10461,8 +10605,8 @@
         </p:nvSpPr>
         <p:spPr>
           <a:xfrm>
-            <a:off x="548640" y="777240"/>
-            <a:ext cx="7772400" cy="274320"/>
+            <a:off x="457200" y="685800"/>
+            <a:ext cx="6035040" cy="228600"/>
           </a:xfrm>
           <a:prstGeom prst="rect">
             <a:avLst/>
@@ -10478,7 +10622,7 @@
               <a:buNone/>
             </a:pPr>
             <a:r>
-              <a:rPr lang="en-US" sz="1200" dirty="0">
+              <a:rPr lang="en-US" sz="1050" dirty="0">
                 <a:solidFill>
                   <a:srgbClr val="0284C7"/>
                 </a:solidFill>
@@ -10488,7 +10632,7 @@
               </a:rPr>
               <a:t>MITRE ATT&amp;CK Mapping &amp; NIST SP 800-61 Rev. 2 Exporter</a:t>
             </a:r>
-            <a:endParaRPr lang="en-US" sz="1200" dirty="0"/>
+            <a:endParaRPr lang="en-US" sz="1050" dirty="0"/>
           </a:p>
         </p:txBody>
       </p:sp>
@@ -10500,12 +10644,12 @@
         </p:nvSpPr>
         <p:spPr>
           <a:xfrm>
-            <a:off x="8778240" y="365760"/>
-            <a:ext cx="2926080" cy="411480"/>
+            <a:off x="6675120" y="320040"/>
+            <a:ext cx="2011680" cy="365760"/>
           </a:xfrm>
           <a:prstGeom prst="roundRect">
             <a:avLst>
-              <a:gd name="adj" fmla="val 44444"/>
+              <a:gd name="adj" fmla="val 50000"/>
             </a:avLst>
           </a:prstGeom>
           <a:solidFill>
@@ -10527,8 +10671,8 @@
         </p:nvSpPr>
         <p:spPr>
           <a:xfrm>
-            <a:off x="8778240" y="365760"/>
-            <a:ext cx="2926080" cy="411480"/>
+            <a:off x="6675120" y="320040"/>
+            <a:ext cx="2011680" cy="365760"/>
           </a:xfrm>
           <a:prstGeom prst="rect">
             <a:avLst/>
@@ -10544,7 +10688,7 @@
               <a:buNone/>
             </a:pPr>
             <a:r>
-              <a:rPr lang="en-US" sz="1000" b="1" dirty="0">
+              <a:rPr lang="en-US" sz="900" b="1" dirty="0">
                 <a:solidFill>
                   <a:srgbClr val="7C3AED"/>
                 </a:solidFill>
@@ -10554,7 +10698,7 @@
               </a:rPr>
               <a:t>🎙️ Ananya Kaushik</a:t>
             </a:r>
-            <a:endParaRPr lang="en-US" sz="1000" dirty="0"/>
+            <a:endParaRPr lang="en-US" sz="900" dirty="0"/>
           </a:p>
         </p:txBody>
       </p:sp>
@@ -10566,8 +10710,8 @@
         </p:nvSpPr>
         <p:spPr>
           <a:xfrm>
-            <a:off x="548640" y="1143000"/>
-            <a:ext cx="11091672" cy="0"/>
+            <a:off x="457200" y="960120"/>
+            <a:ext cx="8229600" cy="0"/>
           </a:xfrm>
           <a:prstGeom prst="line">
             <a:avLst/>
@@ -10589,12 +10733,12 @@
         </p:nvSpPr>
         <p:spPr>
           <a:xfrm>
-            <a:off x="548640" y="1371600"/>
-            <a:ext cx="5303520" cy="3291840"/>
+            <a:off x="457200" y="1097280"/>
+            <a:ext cx="3977640" cy="3657600"/>
           </a:xfrm>
           <a:prstGeom prst="roundRect">
             <a:avLst>
-              <a:gd name="adj" fmla="val 4167"/>
+              <a:gd name="adj" fmla="val 2500"/>
             </a:avLst>
           </a:prstGeom>
           <a:solidFill>
@@ -10616,8 +10760,8 @@
         </p:nvSpPr>
         <p:spPr>
           <a:xfrm>
-            <a:off x="548640" y="1371600"/>
-            <a:ext cx="5303520" cy="365760"/>
+            <a:off x="457200" y="1097280"/>
+            <a:ext cx="3977640" cy="347472"/>
           </a:xfrm>
           <a:prstGeom prst="rect">
             <a:avLst/>
@@ -10641,8 +10785,8 @@
         </p:nvSpPr>
         <p:spPr>
           <a:xfrm>
-            <a:off x="685800" y="1417320"/>
-            <a:ext cx="5029200" cy="274320"/>
+            <a:off x="594360" y="1133856"/>
+            <a:ext cx="3703320" cy="274320"/>
           </a:xfrm>
           <a:prstGeom prst="rect">
             <a:avLst/>
@@ -10658,7 +10802,7 @@
               <a:buNone/>
             </a:pPr>
             <a:r>
-              <a:rPr lang="en-US" sz="1300" b="1" dirty="0">
+              <a:rPr lang="en-US" sz="1150" b="1" dirty="0">
                 <a:solidFill>
                   <a:srgbClr val="0284C7"/>
                 </a:solidFill>
@@ -10668,7 +10812,7 @@
               </a:rPr>
               <a:t>🏷️ MITRE ATT&amp;CK Alert Matrix</a:t>
             </a:r>
-            <a:endParaRPr lang="en-US" sz="1300" dirty="0"/>
+            <a:endParaRPr lang="en-US" sz="1150" dirty="0"/>
           </a:p>
         </p:txBody>
       </p:sp>
@@ -10680,8 +10824,8 @@
         </p:nvSpPr>
         <p:spPr>
           <a:xfrm>
-            <a:off x="731520" y="1783080"/>
-            <a:ext cx="4937760" cy="2788920"/>
+            <a:off x="594360" y="1481328"/>
+            <a:ext cx="3703320" cy="3218688"/>
           </a:xfrm>
           <a:prstGeom prst="rect">
             <a:avLst/>
@@ -10695,11 +10839,11 @@
           <a:p>
             <a:pPr>
               <a:spcBef>
-                <a:spcPts val="400"/>
-              </a:spcBef>
-            </a:pPr>
-            <a:r>
-              <a:rPr lang="en-US" sz="1050" b="1" dirty="0">
+                <a:spcPts val="300"/>
+              </a:spcBef>
+            </a:pPr>
+            <a:r>
+              <a:rPr lang="en-US" sz="950" b="1" dirty="0">
                 <a:solidFill>
                   <a:srgbClr val="0F172A"/>
                 </a:solidFill>
@@ -10711,12 +10855,12 @@
             </a:r>
             <a:pPr indent="0" marL="0">
               <a:spcBef>
-                <a:spcPts val="400"/>
-              </a:spcBef>
-              <a:buNone/>
-            </a:pPr>
-            <a:r>
-              <a:rPr lang="en-US" sz="1050" dirty="0">
+                <a:spcPts val="300"/>
+              </a:spcBef>
+              <a:buNone/>
+            </a:pPr>
+            <a:r>
+              <a:rPr lang="en-US" sz="950" dirty="0">
                 <a:solidFill>
                   <a:srgbClr val="1E293B"/>
                 </a:solidFill>
@@ -10729,12 +10873,12 @@
             </a:r>
             <a:pPr indent="0" marL="0">
               <a:spcBef>
-                <a:spcPts val="400"/>
-              </a:spcBef>
-              <a:buNone/>
-            </a:pPr>
-            <a:r>
-              <a:rPr lang="en-US" sz="1050" b="1" dirty="0">
+                <a:spcPts val="300"/>
+              </a:spcBef>
+              <a:buNone/>
+            </a:pPr>
+            <a:r>
+              <a:rPr lang="en-US" sz="950" b="1" dirty="0">
                 <a:solidFill>
                   <a:srgbClr val="0F172A"/>
                 </a:solidFill>
@@ -10746,12 +10890,12 @@
             </a:r>
             <a:pPr indent="0" marL="0">
               <a:spcBef>
-                <a:spcPts val="400"/>
-              </a:spcBef>
-              <a:buNone/>
-            </a:pPr>
-            <a:r>
-              <a:rPr lang="en-US" sz="1050" dirty="0">
+                <a:spcPts val="300"/>
+              </a:spcBef>
+              <a:buNone/>
+            </a:pPr>
+            <a:r>
+              <a:rPr lang="en-US" sz="950" dirty="0">
                 <a:solidFill>
                   <a:srgbClr val="1E293B"/>
                 </a:solidFill>
@@ -10764,12 +10908,12 @@
             </a:r>
             <a:pPr indent="0" marL="0">
               <a:spcBef>
-                <a:spcPts val="400"/>
-              </a:spcBef>
-              <a:buNone/>
-            </a:pPr>
-            <a:r>
-              <a:rPr lang="en-US" sz="1050" b="1" dirty="0">
+                <a:spcPts val="300"/>
+              </a:spcBef>
+              <a:buNone/>
+            </a:pPr>
+            <a:r>
+              <a:rPr lang="en-US" sz="950" b="1" dirty="0">
                 <a:solidFill>
                   <a:srgbClr val="0F172A"/>
                 </a:solidFill>
@@ -10781,12 +10925,12 @@
             </a:r>
             <a:pPr indent="0" marL="0">
               <a:spcBef>
-                <a:spcPts val="400"/>
-              </a:spcBef>
-              <a:buNone/>
-            </a:pPr>
-            <a:r>
-              <a:rPr lang="en-US" sz="1050" dirty="0">
+                <a:spcPts val="300"/>
+              </a:spcBef>
+              <a:buNone/>
+            </a:pPr>
+            <a:r>
+              <a:rPr lang="en-US" sz="950" dirty="0">
                 <a:solidFill>
                   <a:srgbClr val="1E293B"/>
                 </a:solidFill>
@@ -10797,7 +10941,7 @@
               <a:t>Displays a unified attack timeline linking process, network, and registry events.
 </a:t>
             </a:r>
-            <a:endParaRPr lang="en-US" sz="1050" dirty="0"/>
+            <a:endParaRPr lang="en-US" sz="950" dirty="0"/>
           </a:p>
         </p:txBody>
       </p:sp>
@@ -10809,12 +10953,12 @@
         </p:nvSpPr>
         <p:spPr>
           <a:xfrm>
-            <a:off x="6217920" y="1371600"/>
-            <a:ext cx="5394960" cy="3291840"/>
+            <a:off x="4709160" y="1097280"/>
+            <a:ext cx="3977640" cy="3657600"/>
           </a:xfrm>
           <a:prstGeom prst="roundRect">
             <a:avLst>
-              <a:gd name="adj" fmla="val 4167"/>
+              <a:gd name="adj" fmla="val 2500"/>
             </a:avLst>
           </a:prstGeom>
           <a:solidFill>
@@ -10836,8 +10980,8 @@
         </p:nvSpPr>
         <p:spPr>
           <a:xfrm>
-            <a:off x="6217920" y="1371600"/>
-            <a:ext cx="5394960" cy="365760"/>
+            <a:off x="4709160" y="1097280"/>
+            <a:ext cx="3977640" cy="347472"/>
           </a:xfrm>
           <a:prstGeom prst="rect">
             <a:avLst/>
@@ -10861,8 +11005,8 @@
         </p:nvSpPr>
         <p:spPr>
           <a:xfrm>
-            <a:off x="6355080" y="1417320"/>
-            <a:ext cx="5120640" cy="274320"/>
+            <a:off x="4846320" y="1133856"/>
+            <a:ext cx="3703320" cy="274320"/>
           </a:xfrm>
           <a:prstGeom prst="rect">
             <a:avLst/>
@@ -10878,7 +11022,7 @@
               <a:buNone/>
             </a:pPr>
             <a:r>
-              <a:rPr lang="en-US" sz="1300" b="1" dirty="0">
+              <a:rPr lang="en-US" sz="1150" b="1" dirty="0">
                 <a:solidFill>
                   <a:srgbClr val="0284C7"/>
                 </a:solidFill>
@@ -10888,7 +11032,7 @@
               </a:rPr>
               <a:t>📄 NIST SP 800-61 Rev. 2 Exporter</a:t>
             </a:r>
-            <a:endParaRPr lang="en-US" sz="1300" dirty="0"/>
+            <a:endParaRPr lang="en-US" sz="1150" dirty="0"/>
           </a:p>
         </p:txBody>
       </p:sp>
@@ -10900,8 +11044,8 @@
         </p:nvSpPr>
         <p:spPr>
           <a:xfrm>
-            <a:off x="6400800" y="1783080"/>
-            <a:ext cx="5029200" cy="2788920"/>
+            <a:off x="4846320" y="1481328"/>
+            <a:ext cx="3703320" cy="3218688"/>
           </a:xfrm>
           <a:prstGeom prst="rect">
             <a:avLst/>
@@ -10915,11 +11059,11 @@
           <a:p>
             <a:pPr>
               <a:spcBef>
-                <a:spcPts val="400"/>
-              </a:spcBef>
-            </a:pPr>
-            <a:r>
-              <a:rPr lang="en-US" sz="1050" b="1" dirty="0">
+                <a:spcPts val="300"/>
+              </a:spcBef>
+            </a:pPr>
+            <a:r>
+              <a:rPr lang="en-US" sz="950" b="1" dirty="0">
                 <a:solidFill>
                   <a:srgbClr val="0F172A"/>
                 </a:solidFill>
@@ -10931,12 +11075,12 @@
             </a:r>
             <a:pPr indent="0" marL="0">
               <a:spcBef>
-                <a:spcPts val="400"/>
-              </a:spcBef>
-              <a:buNone/>
-            </a:pPr>
-            <a:r>
-              <a:rPr lang="en-US" sz="1050" dirty="0">
+                <a:spcPts val="300"/>
+              </a:spcBef>
+              <a:buNone/>
+            </a:pPr>
+            <a:r>
+              <a:rPr lang="en-US" sz="950" dirty="0">
                 <a:solidFill>
                   <a:srgbClr val="1E293B"/>
                 </a:solidFill>
@@ -10949,12 +11093,12 @@
             </a:r>
             <a:pPr indent="0" marL="0">
               <a:spcBef>
-                <a:spcPts val="400"/>
-              </a:spcBef>
-              <a:buNone/>
-            </a:pPr>
-            <a:r>
-              <a:rPr lang="en-US" sz="1050" b="1" dirty="0">
+                <a:spcPts val="300"/>
+              </a:spcBef>
+              <a:buNone/>
+            </a:pPr>
+            <a:r>
+              <a:rPr lang="en-US" sz="950" b="1" dirty="0">
                 <a:solidFill>
                   <a:srgbClr val="0F172A"/>
                 </a:solidFill>
@@ -10966,12 +11110,12 @@
             </a:r>
             <a:pPr indent="0" marL="0">
               <a:spcBef>
-                <a:spcPts val="400"/>
-              </a:spcBef>
-              <a:buNone/>
-            </a:pPr>
-            <a:r>
-              <a:rPr lang="en-US" sz="1050" dirty="0">
+                <a:spcPts val="300"/>
+              </a:spcBef>
+              <a:buNone/>
+            </a:pPr>
+            <a:r>
+              <a:rPr lang="en-US" sz="950" dirty="0">
                 <a:solidFill>
                   <a:srgbClr val="1E293B"/>
                 </a:solidFill>
@@ -10984,12 +11128,12 @@
             </a:r>
             <a:pPr indent="0" marL="0">
               <a:spcBef>
-                <a:spcPts val="400"/>
-              </a:spcBef>
-              <a:buNone/>
-            </a:pPr>
-            <a:r>
-              <a:rPr lang="en-US" sz="1050" b="1" dirty="0">
+                <a:spcPts val="300"/>
+              </a:spcBef>
+              <a:buNone/>
+            </a:pPr>
+            <a:r>
+              <a:rPr lang="en-US" sz="950" b="1" dirty="0">
                 <a:solidFill>
                   <a:srgbClr val="0F172A"/>
                 </a:solidFill>
@@ -11001,12 +11145,12 @@
             </a:r>
             <a:pPr indent="0" marL="0">
               <a:spcBef>
-                <a:spcPts val="400"/>
-              </a:spcBef>
-              <a:buNone/>
-            </a:pPr>
-            <a:r>
-              <a:rPr lang="en-US" sz="1050" dirty="0">
+                <a:spcPts val="300"/>
+              </a:spcBef>
+              <a:buNone/>
+            </a:pPr>
+            <a:r>
+              <a:rPr lang="en-US" sz="950" dirty="0">
                 <a:solidFill>
                   <a:srgbClr val="1E293B"/>
                 </a:solidFill>
@@ -11017,7 +11161,7 @@
               <a:t>Includes full hash chains, network sockets, AI confidence scores, and containment steps.
 </a:t>
             </a:r>
-            <a:endParaRPr lang="en-US" sz="1050" dirty="0"/>
+            <a:endParaRPr lang="en-US" sz="950" dirty="0"/>
           </a:p>
         </p:txBody>
       </p:sp>
